--- a/replication/my_replication/Replication paper powerpoint.pptx
+++ b/replication/my_replication/Replication paper powerpoint.pptx
@@ -4,17 +4,26 @@
   <p:sldMasterIdLst>
     <p:sldMasterId id="2147483726" r:id="rId1"/>
   </p:sldMasterIdLst>
+  <p:notesMasterIdLst>
+    <p:notesMasterId r:id="rId18"/>
+  </p:notesMasterIdLst>
   <p:sldIdLst>
     <p:sldId id="256" r:id="rId2"/>
     <p:sldId id="257" r:id="rId3"/>
-    <p:sldId id="258" r:id="rId4"/>
-    <p:sldId id="259" r:id="rId5"/>
-    <p:sldId id="261" r:id="rId6"/>
-    <p:sldId id="264" r:id="rId7"/>
-    <p:sldId id="265" r:id="rId8"/>
-    <p:sldId id="262" r:id="rId9"/>
-    <p:sldId id="260" r:id="rId10"/>
-    <p:sldId id="263" r:id="rId11"/>
+    <p:sldId id="266" r:id="rId4"/>
+    <p:sldId id="267" r:id="rId5"/>
+    <p:sldId id="258" r:id="rId6"/>
+    <p:sldId id="259" r:id="rId7"/>
+    <p:sldId id="274" r:id="rId8"/>
+    <p:sldId id="264" r:id="rId9"/>
+    <p:sldId id="265" r:id="rId10"/>
+    <p:sldId id="262" r:id="rId11"/>
+    <p:sldId id="273" r:id="rId12"/>
+    <p:sldId id="260" r:id="rId13"/>
+    <p:sldId id="263" r:id="rId14"/>
+    <p:sldId id="269" r:id="rId15"/>
+    <p:sldId id="272" r:id="rId16"/>
+    <p:sldId id="270" r:id="rId17"/>
   </p:sldIdLst>
   <p:sldSz cx="12192000" cy="6858000"/>
   <p:notesSz cx="6858000" cy="9144000"/>
@@ -113,13 +122,18 @@
       </a:defRPr>
     </a:lvl9pPr>
   </p:defaultTextStyle>
+  <p:extLst>
+    <p:ext uri="{EFAFB233-063F-42B5-8137-9DF3F51BA10A}">
+      <p15:sldGuideLst xmlns:p15="http://schemas.microsoft.com/office/powerpoint/2012/main"/>
+    </p:ext>
+  </p:extLst>
 </p:presentation>
 </file>
 
 <file path=ppt/revisionInfo.xml><?xml version="1.0" encoding="utf-8"?>
 <p1510:revInfo xmlns:a="http://schemas.openxmlformats.org/drawingml/2006/main" xmlns:r="http://schemas.openxmlformats.org/officeDocument/2006/relationships" xmlns:p1510="http://schemas.microsoft.com/office/powerpoint/2015/10/main">
   <p1510:revLst>
-    <p1510:client id="{6E4AACD3-4DE1-46B0-8F5B-E1E8837F7896}" v="71" dt="2026-04-01T22:36:13.108"/>
+    <p1510:client id="{EA3046E3-2794-4A4E-B8C9-4205E7AFF188}" v="46" dt="2026-04-09T00:49:44.578"/>
   </p1510:revLst>
 </p1510:revInfo>
 </file>
@@ -128,8 +142,8 @@
 <pc:chgInfo xmlns:a="http://schemas.openxmlformats.org/drawingml/2006/main" xmlns:r="http://schemas.openxmlformats.org/officeDocument/2006/relationships" xmlns:ac="http://schemas.microsoft.com/office/drawing/2013/main/command" xmlns:pc="http://schemas.microsoft.com/office/powerpoint/2013/main/command">
   <pc:docChgLst>
     <pc:chgData name="Luka De Lacey" userId="7c5079d1e183509d" providerId="LiveId" clId="{023B67FE-E4C5-42E2-A7E8-295CAE2B4F0E}"/>
-    <pc:docChg chg="undo custSel addSld modSld">
-      <pc:chgData name="Luka De Lacey" userId="7c5079d1e183509d" providerId="LiveId" clId="{023B67FE-E4C5-42E2-A7E8-295CAE2B4F0E}" dt="2026-04-01T22:39:24.107" v="2880" actId="20577"/>
+    <pc:docChg chg="undo custSel addSld delSld modSld sldOrd">
+      <pc:chgData name="Luka De Lacey" userId="7c5079d1e183509d" providerId="LiveId" clId="{023B67FE-E4C5-42E2-A7E8-295CAE2B4F0E}" dt="2026-04-09T00:52:53.909" v="7778" actId="47"/>
       <pc:docMkLst>
         <pc:docMk/>
       </pc:docMkLst>
@@ -155,62 +169,6 @@
             <ac:spMk id="3" creationId="{E5CD8A4C-C664-E7EB-B686-4F1B0CE25572}"/>
           </ac:spMkLst>
         </pc:spChg>
-        <pc:spChg chg="add mod">
-          <ac:chgData name="Luka De Lacey" userId="7c5079d1e183509d" providerId="LiveId" clId="{023B67FE-E4C5-42E2-A7E8-295CAE2B4F0E}" dt="2026-03-31T11:57:01.289" v="35" actId="767"/>
-          <ac:spMkLst>
-            <pc:docMk/>
-            <pc:sldMk cId="476583238" sldId="256"/>
-            <ac:spMk id="4" creationId="{B817520D-DBC9-32AE-5EDD-3F17FE40AB53}"/>
-          </ac:spMkLst>
-        </pc:spChg>
-        <pc:spChg chg="add mod">
-          <ac:chgData name="Luka De Lacey" userId="7c5079d1e183509d" providerId="LiveId" clId="{023B67FE-E4C5-42E2-A7E8-295CAE2B4F0E}" dt="2026-03-31T11:59:26.970" v="65" actId="11529"/>
-          <ac:spMkLst>
-            <pc:docMk/>
-            <pc:sldMk cId="476583238" sldId="256"/>
-            <ac:spMk id="6" creationId="{8D3B610F-7AD6-D0EF-2872-FF1CCE94A0FE}"/>
-          </ac:spMkLst>
-        </pc:spChg>
-        <pc:spChg chg="add del mod">
-          <ac:chgData name="Luka De Lacey" userId="7c5079d1e183509d" providerId="LiveId" clId="{023B67FE-E4C5-42E2-A7E8-295CAE2B4F0E}" dt="2026-03-31T12:01:29.102" v="110" actId="478"/>
-          <ac:spMkLst>
-            <pc:docMk/>
-            <pc:sldMk cId="476583238" sldId="256"/>
-            <ac:spMk id="7" creationId="{D4A9EB6B-95F7-3FB1-3664-D2C95984F794}"/>
-          </ac:spMkLst>
-        </pc:spChg>
-        <pc:spChg chg="add del mod">
-          <ac:chgData name="Luka De Lacey" userId="7c5079d1e183509d" providerId="LiveId" clId="{023B67FE-E4C5-42E2-A7E8-295CAE2B4F0E}" dt="2026-03-31T12:02:16.259" v="114" actId="478"/>
-          <ac:spMkLst>
-            <pc:docMk/>
-            <pc:sldMk cId="476583238" sldId="256"/>
-            <ac:spMk id="8" creationId="{6EEAA834-E70C-0C5C-E3DA-E84776A8CBCC}"/>
-          </ac:spMkLst>
-        </pc:spChg>
-        <pc:spChg chg="add del">
-          <ac:chgData name="Luka De Lacey" userId="7c5079d1e183509d" providerId="LiveId" clId="{023B67FE-E4C5-42E2-A7E8-295CAE2B4F0E}" dt="2026-03-31T12:02:31.605" v="116" actId="478"/>
-          <ac:spMkLst>
-            <pc:docMk/>
-            <pc:sldMk cId="476583238" sldId="256"/>
-            <ac:spMk id="9" creationId="{50FF2AD2-EC2D-11A2-B751-B98B4333FB3C}"/>
-          </ac:spMkLst>
-        </pc:spChg>
-        <pc:spChg chg="add del mod">
-          <ac:chgData name="Luka De Lacey" userId="7c5079d1e183509d" providerId="LiveId" clId="{023B67FE-E4C5-42E2-A7E8-295CAE2B4F0E}" dt="2026-03-31T12:03:52.024" v="129" actId="478"/>
-          <ac:spMkLst>
-            <pc:docMk/>
-            <pc:sldMk cId="476583238" sldId="256"/>
-            <ac:spMk id="10" creationId="{19CF6071-F141-0E49-5A1A-0DC2F62639E2}"/>
-          </ac:spMkLst>
-        </pc:spChg>
-        <pc:spChg chg="add del mod">
-          <ac:chgData name="Luka De Lacey" userId="7c5079d1e183509d" providerId="LiveId" clId="{023B67FE-E4C5-42E2-A7E8-295CAE2B4F0E}" dt="2026-03-31T12:05:42.780" v="193" actId="11529"/>
-          <ac:spMkLst>
-            <pc:docMk/>
-            <pc:sldMk cId="476583238" sldId="256"/>
-            <ac:spMk id="11" creationId="{D8F9E8EF-DA68-CC39-4C44-8053F472B14F}"/>
-          </ac:spMkLst>
-        </pc:spChg>
         <pc:spChg chg="add del">
           <ac:chgData name="Luka De Lacey" userId="7c5079d1e183509d" providerId="LiveId" clId="{023B67FE-E4C5-42E2-A7E8-295CAE2B4F0E}" dt="2026-04-01T12:18:59.014" v="1262"/>
           <ac:spMkLst>
@@ -227,190 +185,6 @@
             <ac:spMk id="16" creationId="{6A6EF10E-DF41-4BD3-8EB4-6F646531DC26}"/>
           </ac:spMkLst>
         </pc:spChg>
-        <pc:spChg chg="add del">
-          <ac:chgData name="Luka De Lacey" userId="7c5079d1e183509d" providerId="LiveId" clId="{023B67FE-E4C5-42E2-A7E8-295CAE2B4F0E}" dt="2026-04-01T12:09:27.131" v="257"/>
-          <ac:spMkLst>
-            <pc:docMk/>
-            <pc:sldMk cId="476583238" sldId="256"/>
-            <ac:spMk id="18" creationId="{0A597D97-203B-498B-95D3-E90DC961039F}"/>
-          </ac:spMkLst>
-        </pc:spChg>
-        <pc:spChg chg="add del">
-          <ac:chgData name="Luka De Lacey" userId="7c5079d1e183509d" providerId="LiveId" clId="{023B67FE-E4C5-42E2-A7E8-295CAE2B4F0E}" dt="2026-04-01T12:09:27.131" v="257"/>
-          <ac:spMkLst>
-            <pc:docMk/>
-            <pc:sldMk cId="476583238" sldId="256"/>
-            <ac:spMk id="20" creationId="{6A6EF10E-DF41-4BD3-8EB4-6F646531DC26}"/>
-          </ac:spMkLst>
-        </pc:spChg>
-        <pc:spChg chg="add del">
-          <ac:chgData name="Luka De Lacey" userId="7c5079d1e183509d" providerId="LiveId" clId="{023B67FE-E4C5-42E2-A7E8-295CAE2B4F0E}" dt="2026-03-31T11:59:04.352" v="61"/>
-          <ac:spMkLst>
-            <pc:docMk/>
-            <pc:sldMk cId="476583238" sldId="256"/>
-            <ac:spMk id="1030" creationId="{D880886B-02ED-4317-9236-CB60C22CF7F3}"/>
-          </ac:spMkLst>
-        </pc:spChg>
-        <pc:spChg chg="add del">
-          <ac:chgData name="Luka De Lacey" userId="7c5079d1e183509d" providerId="LiveId" clId="{023B67FE-E4C5-42E2-A7E8-295CAE2B4F0E}" dt="2026-03-31T11:59:04.352" v="61"/>
-          <ac:spMkLst>
-            <pc:docMk/>
-            <pc:sldMk cId="476583238" sldId="256"/>
-            <ac:spMk id="1031" creationId="{28C31856-6ABF-41FD-B683-B06E5FFF926B}"/>
-          </ac:spMkLst>
-        </pc:spChg>
-        <pc:spChg chg="add del">
-          <ac:chgData name="Luka De Lacey" userId="7c5079d1e183509d" providerId="LiveId" clId="{023B67FE-E4C5-42E2-A7E8-295CAE2B4F0E}" dt="2026-03-31T12:01:11.599" v="106" actId="26606"/>
-          <ac:spMkLst>
-            <pc:docMk/>
-            <pc:sldMk cId="476583238" sldId="256"/>
-            <ac:spMk id="1032" creationId="{4D4677D2-D5AC-4CF9-9EED-2B89D0A1C212}"/>
-          </ac:spMkLst>
-        </pc:spChg>
-        <pc:spChg chg="add del">
-          <ac:chgData name="Luka De Lacey" userId="7c5079d1e183509d" providerId="LiveId" clId="{023B67FE-E4C5-42E2-A7E8-295CAE2B4F0E}" dt="2026-03-31T11:53:21.516" v="13" actId="26606"/>
-          <ac:spMkLst>
-            <pc:docMk/>
-            <pc:sldMk cId="476583238" sldId="256"/>
-            <ac:spMk id="1033" creationId="{A8CCCB6D-5162-4AAE-A5E3-3AC55410DBCE}"/>
-          </ac:spMkLst>
-        </pc:spChg>
-        <pc:spChg chg="add del">
-          <ac:chgData name="Luka De Lacey" userId="7c5079d1e183509d" providerId="LiveId" clId="{023B67FE-E4C5-42E2-A7E8-295CAE2B4F0E}" dt="2026-03-31T12:01:11.599" v="106" actId="26606"/>
-          <ac:spMkLst>
-            <pc:docMk/>
-            <pc:sldMk cId="476583238" sldId="256"/>
-            <ac:spMk id="1034" creationId="{AF695F69-7001-421E-98A8-E74156934A51}"/>
-          </ac:spMkLst>
-        </pc:spChg>
-        <pc:spChg chg="add del">
-          <ac:chgData name="Luka De Lacey" userId="7c5079d1e183509d" providerId="LiveId" clId="{023B67FE-E4C5-42E2-A7E8-295CAE2B4F0E}" dt="2026-03-31T11:53:21.516" v="13" actId="26606"/>
-          <ac:spMkLst>
-            <pc:docMk/>
-            <pc:sldMk cId="476583238" sldId="256"/>
-            <ac:spMk id="1035" creationId="{0BCD8C04-CC7B-40EF-82EB-E9821F79BB86}"/>
-          </ac:spMkLst>
-        </pc:spChg>
-        <pc:spChg chg="add del">
-          <ac:chgData name="Luka De Lacey" userId="7c5079d1e183509d" providerId="LiveId" clId="{023B67FE-E4C5-42E2-A7E8-295CAE2B4F0E}" dt="2026-03-31T12:05:57.861" v="194" actId="26606"/>
-          <ac:spMkLst>
-            <pc:docMk/>
-            <pc:sldMk cId="476583238" sldId="256"/>
-            <ac:spMk id="1036" creationId="{E0311CE5-3D05-493E-B9D2-CF549DF73DC5}"/>
-          </ac:spMkLst>
-        </pc:spChg>
-        <pc:spChg chg="add del">
-          <ac:chgData name="Luka De Lacey" userId="7c5079d1e183509d" providerId="LiveId" clId="{023B67FE-E4C5-42E2-A7E8-295CAE2B4F0E}" dt="2026-03-31T11:53:23.144" v="15" actId="26606"/>
-          <ac:spMkLst>
-            <pc:docMk/>
-            <pc:sldMk cId="476583238" sldId="256"/>
-            <ac:spMk id="1038" creationId="{F29C2C85-1492-463C-B805-3FD3FCE93360}"/>
-          </ac:spMkLst>
-        </pc:spChg>
-        <pc:spChg chg="add del">
-          <ac:chgData name="Luka De Lacey" userId="7c5079d1e183509d" providerId="LiveId" clId="{023B67FE-E4C5-42E2-A7E8-295CAE2B4F0E}" dt="2026-03-31T11:53:23.144" v="15" actId="26606"/>
-          <ac:spMkLst>
-            <pc:docMk/>
-            <pc:sldMk cId="476583238" sldId="256"/>
-            <ac:spMk id="1039" creationId="{8ED94938-268E-4C0A-A08A-B3980C78BAEB}"/>
-          </ac:spMkLst>
-        </pc:spChg>
-        <pc:spChg chg="add del">
-          <ac:chgData name="Luka De Lacey" userId="7c5079d1e183509d" providerId="LiveId" clId="{023B67FE-E4C5-42E2-A7E8-295CAE2B4F0E}" dt="2026-04-01T12:08:01.360" v="236"/>
-          <ac:spMkLst>
-            <pc:docMk/>
-            <pc:sldMk cId="476583238" sldId="256"/>
-            <ac:spMk id="1041" creationId="{0A597D97-203B-498B-95D3-E90DC961039F}"/>
-          </ac:spMkLst>
-        </pc:spChg>
-        <pc:spChg chg="add del">
-          <ac:chgData name="Luka De Lacey" userId="7c5079d1e183509d" providerId="LiveId" clId="{023B67FE-E4C5-42E2-A7E8-295CAE2B4F0E}" dt="2026-04-01T12:08:01.360" v="236"/>
-          <ac:spMkLst>
-            <pc:docMk/>
-            <pc:sldMk cId="476583238" sldId="256"/>
-            <ac:spMk id="1043" creationId="{6A6EF10E-DF41-4BD3-8EB4-6F646531DC26}"/>
-          </ac:spMkLst>
-        </pc:spChg>
-        <pc:spChg chg="add del">
-          <ac:chgData name="Luka De Lacey" userId="7c5079d1e183509d" providerId="LiveId" clId="{023B67FE-E4C5-42E2-A7E8-295CAE2B4F0E}" dt="2026-03-31T11:53:26.550" v="19" actId="26606"/>
-          <ac:spMkLst>
-            <pc:docMk/>
-            <pc:sldMk cId="476583238" sldId="256"/>
-            <ac:spMk id="1045" creationId="{A8CCCB6D-5162-4AAE-A5E3-3AC55410DBCE}"/>
-          </ac:spMkLst>
-        </pc:spChg>
-        <pc:spChg chg="add del">
-          <ac:chgData name="Luka De Lacey" userId="7c5079d1e183509d" providerId="LiveId" clId="{023B67FE-E4C5-42E2-A7E8-295CAE2B4F0E}" dt="2026-03-31T11:53:26.550" v="19" actId="26606"/>
-          <ac:spMkLst>
-            <pc:docMk/>
-            <pc:sldMk cId="476583238" sldId="256"/>
-            <ac:spMk id="1046" creationId="{0BCD8C04-CC7B-40EF-82EB-E9821F79BB86}"/>
-          </ac:spMkLst>
-        </pc:spChg>
-        <pc:spChg chg="add del">
-          <ac:chgData name="Luka De Lacey" userId="7c5079d1e183509d" providerId="LiveId" clId="{023B67FE-E4C5-42E2-A7E8-295CAE2B4F0E}" dt="2026-03-31T11:58:24.711" v="45" actId="26606"/>
-          <ac:spMkLst>
-            <pc:docMk/>
-            <pc:sldMk cId="476583238" sldId="256"/>
-            <ac:spMk id="1051" creationId="{A8CCCB6D-5162-4AAE-A5E3-3AC55410DBCE}"/>
-          </ac:spMkLst>
-        </pc:spChg>
-        <pc:spChg chg="add del">
-          <ac:chgData name="Luka De Lacey" userId="7c5079d1e183509d" providerId="LiveId" clId="{023B67FE-E4C5-42E2-A7E8-295CAE2B4F0E}" dt="2026-03-31T11:58:24.711" v="45" actId="26606"/>
-          <ac:spMkLst>
-            <pc:docMk/>
-            <pc:sldMk cId="476583238" sldId="256"/>
-            <ac:spMk id="1052" creationId="{0BCD8C04-CC7B-40EF-82EB-E9821F79BB86}"/>
-          </ac:spMkLst>
-        </pc:spChg>
-        <pc:spChg chg="add del">
-          <ac:chgData name="Luka De Lacey" userId="7c5079d1e183509d" providerId="LiveId" clId="{023B67FE-E4C5-42E2-A7E8-295CAE2B4F0E}" dt="2026-03-31T11:58:24.340" v="43" actId="26606"/>
-          <ac:spMkLst>
-            <pc:docMk/>
-            <pc:sldMk cId="476583238" sldId="256"/>
-            <ac:spMk id="1057" creationId="{A8CCCB6D-5162-4AAE-A5E3-3AC55410DBCE}"/>
-          </ac:spMkLst>
-        </pc:spChg>
-        <pc:spChg chg="add del">
-          <ac:chgData name="Luka De Lacey" userId="7c5079d1e183509d" providerId="LiveId" clId="{023B67FE-E4C5-42E2-A7E8-295CAE2B4F0E}" dt="2026-03-31T11:58:24.340" v="43" actId="26606"/>
-          <ac:spMkLst>
-            <pc:docMk/>
-            <pc:sldMk cId="476583238" sldId="256"/>
-            <ac:spMk id="1059" creationId="{0BCD8C04-CC7B-40EF-82EB-E9821F79BB86}"/>
-          </ac:spMkLst>
-        </pc:spChg>
-        <pc:grpChg chg="add del">
-          <ac:chgData name="Luka De Lacey" userId="7c5079d1e183509d" providerId="LiveId" clId="{023B67FE-E4C5-42E2-A7E8-295CAE2B4F0E}" dt="2026-03-31T11:53:23.144" v="15" actId="26606"/>
-          <ac:grpSpMkLst>
-            <pc:docMk/>
-            <pc:sldMk cId="476583238" sldId="256"/>
-            <ac:grpSpMk id="1040" creationId="{B83D307E-DF68-43F8-97CE-0AAE950A7129}"/>
-          </ac:grpSpMkLst>
-        </pc:grpChg>
-        <pc:grpChg chg="add del">
-          <ac:chgData name="Luka De Lacey" userId="7c5079d1e183509d" providerId="LiveId" clId="{023B67FE-E4C5-42E2-A7E8-295CAE2B4F0E}" dt="2026-03-31T11:53:25.767" v="17" actId="26606"/>
-          <ac:grpSpMkLst>
-            <pc:docMk/>
-            <pc:sldMk cId="476583238" sldId="256"/>
-            <ac:grpSpMk id="1042" creationId="{4FAA5DCB-E796-5631-BEDF-C3538DF184E0}"/>
-          </ac:grpSpMkLst>
-        </pc:grpChg>
-        <pc:grpChg chg="add del">
-          <ac:chgData name="Luka De Lacey" userId="7c5079d1e183509d" providerId="LiveId" clId="{023B67FE-E4C5-42E2-A7E8-295CAE2B4F0E}" dt="2026-03-31T11:53:30.450" v="21" actId="26606"/>
-          <ac:grpSpMkLst>
-            <pc:docMk/>
-            <pc:sldMk cId="476583238" sldId="256"/>
-            <ac:grpSpMk id="1048" creationId="{4FAA5DCB-E796-5631-BEDF-C3538DF184E0}"/>
-          </ac:grpSpMkLst>
-        </pc:grpChg>
-        <pc:picChg chg="add mod">
-          <ac:chgData name="Luka De Lacey" userId="7c5079d1e183509d" providerId="LiveId" clId="{023B67FE-E4C5-42E2-A7E8-295CAE2B4F0E}" dt="2026-03-31T11:58:27.773" v="49" actId="571"/>
-          <ac:picMkLst>
-            <pc:docMk/>
-            <pc:sldMk cId="476583238" sldId="256"/>
-            <ac:picMk id="5" creationId="{7B0744A7-BA37-1F07-D35C-40AB70EB155C}"/>
-          </ac:picMkLst>
-        </pc:picChg>
         <pc:picChg chg="add mod ord">
           <ac:chgData name="Luka De Lacey" userId="7c5079d1e183509d" providerId="LiveId" clId="{023B67FE-E4C5-42E2-A7E8-295CAE2B4F0E}" dt="2026-04-01T12:12:16.408" v="280" actId="1582"/>
           <ac:picMkLst>
@@ -427,31 +201,15 @@
             <ac:picMk id="13" creationId="{01D99EB4-3E9F-10FA-476C-762BBA5F2A6C}"/>
           </ac:picMkLst>
         </pc:picChg>
-        <pc:picChg chg="add del mod ord">
-          <ac:chgData name="Luka De Lacey" userId="7c5079d1e183509d" providerId="LiveId" clId="{023B67FE-E4C5-42E2-A7E8-295CAE2B4F0E}" dt="2026-04-01T12:07:55.715" v="233" actId="478"/>
-          <ac:picMkLst>
-            <pc:docMk/>
-            <pc:sldMk cId="476583238" sldId="256"/>
-            <ac:picMk id="1026" creationId="{0391E73D-8B5E-E274-E9D1-12E16758223B}"/>
-          </ac:picMkLst>
-        </pc:picChg>
-        <pc:picChg chg="add del mod ord">
-          <ac:chgData name="Luka De Lacey" userId="7c5079d1e183509d" providerId="LiveId" clId="{023B67FE-E4C5-42E2-A7E8-295CAE2B4F0E}" dt="2026-04-01T12:07:56.269" v="234" actId="478"/>
-          <ac:picMkLst>
-            <pc:docMk/>
-            <pc:sldMk cId="476583238" sldId="256"/>
-            <ac:picMk id="1028" creationId="{31F2BCB8-D581-BA88-1D08-F7927CD2392B}"/>
-          </ac:picMkLst>
-        </pc:picChg>
       </pc:sldChg>
       <pc:sldChg chg="modSp new mod">
-        <pc:chgData name="Luka De Lacey" userId="7c5079d1e183509d" providerId="LiveId" clId="{023B67FE-E4C5-42E2-A7E8-295CAE2B4F0E}" dt="2026-04-01T22:37:25.388" v="2582" actId="20577"/>
+        <pc:chgData name="Luka De Lacey" userId="7c5079d1e183509d" providerId="LiveId" clId="{023B67FE-E4C5-42E2-A7E8-295CAE2B4F0E}" dt="2026-04-09T00:36:25.751" v="6872" actId="113"/>
         <pc:sldMkLst>
           <pc:docMk/>
           <pc:sldMk cId="1066043099" sldId="257"/>
         </pc:sldMkLst>
         <pc:spChg chg="mod">
-          <ac:chgData name="Luka De Lacey" userId="7c5079d1e183509d" providerId="LiveId" clId="{023B67FE-E4C5-42E2-A7E8-295CAE2B4F0E}" dt="2026-04-01T12:18:59.014" v="1262"/>
+          <ac:chgData name="Luka De Lacey" userId="7c5079d1e183509d" providerId="LiveId" clId="{023B67FE-E4C5-42E2-A7E8-295CAE2B4F0E}" dt="2026-04-09T00:36:25.751" v="6872" actId="113"/>
           <ac:spMkLst>
             <pc:docMk/>
             <pc:sldMk cId="1066043099" sldId="257"/>
@@ -459,7 +217,7 @@
           </ac:spMkLst>
         </pc:spChg>
         <pc:spChg chg="mod">
-          <ac:chgData name="Luka De Lacey" userId="7c5079d1e183509d" providerId="LiveId" clId="{023B67FE-E4C5-42E2-A7E8-295CAE2B4F0E}" dt="2026-04-01T22:37:25.388" v="2582" actId="20577"/>
+          <ac:chgData name="Luka De Lacey" userId="7c5079d1e183509d" providerId="LiveId" clId="{023B67FE-E4C5-42E2-A7E8-295CAE2B4F0E}" dt="2026-04-09T00:34:41.571" v="6829" actId="20577"/>
           <ac:spMkLst>
             <pc:docMk/>
             <pc:sldMk cId="1066043099" sldId="257"/>
@@ -467,14 +225,14 @@
           </ac:spMkLst>
         </pc:spChg>
       </pc:sldChg>
-      <pc:sldChg chg="modSp new mod">
-        <pc:chgData name="Luka De Lacey" userId="7c5079d1e183509d" providerId="LiveId" clId="{023B67FE-E4C5-42E2-A7E8-295CAE2B4F0E}" dt="2026-04-01T12:20:08.907" v="1334" actId="5793"/>
+      <pc:sldChg chg="addSp delSp modSp new mod ord setBg modNotesTx">
+        <pc:chgData name="Luka De Lacey" userId="7c5079d1e183509d" providerId="LiveId" clId="{023B67FE-E4C5-42E2-A7E8-295CAE2B4F0E}" dt="2026-04-09T00:45:28.170" v="7205" actId="26606"/>
         <pc:sldMkLst>
           <pc:docMk/>
           <pc:sldMk cId="4214789934" sldId="258"/>
         </pc:sldMkLst>
         <pc:spChg chg="mod">
-          <ac:chgData name="Luka De Lacey" userId="7c5079d1e183509d" providerId="LiveId" clId="{023B67FE-E4C5-42E2-A7E8-295CAE2B4F0E}" dt="2026-04-01T12:18:59.014" v="1262"/>
+          <ac:chgData name="Luka De Lacey" userId="7c5079d1e183509d" providerId="LiveId" clId="{023B67FE-E4C5-42E2-A7E8-295CAE2B4F0E}" dt="2026-04-09T00:45:28.170" v="7205" actId="26606"/>
           <ac:spMkLst>
             <pc:docMk/>
             <pc:sldMk cId="4214789934" sldId="258"/>
@@ -482,34 +240,74 @@
           </ac:spMkLst>
         </pc:spChg>
         <pc:spChg chg="mod">
-          <ac:chgData name="Luka De Lacey" userId="7c5079d1e183509d" providerId="LiveId" clId="{023B67FE-E4C5-42E2-A7E8-295CAE2B4F0E}" dt="2026-04-01T12:20:08.907" v="1334" actId="5793"/>
+          <ac:chgData name="Luka De Lacey" userId="7c5079d1e183509d" providerId="LiveId" clId="{023B67FE-E4C5-42E2-A7E8-295CAE2B4F0E}" dt="2026-04-09T00:45:28.170" v="7205" actId="26606"/>
           <ac:spMkLst>
             <pc:docMk/>
             <pc:sldMk cId="4214789934" sldId="258"/>
             <ac:spMk id="3" creationId="{ADB2CDDA-ACA5-6BC2-18DB-72E3A581C60C}"/>
           </ac:spMkLst>
         </pc:spChg>
+        <pc:spChg chg="add">
+          <ac:chgData name="Luka De Lacey" userId="7c5079d1e183509d" providerId="LiveId" clId="{023B67FE-E4C5-42E2-A7E8-295CAE2B4F0E}" dt="2026-04-09T00:45:28.170" v="7205" actId="26606"/>
+          <ac:spMkLst>
+            <pc:docMk/>
+            <pc:sldMk cId="4214789934" sldId="258"/>
+            <ac:spMk id="5" creationId="{DBF61EA3-B236-439E-9C0B-340980D56BEE}"/>
+          </ac:spMkLst>
+        </pc:spChg>
+        <pc:spChg chg="add del">
+          <ac:chgData name="Luka De Lacey" userId="7c5079d1e183509d" providerId="LiveId" clId="{023B67FE-E4C5-42E2-A7E8-295CAE2B4F0E}" dt="2026-04-09T00:45:26.701" v="7204" actId="26606"/>
+          <ac:spMkLst>
+            <pc:docMk/>
+            <pc:sldMk cId="4214789934" sldId="258"/>
+            <ac:spMk id="8" creationId="{DBF61EA3-B236-439E-9C0B-340980D56BEE}"/>
+          </ac:spMkLst>
+        </pc:spChg>
+        <pc:spChg chg="add">
+          <ac:chgData name="Luka De Lacey" userId="7c5079d1e183509d" providerId="LiveId" clId="{023B67FE-E4C5-42E2-A7E8-295CAE2B4F0E}" dt="2026-04-09T00:45:28.170" v="7205" actId="26606"/>
+          <ac:spMkLst>
+            <pc:docMk/>
+            <pc:sldMk cId="4214789934" sldId="258"/>
+            <ac:spMk id="13" creationId="{E659831F-0D9A-4C63-9EBB-8435B85A440F}"/>
+          </ac:spMkLst>
+        </pc:spChg>
+        <pc:spChg chg="add del">
+          <ac:chgData name="Luka De Lacey" userId="7c5079d1e183509d" providerId="LiveId" clId="{023B67FE-E4C5-42E2-A7E8-295CAE2B4F0E}" dt="2026-04-09T00:45:26.701" v="7204" actId="26606"/>
+          <ac:spMkLst>
+            <pc:docMk/>
+            <pc:sldMk cId="4214789934" sldId="258"/>
+            <ac:spMk id="14" creationId="{E659831F-0D9A-4C63-9EBB-8435B85A440F}"/>
+          </ac:spMkLst>
+        </pc:spChg>
+        <pc:grpChg chg="add">
+          <ac:chgData name="Luka De Lacey" userId="7c5079d1e183509d" providerId="LiveId" clId="{023B67FE-E4C5-42E2-A7E8-295CAE2B4F0E}" dt="2026-04-09T00:45:28.170" v="7205" actId="26606"/>
+          <ac:grpSpMkLst>
+            <pc:docMk/>
+            <pc:sldMk cId="4214789934" sldId="258"/>
+            <ac:grpSpMk id="6" creationId="{28FAF094-D087-493F-8DF9-A486C2D6BBAA}"/>
+          </ac:grpSpMkLst>
+        </pc:grpChg>
+        <pc:grpChg chg="add del">
+          <ac:chgData name="Luka De Lacey" userId="7c5079d1e183509d" providerId="LiveId" clId="{023B67FE-E4C5-42E2-A7E8-295CAE2B4F0E}" dt="2026-04-09T00:45:26.701" v="7204" actId="26606"/>
+          <ac:grpSpMkLst>
+            <pc:docMk/>
+            <pc:sldMk cId="4214789934" sldId="258"/>
+            <ac:grpSpMk id="10" creationId="{28FAF094-D087-493F-8DF9-A486C2D6BBAA}"/>
+          </ac:grpSpMkLst>
+        </pc:grpChg>
       </pc:sldChg>
       <pc:sldChg chg="addSp delSp modSp new mod">
-        <pc:chgData name="Luka De Lacey" userId="7c5079d1e183509d" providerId="LiveId" clId="{023B67FE-E4C5-42E2-A7E8-295CAE2B4F0E}" dt="2026-04-01T12:39:58.647" v="1754" actId="1076"/>
+        <pc:chgData name="Luka De Lacey" userId="7c5079d1e183509d" providerId="LiveId" clId="{023B67FE-E4C5-42E2-A7E8-295CAE2B4F0E}" dt="2026-04-09T00:45:43.966" v="7206" actId="2711"/>
         <pc:sldMkLst>
           <pc:docMk/>
           <pc:sldMk cId="548152171" sldId="259"/>
         </pc:sldMkLst>
         <pc:spChg chg="mod">
-          <ac:chgData name="Luka De Lacey" userId="7c5079d1e183509d" providerId="LiveId" clId="{023B67FE-E4C5-42E2-A7E8-295CAE2B4F0E}" dt="2026-04-01T12:39:50.215" v="1753" actId="113"/>
+          <ac:chgData name="Luka De Lacey" userId="7c5079d1e183509d" providerId="LiveId" clId="{023B67FE-E4C5-42E2-A7E8-295CAE2B4F0E}" dt="2026-04-09T00:45:43.966" v="7206" actId="2711"/>
           <ac:spMkLst>
             <pc:docMk/>
             <pc:sldMk cId="548152171" sldId="259"/>
             <ac:spMk id="2" creationId="{5F30F0C3-2FE7-70DA-3774-99ABB816E4D7}"/>
-          </ac:spMkLst>
-        </pc:spChg>
-        <pc:spChg chg="del">
-          <ac:chgData name="Luka De Lacey" userId="7c5079d1e183509d" providerId="LiveId" clId="{023B67FE-E4C5-42E2-A7E8-295CAE2B4F0E}" dt="2026-04-01T12:24:31.075" v="1361" actId="3680"/>
-          <ac:spMkLst>
-            <pc:docMk/>
-            <pc:sldMk cId="548152171" sldId="259"/>
-            <ac:spMk id="3" creationId="{494D9CC9-2B8C-F9D7-AA67-EC00FF0C19DC}"/>
           </ac:spMkLst>
         </pc:spChg>
         <pc:graphicFrameChg chg="add mod ord modGraphic">
@@ -520,30 +318,6 @@
             <ac:graphicFrameMk id="12" creationId="{33D1ED65-7FAB-DA62-1653-07B6230945C7}"/>
           </ac:graphicFrameMkLst>
         </pc:graphicFrameChg>
-        <pc:picChg chg="add del mod">
-          <ac:chgData name="Luka De Lacey" userId="7c5079d1e183509d" providerId="LiveId" clId="{023B67FE-E4C5-42E2-A7E8-295CAE2B4F0E}" dt="2026-04-01T12:34:45.008" v="1694" actId="478"/>
-          <ac:picMkLst>
-            <pc:docMk/>
-            <pc:sldMk cId="548152171" sldId="259"/>
-            <ac:picMk id="5" creationId="{BEF540AB-39B7-7B01-0AAE-1FE830A4777A}"/>
-          </ac:picMkLst>
-        </pc:picChg>
-        <pc:picChg chg="add del mod modCrop">
-          <ac:chgData name="Luka De Lacey" userId="7c5079d1e183509d" providerId="LiveId" clId="{023B67FE-E4C5-42E2-A7E8-295CAE2B4F0E}" dt="2026-04-01T12:34:43.696" v="1692" actId="478"/>
-          <ac:picMkLst>
-            <pc:docMk/>
-            <pc:sldMk cId="548152171" sldId="259"/>
-            <ac:picMk id="7" creationId="{0BE5168F-1085-DD13-77CC-B178DFD3A57E}"/>
-          </ac:picMkLst>
-        </pc:picChg>
-        <pc:picChg chg="add del mod">
-          <ac:chgData name="Luka De Lacey" userId="7c5079d1e183509d" providerId="LiveId" clId="{023B67FE-E4C5-42E2-A7E8-295CAE2B4F0E}" dt="2026-04-01T12:34:44.341" v="1693" actId="478"/>
-          <ac:picMkLst>
-            <pc:docMk/>
-            <pc:sldMk cId="548152171" sldId="259"/>
-            <ac:picMk id="9" creationId="{2F26E01A-7E44-C904-D255-70F62768B90C}"/>
-          </ac:picMkLst>
-        </pc:picChg>
         <pc:picChg chg="add del">
           <ac:chgData name="Luka De Lacey" userId="7c5079d1e183509d" providerId="LiveId" clId="{023B67FE-E4C5-42E2-A7E8-295CAE2B4F0E}" dt="2026-04-01T12:24:24.251" v="1360" actId="478"/>
           <ac:picMkLst>
@@ -554,7 +328,7 @@
         </pc:picChg>
       </pc:sldChg>
       <pc:sldChg chg="modSp new mod">
-        <pc:chgData name="Luka De Lacey" userId="7c5079d1e183509d" providerId="LiveId" clId="{023B67FE-E4C5-42E2-A7E8-295CAE2B4F0E}" dt="2026-04-01T22:39:24.107" v="2880" actId="20577"/>
+        <pc:chgData name="Luka De Lacey" userId="7c5079d1e183509d" providerId="LiveId" clId="{023B67FE-E4C5-42E2-A7E8-295CAE2B4F0E}" dt="2026-04-08T23:23:05.505" v="4682" actId="20577"/>
         <pc:sldMkLst>
           <pc:docMk/>
           <pc:sldMk cId="519172753" sldId="260"/>
@@ -568,7 +342,7 @@
           </ac:spMkLst>
         </pc:spChg>
         <pc:spChg chg="mod">
-          <ac:chgData name="Luka De Lacey" userId="7c5079d1e183509d" providerId="LiveId" clId="{023B67FE-E4C5-42E2-A7E8-295CAE2B4F0E}" dt="2026-04-01T22:39:24.107" v="2880" actId="20577"/>
+          <ac:chgData name="Luka De Lacey" userId="7c5079d1e183509d" providerId="LiveId" clId="{023B67FE-E4C5-42E2-A7E8-295CAE2B4F0E}" dt="2026-04-08T23:23:05.505" v="4682" actId="20577"/>
           <ac:spMkLst>
             <pc:docMk/>
             <pc:sldMk cId="519172753" sldId="260"/>
@@ -576,14 +350,14 @@
           </ac:spMkLst>
         </pc:spChg>
       </pc:sldChg>
-      <pc:sldChg chg="addSp delSp modSp new mod">
-        <pc:chgData name="Luka De Lacey" userId="7c5079d1e183509d" providerId="LiveId" clId="{023B67FE-E4C5-42E2-A7E8-295CAE2B4F0E}" dt="2026-04-01T22:38:36.735" v="2767" actId="20577"/>
+      <pc:sldChg chg="addSp delSp modSp new del mod">
+        <pc:chgData name="Luka De Lacey" userId="7c5079d1e183509d" providerId="LiveId" clId="{023B67FE-E4C5-42E2-A7E8-295CAE2B4F0E}" dt="2026-04-09T00:47:18.933" v="7230" actId="47"/>
         <pc:sldMkLst>
           <pc:docMk/>
           <pc:sldMk cId="1484755537" sldId="261"/>
         </pc:sldMkLst>
         <pc:spChg chg="mod">
-          <ac:chgData name="Luka De Lacey" userId="7c5079d1e183509d" providerId="LiveId" clId="{023B67FE-E4C5-42E2-A7E8-295CAE2B4F0E}" dt="2026-04-01T22:37:53.916" v="2640" actId="404"/>
+          <ac:chgData name="Luka De Lacey" userId="7c5079d1e183509d" providerId="LiveId" clId="{023B67FE-E4C5-42E2-A7E8-295CAE2B4F0E}" dt="2026-04-08T23:12:49.386" v="3748" actId="113"/>
           <ac:spMkLst>
             <pc:docMk/>
             <pc:sldMk cId="1484755537" sldId="261"/>
@@ -591,31 +365,23 @@
           </ac:spMkLst>
         </pc:spChg>
         <pc:spChg chg="mod">
-          <ac:chgData name="Luka De Lacey" userId="7c5079d1e183509d" providerId="LiveId" clId="{023B67FE-E4C5-42E2-A7E8-295CAE2B4F0E}" dt="2026-04-01T22:38:36.735" v="2767" actId="20577"/>
+          <ac:chgData name="Luka De Lacey" userId="7c5079d1e183509d" providerId="LiveId" clId="{023B67FE-E4C5-42E2-A7E8-295CAE2B4F0E}" dt="2026-04-09T00:46:10.708" v="7214" actId="27636"/>
           <ac:spMkLst>
             <pc:docMk/>
             <pc:sldMk cId="1484755537" sldId="261"/>
             <ac:spMk id="3" creationId="{6BA83EF5-088B-8C41-5C03-6D1B990B292E}"/>
           </ac:spMkLst>
         </pc:spChg>
-        <pc:spChg chg="add mod topLvl">
-          <ac:chgData name="Luka De Lacey" userId="7c5079d1e183509d" providerId="LiveId" clId="{023B67FE-E4C5-42E2-A7E8-295CAE2B4F0E}" dt="2026-04-01T22:38:29.641" v="2752" actId="1076"/>
+        <pc:spChg chg="add del mod topLvl">
+          <ac:chgData name="Luka De Lacey" userId="7c5079d1e183509d" providerId="LiveId" clId="{023B67FE-E4C5-42E2-A7E8-295CAE2B4F0E}" dt="2026-04-09T00:46:18.019" v="7217" actId="21"/>
           <ac:spMkLst>
             <pc:docMk/>
             <pc:sldMk cId="1484755537" sldId="261"/>
             <ac:spMk id="7" creationId="{C5D975A9-0AE5-8777-CC8D-725776B51E87}"/>
           </ac:spMkLst>
         </pc:spChg>
-        <pc:grpChg chg="add del mod">
-          <ac:chgData name="Luka De Lacey" userId="7c5079d1e183509d" providerId="LiveId" clId="{023B67FE-E4C5-42E2-A7E8-295CAE2B4F0E}" dt="2026-04-01T21:50:34.064" v="2133" actId="165"/>
-          <ac:grpSpMkLst>
-            <pc:docMk/>
-            <pc:sldMk cId="1484755537" sldId="261"/>
-            <ac:grpSpMk id="8" creationId="{16046D36-31A9-1AA5-0363-3777FC37FF98}"/>
-          </ac:grpSpMkLst>
-        </pc:grpChg>
-        <pc:picChg chg="add mod topLvl">
-          <ac:chgData name="Luka De Lacey" userId="7c5079d1e183509d" providerId="LiveId" clId="{023B67FE-E4C5-42E2-A7E8-295CAE2B4F0E}" dt="2026-04-01T22:38:29.641" v="2752" actId="1076"/>
+        <pc:picChg chg="add del mod topLvl modCrop">
+          <ac:chgData name="Luka De Lacey" userId="7c5079d1e183509d" providerId="LiveId" clId="{023B67FE-E4C5-42E2-A7E8-295CAE2B4F0E}" dt="2026-04-09T00:46:18.019" v="7217" actId="21"/>
           <ac:picMkLst>
             <pc:docMk/>
             <pc:sldMk cId="1484755537" sldId="261"/>
@@ -624,13 +390,29 @@
         </pc:picChg>
       </pc:sldChg>
       <pc:sldChg chg="addSp modSp new mod">
-        <pc:chgData name="Luka De Lacey" userId="7c5079d1e183509d" providerId="LiveId" clId="{023B67FE-E4C5-42E2-A7E8-295CAE2B4F0E}" dt="2026-04-01T22:34:52.566" v="2211" actId="1076"/>
+        <pc:chgData name="Luka De Lacey" userId="7c5079d1e183509d" providerId="LiveId" clId="{023B67FE-E4C5-42E2-A7E8-295CAE2B4F0E}" dt="2026-04-09T00:49:57.527" v="7343" actId="1076"/>
         <pc:sldMkLst>
           <pc:docMk/>
           <pc:sldMk cId="3376276946" sldId="262"/>
         </pc:sldMkLst>
+        <pc:spChg chg="mod">
+          <ac:chgData name="Luka De Lacey" userId="7c5079d1e183509d" providerId="LiveId" clId="{023B67FE-E4C5-42E2-A7E8-295CAE2B4F0E}" dt="2026-04-08T23:18:39.133" v="4324" actId="14100"/>
+          <ac:spMkLst>
+            <pc:docMk/>
+            <pc:sldMk cId="3376276946" sldId="262"/>
+            <ac:spMk id="2" creationId="{777A5E61-73B1-744D-B3DF-948FFAC86125}"/>
+          </ac:spMkLst>
+        </pc:spChg>
+        <pc:spChg chg="mod">
+          <ac:chgData name="Luka De Lacey" userId="7c5079d1e183509d" providerId="LiveId" clId="{023B67FE-E4C5-42E2-A7E8-295CAE2B4F0E}" dt="2026-04-09T00:03:43.224" v="6188"/>
+          <ac:spMkLst>
+            <pc:docMk/>
+            <pc:sldMk cId="3376276946" sldId="262"/>
+            <ac:spMk id="3" creationId="{C50329FD-A7F1-47DF-54DD-BC573B81BFE0}"/>
+          </ac:spMkLst>
+        </pc:spChg>
         <pc:picChg chg="add mod">
-          <ac:chgData name="Luka De Lacey" userId="7c5079d1e183509d" providerId="LiveId" clId="{023B67FE-E4C5-42E2-A7E8-295CAE2B4F0E}" dt="2026-04-01T22:34:52.566" v="2211" actId="1076"/>
+          <ac:chgData name="Luka De Lacey" userId="7c5079d1e183509d" providerId="LiveId" clId="{023B67FE-E4C5-42E2-A7E8-295CAE2B4F0E}" dt="2026-04-09T00:49:57.527" v="7343" actId="1076"/>
           <ac:picMkLst>
             <pc:docMk/>
             <pc:sldMk cId="3376276946" sldId="262"/>
@@ -639,29 +421,37 @@
         </pc:picChg>
       </pc:sldChg>
       <pc:sldChg chg="addSp delSp modSp add mod">
-        <pc:chgData name="Luka De Lacey" userId="7c5079d1e183509d" providerId="LiveId" clId="{023B67FE-E4C5-42E2-A7E8-295CAE2B4F0E}" dt="2026-04-01T22:34:24.001" v="2203" actId="1076"/>
+        <pc:chgData name="Luka De Lacey" userId="7c5079d1e183509d" providerId="LiveId" clId="{023B67FE-E4C5-42E2-A7E8-295CAE2B4F0E}" dt="2026-04-09T00:03:18.021" v="6180" actId="22"/>
         <pc:sldMkLst>
           <pc:docMk/>
           <pc:sldMk cId="1623963838" sldId="263"/>
         </pc:sldMkLst>
-        <pc:spChg chg="del">
-          <ac:chgData name="Luka De Lacey" userId="7c5079d1e183509d" providerId="LiveId" clId="{023B67FE-E4C5-42E2-A7E8-295CAE2B4F0E}" dt="2026-04-01T22:34:11.126" v="2199" actId="478"/>
+        <pc:spChg chg="mod">
+          <ac:chgData name="Luka De Lacey" userId="7c5079d1e183509d" providerId="LiveId" clId="{023B67FE-E4C5-42E2-A7E8-295CAE2B4F0E}" dt="2026-04-08T23:42:21.121" v="4688" actId="14100"/>
           <ac:spMkLst>
             <pc:docMk/>
             <pc:sldMk cId="1623963838" sldId="263"/>
-            <ac:spMk id="3" creationId="{13801C23-3A6F-73B1-F02C-C45E18E3004E}"/>
+            <ac:spMk id="2" creationId="{987F3E01-D506-8B73-734E-8E1250193E5D}"/>
           </ac:spMkLst>
         </pc:spChg>
         <pc:spChg chg="add mod">
-          <ac:chgData name="Luka De Lacey" userId="7c5079d1e183509d" providerId="LiveId" clId="{023B67FE-E4C5-42E2-A7E8-295CAE2B4F0E}" dt="2026-04-01T22:34:11.126" v="2199" actId="478"/>
+          <ac:chgData name="Luka De Lacey" userId="7c5079d1e183509d" providerId="LiveId" clId="{023B67FE-E4C5-42E2-A7E8-295CAE2B4F0E}" dt="2026-04-08T23:46:27.864" v="5071" actId="20577"/>
           <ac:spMkLst>
             <pc:docMk/>
             <pc:sldMk cId="1623963838" sldId="263"/>
             <ac:spMk id="5" creationId="{F836B4EC-1622-C3F0-1EF4-BD97B9A0E51E}"/>
           </ac:spMkLst>
         </pc:spChg>
+        <pc:picChg chg="add del">
+          <ac:chgData name="Luka De Lacey" userId="7c5079d1e183509d" providerId="LiveId" clId="{023B67FE-E4C5-42E2-A7E8-295CAE2B4F0E}" dt="2026-04-09T00:03:18.021" v="6180" actId="22"/>
+          <ac:picMkLst>
+            <pc:docMk/>
+            <pc:sldMk cId="1623963838" sldId="263"/>
+            <ac:picMk id="4" creationId="{5A336ADC-3354-48BE-1A72-B6EBC0E6BF59}"/>
+          </ac:picMkLst>
+        </pc:picChg>
         <pc:picChg chg="add mod">
-          <ac:chgData name="Luka De Lacey" userId="7c5079d1e183509d" providerId="LiveId" clId="{023B67FE-E4C5-42E2-A7E8-295CAE2B4F0E}" dt="2026-04-01T22:34:24.001" v="2203" actId="1076"/>
+          <ac:chgData name="Luka De Lacey" userId="7c5079d1e183509d" providerId="LiveId" clId="{023B67FE-E4C5-42E2-A7E8-295CAE2B4F0E}" dt="2026-04-08T23:46:30.992" v="5073" actId="1076"/>
           <ac:picMkLst>
             <pc:docMk/>
             <pc:sldMk cId="1623963838" sldId="263"/>
@@ -669,39 +459,1138 @@
           </ac:picMkLst>
         </pc:picChg>
       </pc:sldChg>
-      <pc:sldChg chg="addSp modSp new mod">
-        <pc:chgData name="Luka De Lacey" userId="7c5079d1e183509d" providerId="LiveId" clId="{023B67FE-E4C5-42E2-A7E8-295CAE2B4F0E}" dt="2026-04-01T22:35:10.334" v="2215" actId="1076"/>
+      <pc:sldChg chg="addSp delSp modSp new mod setBg modNotesTx">
+        <pc:chgData name="Luka De Lacey" userId="7c5079d1e183509d" providerId="LiveId" clId="{023B67FE-E4C5-42E2-A7E8-295CAE2B4F0E}" dt="2026-04-09T00:48:05.704" v="7332" actId="20577"/>
         <pc:sldMkLst>
           <pc:docMk/>
           <pc:sldMk cId="180345978" sldId="264"/>
         </pc:sldMkLst>
-        <pc:picChg chg="add mod">
-          <ac:chgData name="Luka De Lacey" userId="7c5079d1e183509d" providerId="LiveId" clId="{023B67FE-E4C5-42E2-A7E8-295CAE2B4F0E}" dt="2026-04-01T22:35:10.334" v="2215" actId="1076"/>
+        <pc:spChg chg="mod">
+          <ac:chgData name="Luka De Lacey" userId="7c5079d1e183509d" providerId="LiveId" clId="{023B67FE-E4C5-42E2-A7E8-295CAE2B4F0E}" dt="2026-04-09T00:47:32.063" v="7231" actId="26606"/>
+          <ac:spMkLst>
+            <pc:docMk/>
+            <pc:sldMk cId="180345978" sldId="264"/>
+            <ac:spMk id="2" creationId="{9296E94D-D02E-6B52-F16E-D55B1AAE1914}"/>
+          </ac:spMkLst>
+        </pc:spChg>
+        <pc:spChg chg="mod">
+          <ac:chgData name="Luka De Lacey" userId="7c5079d1e183509d" providerId="LiveId" clId="{023B67FE-E4C5-42E2-A7E8-295CAE2B4F0E}" dt="2026-04-09T00:48:05.704" v="7332" actId="20577"/>
+          <ac:spMkLst>
+            <pc:docMk/>
+            <pc:sldMk cId="180345978" sldId="264"/>
+            <ac:spMk id="3" creationId="{7E86535F-5F4D-AEF0-F103-0CC49503357F}"/>
+          </ac:spMkLst>
+        </pc:spChg>
+        <pc:spChg chg="add">
+          <ac:chgData name="Luka De Lacey" userId="7c5079d1e183509d" providerId="LiveId" clId="{023B67FE-E4C5-42E2-A7E8-295CAE2B4F0E}" dt="2026-04-09T00:47:32.063" v="7231" actId="26606"/>
+          <ac:spMkLst>
+            <pc:docMk/>
+            <pc:sldMk cId="180345978" sldId="264"/>
+            <ac:spMk id="11" creationId="{201CC55D-ED54-4C5C-95E6-10947BD1103B}"/>
+          </ac:spMkLst>
+        </pc:spChg>
+        <pc:spChg chg="add">
+          <ac:chgData name="Luka De Lacey" userId="7c5079d1e183509d" providerId="LiveId" clId="{023B67FE-E4C5-42E2-A7E8-295CAE2B4F0E}" dt="2026-04-09T00:47:32.063" v="7231" actId="26606"/>
+          <ac:spMkLst>
+            <pc:docMk/>
+            <pc:sldMk cId="180345978" sldId="264"/>
+            <ac:spMk id="17" creationId="{3873B707-463F-40B0-8227-E8CC6C67EB25}"/>
+          </ac:spMkLst>
+        </pc:spChg>
+        <pc:spChg chg="add">
+          <ac:chgData name="Luka De Lacey" userId="7c5079d1e183509d" providerId="LiveId" clId="{023B67FE-E4C5-42E2-A7E8-295CAE2B4F0E}" dt="2026-04-09T00:47:32.063" v="7231" actId="26606"/>
+          <ac:spMkLst>
+            <pc:docMk/>
+            <pc:sldMk cId="180345978" sldId="264"/>
+            <ac:spMk id="19" creationId="{C13237C8-E62C-4F0D-A318-BD6FB6C2D138}"/>
+          </ac:spMkLst>
+        </pc:spChg>
+        <pc:spChg chg="add">
+          <ac:chgData name="Luka De Lacey" userId="7c5079d1e183509d" providerId="LiveId" clId="{023B67FE-E4C5-42E2-A7E8-295CAE2B4F0E}" dt="2026-04-09T00:47:32.063" v="7231" actId="26606"/>
+          <ac:spMkLst>
+            <pc:docMk/>
+            <pc:sldMk cId="180345978" sldId="264"/>
+            <ac:spMk id="21" creationId="{19C9EAEA-39D0-4B0E-A0EB-51E7B26740B1}"/>
+          </ac:spMkLst>
+        </pc:spChg>
+        <pc:grpChg chg="add">
+          <ac:chgData name="Luka De Lacey" userId="7c5079d1e183509d" providerId="LiveId" clId="{023B67FE-E4C5-42E2-A7E8-295CAE2B4F0E}" dt="2026-04-09T00:47:32.063" v="7231" actId="26606"/>
+          <ac:grpSpMkLst>
+            <pc:docMk/>
+            <pc:sldMk cId="180345978" sldId="264"/>
+            <ac:grpSpMk id="13" creationId="{1DE889C7-FAD6-4397-98E2-05D503484459}"/>
+          </ac:grpSpMkLst>
+        </pc:grpChg>
+        <pc:picChg chg="add del mod">
+          <ac:chgData name="Luka De Lacey" userId="7c5079d1e183509d" providerId="LiveId" clId="{023B67FE-E4C5-42E2-A7E8-295CAE2B4F0E}" dt="2026-04-08T23:52:53.465" v="5300" actId="478"/>
           <ac:picMkLst>
             <pc:docMk/>
             <pc:sldMk cId="180345978" sldId="264"/>
             <ac:picMk id="5" creationId="{9E2542F0-7FF2-6B17-1492-25CAC4D5C757}"/>
           </ac:picMkLst>
         </pc:picChg>
+        <pc:picChg chg="add mod">
+          <ac:chgData name="Luka De Lacey" userId="7c5079d1e183509d" providerId="LiveId" clId="{023B67FE-E4C5-42E2-A7E8-295CAE2B4F0E}" dt="2026-04-09T00:47:32.063" v="7231" actId="26606"/>
+          <ac:picMkLst>
+            <pc:docMk/>
+            <pc:sldMk cId="180345978" sldId="264"/>
+            <ac:picMk id="6" creationId="{1EE4747E-3206-8553-F719-FDEC8797CA57}"/>
+          </ac:picMkLst>
+        </pc:picChg>
       </pc:sldChg>
-      <pc:sldChg chg="addSp modSp new mod">
-        <pc:chgData name="Luka De Lacey" userId="7c5079d1e183509d" providerId="LiveId" clId="{023B67FE-E4C5-42E2-A7E8-295CAE2B4F0E}" dt="2026-04-01T22:35:31.779" v="2222" actId="1076"/>
+      <pc:sldChg chg="addSp delSp modSp new mod setBg">
+        <pc:chgData name="Luka De Lacey" userId="7c5079d1e183509d" providerId="LiveId" clId="{023B67FE-E4C5-42E2-A7E8-295CAE2B4F0E}" dt="2026-04-09T00:49:44.578" v="7341"/>
         <pc:sldMkLst>
           <pc:docMk/>
           <pc:sldMk cId="2616912587" sldId="265"/>
         </pc:sldMkLst>
-        <pc:picChg chg="add mod">
-          <ac:chgData name="Luka De Lacey" userId="7c5079d1e183509d" providerId="LiveId" clId="{023B67FE-E4C5-42E2-A7E8-295CAE2B4F0E}" dt="2026-04-01T22:35:31.779" v="2222" actId="1076"/>
+        <pc:spChg chg="mod">
+          <ac:chgData name="Luka De Lacey" userId="7c5079d1e183509d" providerId="LiveId" clId="{023B67FE-E4C5-42E2-A7E8-295CAE2B4F0E}" dt="2026-04-09T00:48:17.007" v="7335" actId="26606"/>
+          <ac:spMkLst>
+            <pc:docMk/>
+            <pc:sldMk cId="2616912587" sldId="265"/>
+            <ac:spMk id="2" creationId="{CC6B9798-CB8D-B25A-0DA2-EB80F531344C}"/>
+          </ac:spMkLst>
+        </pc:spChg>
+        <pc:spChg chg="mod">
+          <ac:chgData name="Luka De Lacey" userId="7c5079d1e183509d" providerId="LiveId" clId="{023B67FE-E4C5-42E2-A7E8-295CAE2B4F0E}" dt="2026-04-09T00:48:17.007" v="7335" actId="26606"/>
+          <ac:spMkLst>
+            <pc:docMk/>
+            <pc:sldMk cId="2616912587" sldId="265"/>
+            <ac:spMk id="3" creationId="{0E63DD51-7F09-5517-B2B7-4D0964775CA7}"/>
+          </ac:spMkLst>
+        </pc:spChg>
+        <pc:spChg chg="add del">
+          <ac:chgData name="Luka De Lacey" userId="7c5079d1e183509d" providerId="LiveId" clId="{023B67FE-E4C5-42E2-A7E8-295CAE2B4F0E}" dt="2026-04-09T00:48:17.001" v="7334" actId="26606"/>
+          <ac:spMkLst>
+            <pc:docMk/>
+            <pc:sldMk cId="2616912587" sldId="265"/>
+            <ac:spMk id="11" creationId="{201CC55D-ED54-4C5C-95E6-10947BD1103B}"/>
+          </ac:spMkLst>
+        </pc:spChg>
+        <pc:spChg chg="add del">
+          <ac:chgData name="Luka De Lacey" userId="7c5079d1e183509d" providerId="LiveId" clId="{023B67FE-E4C5-42E2-A7E8-295CAE2B4F0E}" dt="2026-04-09T00:48:17.001" v="7334" actId="26606"/>
+          <ac:spMkLst>
+            <pc:docMk/>
+            <pc:sldMk cId="2616912587" sldId="265"/>
+            <ac:spMk id="17" creationId="{3873B707-463F-40B0-8227-E8CC6C67EB25}"/>
+          </ac:spMkLst>
+        </pc:spChg>
+        <pc:spChg chg="add del">
+          <ac:chgData name="Luka De Lacey" userId="7c5079d1e183509d" providerId="LiveId" clId="{023B67FE-E4C5-42E2-A7E8-295CAE2B4F0E}" dt="2026-04-09T00:48:17.001" v="7334" actId="26606"/>
+          <ac:spMkLst>
+            <pc:docMk/>
+            <pc:sldMk cId="2616912587" sldId="265"/>
+            <ac:spMk id="19" creationId="{C13237C8-E62C-4F0D-A318-BD6FB6C2D138}"/>
+          </ac:spMkLst>
+        </pc:spChg>
+        <pc:spChg chg="add del">
+          <ac:chgData name="Luka De Lacey" userId="7c5079d1e183509d" providerId="LiveId" clId="{023B67FE-E4C5-42E2-A7E8-295CAE2B4F0E}" dt="2026-04-09T00:48:17.001" v="7334" actId="26606"/>
+          <ac:spMkLst>
+            <pc:docMk/>
+            <pc:sldMk cId="2616912587" sldId="265"/>
+            <ac:spMk id="21" creationId="{19C9EAEA-39D0-4B0E-A0EB-51E7B26740B1}"/>
+          </ac:spMkLst>
+        </pc:spChg>
+        <pc:spChg chg="add">
+          <ac:chgData name="Luka De Lacey" userId="7c5079d1e183509d" providerId="LiveId" clId="{023B67FE-E4C5-42E2-A7E8-295CAE2B4F0E}" dt="2026-04-09T00:48:17.007" v="7335" actId="26606"/>
+          <ac:spMkLst>
+            <pc:docMk/>
+            <pc:sldMk cId="2616912587" sldId="265"/>
+            <ac:spMk id="23" creationId="{DBC6133C-0615-4CE4-9132-37E609A9BDFA}"/>
+          </ac:spMkLst>
+        </pc:spChg>
+        <pc:spChg chg="add">
+          <ac:chgData name="Luka De Lacey" userId="7c5079d1e183509d" providerId="LiveId" clId="{023B67FE-E4C5-42E2-A7E8-295CAE2B4F0E}" dt="2026-04-09T00:48:17.007" v="7335" actId="26606"/>
+          <ac:spMkLst>
+            <pc:docMk/>
+            <pc:sldMk cId="2616912587" sldId="265"/>
+            <ac:spMk id="24" creationId="{169CC832-2974-4E8D-90ED-3E2941BA7336}"/>
+          </ac:spMkLst>
+        </pc:spChg>
+        <pc:spChg chg="add">
+          <ac:chgData name="Luka De Lacey" userId="7c5079d1e183509d" providerId="LiveId" clId="{023B67FE-E4C5-42E2-A7E8-295CAE2B4F0E}" dt="2026-04-09T00:48:17.007" v="7335" actId="26606"/>
+          <ac:spMkLst>
+            <pc:docMk/>
+            <pc:sldMk cId="2616912587" sldId="265"/>
+            <ac:spMk id="25" creationId="{55222F96-971A-4F90-B841-6BAB416C7AC1}"/>
+          </ac:spMkLst>
+        </pc:spChg>
+        <pc:spChg chg="add">
+          <ac:chgData name="Luka De Lacey" userId="7c5079d1e183509d" providerId="LiveId" clId="{023B67FE-E4C5-42E2-A7E8-295CAE2B4F0E}" dt="2026-04-09T00:48:17.007" v="7335" actId="26606"/>
+          <ac:spMkLst>
+            <pc:docMk/>
+            <pc:sldMk cId="2616912587" sldId="265"/>
+            <ac:spMk id="26" creationId="{08980754-6F4B-43C9-B9BE-127B6BED6586}"/>
+          </ac:spMkLst>
+        </pc:spChg>
+        <pc:spChg chg="add">
+          <ac:chgData name="Luka De Lacey" userId="7c5079d1e183509d" providerId="LiveId" clId="{023B67FE-E4C5-42E2-A7E8-295CAE2B4F0E}" dt="2026-04-09T00:48:17.007" v="7335" actId="26606"/>
+          <ac:spMkLst>
+            <pc:docMk/>
+            <pc:sldMk cId="2616912587" sldId="265"/>
+            <ac:spMk id="27" creationId="{2C1BBA94-3F40-40AA-8BB9-E69E25E537C1}"/>
+          </ac:spMkLst>
+        </pc:spChg>
+        <pc:grpChg chg="add del">
+          <ac:chgData name="Luka De Lacey" userId="7c5079d1e183509d" providerId="LiveId" clId="{023B67FE-E4C5-42E2-A7E8-295CAE2B4F0E}" dt="2026-04-09T00:48:17.001" v="7334" actId="26606"/>
+          <ac:grpSpMkLst>
+            <pc:docMk/>
+            <pc:sldMk cId="2616912587" sldId="265"/>
+            <ac:grpSpMk id="13" creationId="{1DE889C7-FAD6-4397-98E2-05D503484459}"/>
+          </ac:grpSpMkLst>
+        </pc:grpChg>
+        <pc:picChg chg="add del mod">
+          <ac:chgData name="Luka De Lacey" userId="7c5079d1e183509d" providerId="LiveId" clId="{023B67FE-E4C5-42E2-A7E8-295CAE2B4F0E}" dt="2026-04-08T23:54:50.265" v="5450" actId="478"/>
           <ac:picMkLst>
             <pc:docMk/>
             <pc:sldMk cId="2616912587" sldId="265"/>
             <ac:picMk id="5" creationId="{FC759494-2596-4C1D-3D78-7970DD851734}"/>
           </ac:picMkLst>
         </pc:picChg>
+        <pc:picChg chg="add mod">
+          <ac:chgData name="Luka De Lacey" userId="7c5079d1e183509d" providerId="LiveId" clId="{023B67FE-E4C5-42E2-A7E8-295CAE2B4F0E}" dt="2026-04-09T00:48:17.007" v="7335" actId="26606"/>
+          <ac:picMkLst>
+            <pc:docMk/>
+            <pc:sldMk cId="2616912587" sldId="265"/>
+            <ac:picMk id="6" creationId="{821015F3-C099-DB67-55F1-641E5393283A}"/>
+          </ac:picMkLst>
+        </pc:picChg>
+      </pc:sldChg>
+      <pc:sldChg chg="addSp delSp modSp new mod setBg">
+        <pc:chgData name="Luka De Lacey" userId="7c5079d1e183509d" providerId="LiveId" clId="{023B67FE-E4C5-42E2-A7E8-295CAE2B4F0E}" dt="2026-04-09T00:49:19.118" v="7339"/>
+        <pc:sldMkLst>
+          <pc:docMk/>
+          <pc:sldMk cId="1923262649" sldId="266"/>
+        </pc:sldMkLst>
+        <pc:spChg chg="mod">
+          <ac:chgData name="Luka De Lacey" userId="7c5079d1e183509d" providerId="LiveId" clId="{023B67FE-E4C5-42E2-A7E8-295CAE2B4F0E}" dt="2026-04-09T00:45:00.397" v="7201" actId="26606"/>
+          <ac:spMkLst>
+            <pc:docMk/>
+            <pc:sldMk cId="1923262649" sldId="266"/>
+            <ac:spMk id="2" creationId="{B246D3F8-D43B-69A9-BBC0-611EBF253E55}"/>
+          </ac:spMkLst>
+        </pc:spChg>
+        <pc:spChg chg="mod">
+          <ac:chgData name="Luka De Lacey" userId="7c5079d1e183509d" providerId="LiveId" clId="{023B67FE-E4C5-42E2-A7E8-295CAE2B4F0E}" dt="2026-04-09T00:45:00.397" v="7201" actId="26606"/>
+          <ac:spMkLst>
+            <pc:docMk/>
+            <pc:sldMk cId="1923262649" sldId="266"/>
+            <ac:spMk id="3" creationId="{F298F96C-FEC8-2A74-F9A6-493BB6189543}"/>
+          </ac:spMkLst>
+        </pc:spChg>
+        <pc:spChg chg="add">
+          <ac:chgData name="Luka De Lacey" userId="7c5079d1e183509d" providerId="LiveId" clId="{023B67FE-E4C5-42E2-A7E8-295CAE2B4F0E}" dt="2026-04-09T00:45:00.397" v="7201" actId="26606"/>
+          <ac:spMkLst>
+            <pc:docMk/>
+            <pc:sldMk cId="1923262649" sldId="266"/>
+            <ac:spMk id="9" creationId="{058A14AF-9FB5-4CC7-BA35-E8E85D3EDF0E}"/>
+          </ac:spMkLst>
+        </pc:spChg>
+        <pc:spChg chg="add">
+          <ac:chgData name="Luka De Lacey" userId="7c5079d1e183509d" providerId="LiveId" clId="{023B67FE-E4C5-42E2-A7E8-295CAE2B4F0E}" dt="2026-04-09T00:45:00.397" v="7201" actId="26606"/>
+          <ac:spMkLst>
+            <pc:docMk/>
+            <pc:sldMk cId="1923262649" sldId="266"/>
+            <ac:spMk id="11" creationId="{3A9A4357-BD1D-4622-A4FE-766E6AB8DE84}"/>
+          </ac:spMkLst>
+        </pc:spChg>
+        <pc:spChg chg="add">
+          <ac:chgData name="Luka De Lacey" userId="7c5079d1e183509d" providerId="LiveId" clId="{023B67FE-E4C5-42E2-A7E8-295CAE2B4F0E}" dt="2026-04-09T00:45:00.397" v="7201" actId="26606"/>
+          <ac:spMkLst>
+            <pc:docMk/>
+            <pc:sldMk cId="1923262649" sldId="266"/>
+            <ac:spMk id="13" creationId="{E659831F-0D9A-4C63-9EBB-8435B85A440F}"/>
+          </ac:spMkLst>
+        </pc:spChg>
+        <pc:spChg chg="add">
+          <ac:chgData name="Luka De Lacey" userId="7c5079d1e183509d" providerId="LiveId" clId="{023B67FE-E4C5-42E2-A7E8-295CAE2B4F0E}" dt="2026-04-09T00:45:00.397" v="7201" actId="26606"/>
+          <ac:spMkLst>
+            <pc:docMk/>
+            <pc:sldMk cId="1923262649" sldId="266"/>
+            <ac:spMk id="15" creationId="{E6995CE5-F890-4ABA-82A2-26507CE8D2A3}"/>
+          </ac:spMkLst>
+        </pc:spChg>
+        <pc:picChg chg="add mod">
+          <ac:chgData name="Luka De Lacey" userId="7c5079d1e183509d" providerId="LiveId" clId="{023B67FE-E4C5-42E2-A7E8-295CAE2B4F0E}" dt="2026-04-09T00:45:00.397" v="7201" actId="26606"/>
+          <ac:picMkLst>
+            <pc:docMk/>
+            <pc:sldMk cId="1923262649" sldId="266"/>
+            <ac:picMk id="4" creationId="{2AEDB068-FE27-8EE6-F318-69FAE1C97830}"/>
+          </ac:picMkLst>
+        </pc:picChg>
+        <pc:picChg chg="add del mod">
+          <ac:chgData name="Luka De Lacey" userId="7c5079d1e183509d" providerId="LiveId" clId="{023B67FE-E4C5-42E2-A7E8-295CAE2B4F0E}" dt="2026-04-09T00:39:59.239" v="7121" actId="478"/>
+          <ac:picMkLst>
+            <pc:docMk/>
+            <pc:sldMk cId="1923262649" sldId="266"/>
+            <ac:picMk id="1026" creationId="{C9387C5B-1508-2DBB-E550-02813A1DC995}"/>
+          </ac:picMkLst>
+        </pc:picChg>
+      </pc:sldChg>
+      <pc:sldChg chg="addSp modSp new mod setBg">
+        <pc:chgData name="Luka De Lacey" userId="7c5079d1e183509d" providerId="LiveId" clId="{023B67FE-E4C5-42E2-A7E8-295CAE2B4F0E}" dt="2026-04-09T00:45:09.738" v="7202" actId="26606"/>
+        <pc:sldMkLst>
+          <pc:docMk/>
+          <pc:sldMk cId="850707843" sldId="267"/>
+        </pc:sldMkLst>
+        <pc:spChg chg="mod">
+          <ac:chgData name="Luka De Lacey" userId="7c5079d1e183509d" providerId="LiveId" clId="{023B67FE-E4C5-42E2-A7E8-295CAE2B4F0E}" dt="2026-04-09T00:45:09.738" v="7202" actId="26606"/>
+          <ac:spMkLst>
+            <pc:docMk/>
+            <pc:sldMk cId="850707843" sldId="267"/>
+            <ac:spMk id="2" creationId="{7E58BF8D-5097-7138-8E91-C6A246E24B92}"/>
+          </ac:spMkLst>
+        </pc:spChg>
+        <pc:spChg chg="mod">
+          <ac:chgData name="Luka De Lacey" userId="7c5079d1e183509d" providerId="LiveId" clId="{023B67FE-E4C5-42E2-A7E8-295CAE2B4F0E}" dt="2026-04-09T00:45:09.738" v="7202" actId="26606"/>
+          <ac:spMkLst>
+            <pc:docMk/>
+            <pc:sldMk cId="850707843" sldId="267"/>
+            <ac:spMk id="3" creationId="{3669820E-B81B-632B-5955-A901DCE2B57D}"/>
+          </ac:spMkLst>
+        </pc:spChg>
+        <pc:spChg chg="add">
+          <ac:chgData name="Luka De Lacey" userId="7c5079d1e183509d" providerId="LiveId" clId="{023B67FE-E4C5-42E2-A7E8-295CAE2B4F0E}" dt="2026-04-09T00:45:09.738" v="7202" actId="26606"/>
+          <ac:spMkLst>
+            <pc:docMk/>
+            <pc:sldMk cId="850707843" sldId="267"/>
+            <ac:spMk id="10" creationId="{201CC55D-ED54-4C5C-95E6-10947BD1103B}"/>
+          </ac:spMkLst>
+        </pc:spChg>
+        <pc:spChg chg="add">
+          <ac:chgData name="Luka De Lacey" userId="7c5079d1e183509d" providerId="LiveId" clId="{023B67FE-E4C5-42E2-A7E8-295CAE2B4F0E}" dt="2026-04-09T00:45:09.738" v="7202" actId="26606"/>
+          <ac:spMkLst>
+            <pc:docMk/>
+            <pc:sldMk cId="850707843" sldId="267"/>
+            <ac:spMk id="16" creationId="{3873B707-463F-40B0-8227-E8CC6C67EB25}"/>
+          </ac:spMkLst>
+        </pc:spChg>
+        <pc:spChg chg="add">
+          <ac:chgData name="Luka De Lacey" userId="7c5079d1e183509d" providerId="LiveId" clId="{023B67FE-E4C5-42E2-A7E8-295CAE2B4F0E}" dt="2026-04-09T00:45:09.738" v="7202" actId="26606"/>
+          <ac:spMkLst>
+            <pc:docMk/>
+            <pc:sldMk cId="850707843" sldId="267"/>
+            <ac:spMk id="18" creationId="{C13237C8-E62C-4F0D-A318-BD6FB6C2D138}"/>
+          </ac:spMkLst>
+        </pc:spChg>
+        <pc:spChg chg="add">
+          <ac:chgData name="Luka De Lacey" userId="7c5079d1e183509d" providerId="LiveId" clId="{023B67FE-E4C5-42E2-A7E8-295CAE2B4F0E}" dt="2026-04-09T00:45:09.738" v="7202" actId="26606"/>
+          <ac:spMkLst>
+            <pc:docMk/>
+            <pc:sldMk cId="850707843" sldId="267"/>
+            <ac:spMk id="20" creationId="{19C9EAEA-39D0-4B0E-A0EB-51E7B26740B1}"/>
+          </ac:spMkLst>
+        </pc:spChg>
+        <pc:grpChg chg="add">
+          <ac:chgData name="Luka De Lacey" userId="7c5079d1e183509d" providerId="LiveId" clId="{023B67FE-E4C5-42E2-A7E8-295CAE2B4F0E}" dt="2026-04-09T00:45:09.738" v="7202" actId="26606"/>
+          <ac:grpSpMkLst>
+            <pc:docMk/>
+            <pc:sldMk cId="850707843" sldId="267"/>
+            <ac:grpSpMk id="12" creationId="{1DE889C7-FAD6-4397-98E2-05D503484459}"/>
+          </ac:grpSpMkLst>
+        </pc:grpChg>
+        <pc:picChg chg="add mod">
+          <ac:chgData name="Luka De Lacey" userId="7c5079d1e183509d" providerId="LiveId" clId="{023B67FE-E4C5-42E2-A7E8-295CAE2B4F0E}" dt="2026-04-09T00:45:09.738" v="7202" actId="26606"/>
+          <ac:picMkLst>
+            <pc:docMk/>
+            <pc:sldMk cId="850707843" sldId="267"/>
+            <ac:picMk id="5" creationId="{DB6BB64F-CD39-167B-5527-7960754578BC}"/>
+          </ac:picMkLst>
+        </pc:picChg>
+      </pc:sldChg>
+      <pc:sldChg chg="modSp new del mod ord">
+        <pc:chgData name="Luka De Lacey" userId="7c5079d1e183509d" providerId="LiveId" clId="{023B67FE-E4C5-42E2-A7E8-295CAE2B4F0E}" dt="2026-04-08T23:57:18.118" v="5676" actId="47"/>
+        <pc:sldMkLst>
+          <pc:docMk/>
+          <pc:sldMk cId="3274122063" sldId="268"/>
+        </pc:sldMkLst>
+        <pc:spChg chg="mod">
+          <ac:chgData name="Luka De Lacey" userId="7c5079d1e183509d" providerId="LiveId" clId="{023B67FE-E4C5-42E2-A7E8-295CAE2B4F0E}" dt="2026-04-08T23:11:16.849" v="3690" actId="2711"/>
+          <ac:spMkLst>
+            <pc:docMk/>
+            <pc:sldMk cId="3274122063" sldId="268"/>
+            <ac:spMk id="2" creationId="{82168883-B723-CC7B-A878-E99D14B69894}"/>
+          </ac:spMkLst>
+        </pc:spChg>
+      </pc:sldChg>
+      <pc:sldChg chg="addSp delSp modSp add mod ord">
+        <pc:chgData name="Luka De Lacey" userId="7c5079d1e183509d" providerId="LiveId" clId="{023B67FE-E4C5-42E2-A7E8-295CAE2B4F0E}" dt="2026-04-09T00:13:00.873" v="6711" actId="20577"/>
+        <pc:sldMkLst>
+          <pc:docMk/>
+          <pc:sldMk cId="2052214948" sldId="269"/>
+        </pc:sldMkLst>
+        <pc:spChg chg="mod">
+          <ac:chgData name="Luka De Lacey" userId="7c5079d1e183509d" providerId="LiveId" clId="{023B67FE-E4C5-42E2-A7E8-295CAE2B4F0E}" dt="2026-04-09T00:04:16.756" v="6211" actId="20577"/>
+          <ac:spMkLst>
+            <pc:docMk/>
+            <pc:sldMk cId="2052214948" sldId="269"/>
+            <ac:spMk id="2" creationId="{75157770-F8CB-EE2C-9BAB-97F3EE1BE73E}"/>
+          </ac:spMkLst>
+        </pc:spChg>
+        <pc:spChg chg="mod">
+          <ac:chgData name="Luka De Lacey" userId="7c5079d1e183509d" providerId="LiveId" clId="{023B67FE-E4C5-42E2-A7E8-295CAE2B4F0E}" dt="2026-04-09T00:13:00.873" v="6711" actId="20577"/>
+          <ac:spMkLst>
+            <pc:docMk/>
+            <pc:sldMk cId="2052214948" sldId="269"/>
+            <ac:spMk id="3" creationId="{D9330ACF-692C-9E53-8051-14CE8F467A02}"/>
+          </ac:spMkLst>
+        </pc:spChg>
+        <pc:picChg chg="del">
+          <ac:chgData name="Luka De Lacey" userId="7c5079d1e183509d" providerId="LiveId" clId="{023B67FE-E4C5-42E2-A7E8-295CAE2B4F0E}" dt="2026-04-09T00:03:31.069" v="6183" actId="478"/>
+          <ac:picMkLst>
+            <pc:docMk/>
+            <pc:sldMk cId="2052214948" sldId="269"/>
+            <ac:picMk id="5" creationId="{5744F2B4-815E-803E-FA27-93B79EA36FD8}"/>
+          </ac:picMkLst>
+        </pc:picChg>
+        <pc:picChg chg="add mod">
+          <ac:chgData name="Luka De Lacey" userId="7c5079d1e183509d" providerId="LiveId" clId="{023B67FE-E4C5-42E2-A7E8-295CAE2B4F0E}" dt="2026-04-09T00:04:01.760" v="6194" actId="1582"/>
+          <ac:picMkLst>
+            <pc:docMk/>
+            <pc:sldMk cId="2052214948" sldId="269"/>
+            <ac:picMk id="6" creationId="{2FE01FCB-F665-83ED-86AE-1CA2C22F0DE8}"/>
+          </ac:picMkLst>
+        </pc:picChg>
+      </pc:sldChg>
+      <pc:sldChg chg="modSp new mod">
+        <pc:chgData name="Luka De Lacey" userId="7c5079d1e183509d" providerId="LiveId" clId="{023B67FE-E4C5-42E2-A7E8-295CAE2B4F0E}" dt="2026-04-09T00:52:45.784" v="7777" actId="20577"/>
+        <pc:sldMkLst>
+          <pc:docMk/>
+          <pc:sldMk cId="3514585462" sldId="270"/>
+        </pc:sldMkLst>
+        <pc:spChg chg="mod">
+          <ac:chgData name="Luka De Lacey" userId="7c5079d1e183509d" providerId="LiveId" clId="{023B67FE-E4C5-42E2-A7E8-295CAE2B4F0E}" dt="2026-04-08T23:47:54.499" v="5085" actId="20577"/>
+          <ac:spMkLst>
+            <pc:docMk/>
+            <pc:sldMk cId="3514585462" sldId="270"/>
+            <ac:spMk id="2" creationId="{70862895-263B-F43F-670C-14D0E7B928C9}"/>
+          </ac:spMkLst>
+        </pc:spChg>
+        <pc:spChg chg="mod">
+          <ac:chgData name="Luka De Lacey" userId="7c5079d1e183509d" providerId="LiveId" clId="{023B67FE-E4C5-42E2-A7E8-295CAE2B4F0E}" dt="2026-04-09T00:52:45.784" v="7777" actId="20577"/>
+          <ac:spMkLst>
+            <pc:docMk/>
+            <pc:sldMk cId="3514585462" sldId="270"/>
+            <ac:spMk id="3" creationId="{41B15701-F9E4-B590-06CD-F0365BC3265E}"/>
+          </ac:spMkLst>
+        </pc:spChg>
+      </pc:sldChg>
+      <pc:sldChg chg="addSp modSp new del mod">
+        <pc:chgData name="Luka De Lacey" userId="7c5079d1e183509d" providerId="LiveId" clId="{023B67FE-E4C5-42E2-A7E8-295CAE2B4F0E}" dt="2026-04-09T00:52:53.909" v="7778" actId="47"/>
+        <pc:sldMkLst>
+          <pc:docMk/>
+          <pc:sldMk cId="611969674" sldId="271"/>
+        </pc:sldMkLst>
+        <pc:spChg chg="mod">
+          <ac:chgData name="Luka De Lacey" userId="7c5079d1e183509d" providerId="LiveId" clId="{023B67FE-E4C5-42E2-A7E8-295CAE2B4F0E}" dt="2026-04-08T23:51:49.246" v="5298" actId="14100"/>
+          <ac:spMkLst>
+            <pc:docMk/>
+            <pc:sldMk cId="611969674" sldId="271"/>
+            <ac:spMk id="2" creationId="{1DE39359-7B09-B70D-9265-F6912FADA8F4}"/>
+          </ac:spMkLst>
+        </pc:spChg>
+        <pc:spChg chg="mod">
+          <ac:chgData name="Luka De Lacey" userId="7c5079d1e183509d" providerId="LiveId" clId="{023B67FE-E4C5-42E2-A7E8-295CAE2B4F0E}" dt="2026-04-08T23:51:46.048" v="5297" actId="14100"/>
+          <ac:spMkLst>
+            <pc:docMk/>
+            <pc:sldMk cId="611969674" sldId="271"/>
+            <ac:spMk id="3" creationId="{E0544B41-7913-8DDF-636C-C4F87EB5CF80}"/>
+          </ac:spMkLst>
+        </pc:spChg>
+        <pc:picChg chg="add mod modCrop">
+          <ac:chgData name="Luka De Lacey" userId="7c5079d1e183509d" providerId="LiveId" clId="{023B67FE-E4C5-42E2-A7E8-295CAE2B4F0E}" dt="2026-04-08T23:51:42.988" v="5296" actId="1076"/>
+          <ac:picMkLst>
+            <pc:docMk/>
+            <pc:sldMk cId="611969674" sldId="271"/>
+            <ac:picMk id="5" creationId="{43A443DF-4CA2-ADF9-1F2C-E33F362B2A5B}"/>
+          </ac:picMkLst>
+        </pc:picChg>
+        <pc:picChg chg="add mod modCrop">
+          <ac:chgData name="Luka De Lacey" userId="7c5079d1e183509d" providerId="LiveId" clId="{023B67FE-E4C5-42E2-A7E8-295CAE2B4F0E}" dt="2026-04-08T23:51:59.042" v="5299" actId="732"/>
+          <ac:picMkLst>
+            <pc:docMk/>
+            <pc:sldMk cId="611969674" sldId="271"/>
+            <ac:picMk id="7" creationId="{D5051758-40F5-E05B-E35B-866895026504}"/>
+          </ac:picMkLst>
+        </pc:picChg>
+        <pc:picChg chg="add mod">
+          <ac:chgData name="Luka De Lacey" userId="7c5079d1e183509d" providerId="LiveId" clId="{023B67FE-E4C5-42E2-A7E8-295CAE2B4F0E}" dt="2026-04-08T23:51:21.731" v="5286" actId="571"/>
+          <ac:picMkLst>
+            <pc:docMk/>
+            <pc:sldMk cId="611969674" sldId="271"/>
+            <ac:picMk id="8" creationId="{C9817B12-4EFF-BFFB-1ADE-7F65F1FF9BC1}"/>
+          </ac:picMkLst>
+        </pc:picChg>
+      </pc:sldChg>
+      <pc:sldChg chg="addSp modSp add mod">
+        <pc:chgData name="Luka De Lacey" userId="7c5079d1e183509d" providerId="LiveId" clId="{023B67FE-E4C5-42E2-A7E8-295CAE2B4F0E}" dt="2026-04-09T00:50:26.746" v="7420" actId="20577"/>
+        <pc:sldMkLst>
+          <pc:docMk/>
+          <pc:sldMk cId="252362121" sldId="272"/>
+        </pc:sldMkLst>
+        <pc:spChg chg="mod">
+          <ac:chgData name="Luka De Lacey" userId="7c5079d1e183509d" providerId="LiveId" clId="{023B67FE-E4C5-42E2-A7E8-295CAE2B4F0E}" dt="2026-04-09T00:14:28.087" v="6714" actId="20577"/>
+          <ac:spMkLst>
+            <pc:docMk/>
+            <pc:sldMk cId="252362121" sldId="272"/>
+            <ac:spMk id="2" creationId="{C59DA7BC-9875-B36F-D6A5-2AB3654A8572}"/>
+          </ac:spMkLst>
+        </pc:spChg>
+        <pc:spChg chg="mod">
+          <ac:chgData name="Luka De Lacey" userId="7c5079d1e183509d" providerId="LiveId" clId="{023B67FE-E4C5-42E2-A7E8-295CAE2B4F0E}" dt="2026-04-09T00:50:26.746" v="7420" actId="20577"/>
+          <ac:spMkLst>
+            <pc:docMk/>
+            <pc:sldMk cId="252362121" sldId="272"/>
+            <ac:spMk id="3" creationId="{9B6422F9-AE2D-329A-598E-1F3E0199D9D5}"/>
+          </ac:spMkLst>
+        </pc:spChg>
+        <pc:spChg chg="add mod ord">
+          <ac:chgData name="Luka De Lacey" userId="7c5079d1e183509d" providerId="LiveId" clId="{023B67FE-E4C5-42E2-A7E8-295CAE2B4F0E}" dt="2026-04-09T00:19:01.641" v="6746" actId="1076"/>
+          <ac:spMkLst>
+            <pc:docMk/>
+            <pc:sldMk cId="252362121" sldId="272"/>
+            <ac:spMk id="8" creationId="{C13E822B-7036-87AF-5274-089CE2BEFC50}"/>
+          </ac:spMkLst>
+        </pc:spChg>
+        <pc:spChg chg="add mod">
+          <ac:chgData name="Luka De Lacey" userId="7c5079d1e183509d" providerId="LiveId" clId="{023B67FE-E4C5-42E2-A7E8-295CAE2B4F0E}" dt="2026-04-09T00:19:37.017" v="6751" actId="14100"/>
+          <ac:spMkLst>
+            <pc:docMk/>
+            <pc:sldMk cId="252362121" sldId="272"/>
+            <ac:spMk id="9" creationId="{1FE6A54A-A78C-66A1-160E-BF85BDCA7DFE}"/>
+          </ac:spMkLst>
+        </pc:spChg>
+        <pc:grpChg chg="add mod">
+          <ac:chgData name="Luka De Lacey" userId="7c5079d1e183509d" providerId="LiveId" clId="{023B67FE-E4C5-42E2-A7E8-295CAE2B4F0E}" dt="2026-04-09T00:19:01.641" v="6746" actId="1076"/>
+          <ac:grpSpMkLst>
+            <pc:docMk/>
+            <pc:sldMk cId="252362121" sldId="272"/>
+            <ac:grpSpMk id="7" creationId="{C492A40D-13B9-BDAD-9204-663DB424EF7F}"/>
+          </ac:grpSpMkLst>
+        </pc:grpChg>
+        <pc:picChg chg="add mod">
+          <ac:chgData name="Luka De Lacey" userId="7c5079d1e183509d" providerId="LiveId" clId="{023B67FE-E4C5-42E2-A7E8-295CAE2B4F0E}" dt="2026-04-09T00:15:35.826" v="6726" actId="208"/>
+          <ac:picMkLst>
+            <pc:docMk/>
+            <pc:sldMk cId="252362121" sldId="272"/>
+            <ac:picMk id="5" creationId="{3AA60A2C-5C41-794F-CADB-4BC84587A2AB}"/>
+          </ac:picMkLst>
+        </pc:picChg>
+        <pc:picChg chg="mod modCrop">
+          <ac:chgData name="Luka De Lacey" userId="7c5079d1e183509d" providerId="LiveId" clId="{023B67FE-E4C5-42E2-A7E8-295CAE2B4F0E}" dt="2026-04-09T00:16:24.118" v="6733" actId="732"/>
+          <ac:picMkLst>
+            <pc:docMk/>
+            <pc:sldMk cId="252362121" sldId="272"/>
+            <ac:picMk id="6" creationId="{B65C2A4C-C975-2337-D134-456658CCC597}"/>
+          </ac:picMkLst>
+        </pc:picChg>
+      </pc:sldChg>
+      <pc:sldChg chg="addSp modSp new mod">
+        <pc:chgData name="Luka De Lacey" userId="7c5079d1e183509d" providerId="LiveId" clId="{023B67FE-E4C5-42E2-A7E8-295CAE2B4F0E}" dt="2026-04-09T00:44:17.501" v="7187" actId="27636"/>
+        <pc:sldMkLst>
+          <pc:docMk/>
+          <pc:sldMk cId="1175315257" sldId="273"/>
+        </pc:sldMkLst>
+        <pc:spChg chg="mod ord">
+          <ac:chgData name="Luka De Lacey" userId="7c5079d1e183509d" providerId="LiveId" clId="{023B67FE-E4C5-42E2-A7E8-295CAE2B4F0E}" dt="2026-04-09T00:44:17.501" v="7187" actId="27636"/>
+          <ac:spMkLst>
+            <pc:docMk/>
+            <pc:sldMk cId="1175315257" sldId="273"/>
+            <ac:spMk id="2" creationId="{C9DBB717-E9F4-0D61-5929-831A1993B149}"/>
+          </ac:spMkLst>
+        </pc:spChg>
+        <pc:picChg chg="add mod modCrop">
+          <ac:chgData name="Luka De Lacey" userId="7c5079d1e183509d" providerId="LiveId" clId="{023B67FE-E4C5-42E2-A7E8-295CAE2B4F0E}" dt="2026-04-09T00:43:32.776" v="7173" actId="1076"/>
+          <ac:picMkLst>
+            <pc:docMk/>
+            <pc:sldMk cId="1175315257" sldId="273"/>
+            <ac:picMk id="5" creationId="{BA3CCDA1-9B27-1059-5AA0-14B938D639E1}"/>
+          </ac:picMkLst>
+        </pc:picChg>
+        <pc:picChg chg="add mod">
+          <ac:chgData name="Luka De Lacey" userId="7c5079d1e183509d" providerId="LiveId" clId="{023B67FE-E4C5-42E2-A7E8-295CAE2B4F0E}" dt="2026-04-09T00:43:35.542" v="7174" actId="1076"/>
+          <ac:picMkLst>
+            <pc:docMk/>
+            <pc:sldMk cId="1175315257" sldId="273"/>
+            <ac:picMk id="7" creationId="{D0BAEB18-3533-0AA4-CD02-17B59619934B}"/>
+          </ac:picMkLst>
+        </pc:picChg>
+      </pc:sldChg>
+      <pc:sldChg chg="addSp delSp modSp add mod ord">
+        <pc:chgData name="Luka De Lacey" userId="7c5079d1e183509d" providerId="LiveId" clId="{023B67FE-E4C5-42E2-A7E8-295CAE2B4F0E}" dt="2026-04-09T00:46:45.915" v="7229" actId="1076"/>
+        <pc:sldMkLst>
+          <pc:docMk/>
+          <pc:sldMk cId="1171554105" sldId="274"/>
+        </pc:sldMkLst>
+        <pc:spChg chg="mod">
+          <ac:chgData name="Luka De Lacey" userId="7c5079d1e183509d" providerId="LiveId" clId="{023B67FE-E4C5-42E2-A7E8-295CAE2B4F0E}" dt="2026-04-09T00:46:05.154" v="7210"/>
+          <ac:spMkLst>
+            <pc:docMk/>
+            <pc:sldMk cId="1171554105" sldId="274"/>
+            <ac:spMk id="2" creationId="{EC06435F-0E97-88F3-0826-655409FBB445}"/>
+          </ac:spMkLst>
+        </pc:spChg>
+        <pc:spChg chg="mod">
+          <ac:chgData name="Luka De Lacey" userId="7c5079d1e183509d" providerId="LiveId" clId="{023B67FE-E4C5-42E2-A7E8-295CAE2B4F0E}" dt="2026-04-09T00:46:13.228" v="7216" actId="27636"/>
+          <ac:spMkLst>
+            <pc:docMk/>
+            <pc:sldMk cId="1171554105" sldId="274"/>
+            <ac:spMk id="3" creationId="{83DF29DD-9391-E6AB-F2EE-28A8EF485B45}"/>
+          </ac:spMkLst>
+        </pc:spChg>
+        <pc:spChg chg="add mod">
+          <ac:chgData name="Luka De Lacey" userId="7c5079d1e183509d" providerId="LiveId" clId="{023B67FE-E4C5-42E2-A7E8-295CAE2B4F0E}" dt="2026-04-09T00:46:28.613" v="7223" actId="1076"/>
+          <ac:spMkLst>
+            <pc:docMk/>
+            <pc:sldMk cId="1171554105" sldId="274"/>
+            <ac:spMk id="7" creationId="{C5D975A9-0AE5-8777-CC8D-725776B51E87}"/>
+          </ac:spMkLst>
+        </pc:spChg>
+        <pc:picChg chg="add mod modCrop">
+          <ac:chgData name="Luka De Lacey" userId="7c5079d1e183509d" providerId="LiveId" clId="{023B67FE-E4C5-42E2-A7E8-295CAE2B4F0E}" dt="2026-04-09T00:46:45.915" v="7229" actId="1076"/>
+          <ac:picMkLst>
+            <pc:docMk/>
+            <pc:sldMk cId="1171554105" sldId="274"/>
+            <ac:picMk id="4" creationId="{41687E71-6FB7-7782-C74D-7118F1F957BB}"/>
+          </ac:picMkLst>
+        </pc:picChg>
+        <pc:picChg chg="del">
+          <ac:chgData name="Luka De Lacey" userId="7c5079d1e183509d" providerId="LiveId" clId="{023B67FE-E4C5-42E2-A7E8-295CAE2B4F0E}" dt="2026-04-09T00:46:19.219" v="7218" actId="478"/>
+          <ac:picMkLst>
+            <pc:docMk/>
+            <pc:sldMk cId="1171554105" sldId="274"/>
+            <ac:picMk id="5" creationId="{354CEA2B-E57A-42B1-4768-4CCEE540CF95}"/>
+          </ac:picMkLst>
+        </pc:picChg>
       </pc:sldChg>
     </pc:docChg>
   </pc:docChgLst>
 </pc:chgInfo>
+</file>
+
+<file path=ppt/notesMasters/notesMaster1.xml><?xml version="1.0" encoding="utf-8"?>
+<p:notesMaster xmlns:a="http://schemas.openxmlformats.org/drawingml/2006/main" xmlns:r="http://schemas.openxmlformats.org/officeDocument/2006/relationships" xmlns:p="http://schemas.openxmlformats.org/presentationml/2006/main">
+  <p:cSld>
+    <p:bg>
+      <p:bgRef idx="1001">
+        <a:schemeClr val="bg1"/>
+      </p:bgRef>
+    </p:bg>
+    <p:spTree>
+      <p:nvGrpSpPr>
+        <p:cNvPr id="1" name=""/>
+        <p:cNvGrpSpPr/>
+        <p:nvPr/>
+      </p:nvGrpSpPr>
+      <p:grpSpPr>
+        <a:xfrm>
+          <a:off x="0" y="0"/>
+          <a:ext cx="0" cy="0"/>
+          <a:chOff x="0" y="0"/>
+          <a:chExt cx="0" cy="0"/>
+        </a:xfrm>
+      </p:grpSpPr>
+      <p:sp>
+        <p:nvSpPr>
+          <p:cNvPr id="2" name="Header Placeholder 1"/>
+          <p:cNvSpPr>
+            <a:spLocks noGrp="1"/>
+          </p:cNvSpPr>
+          <p:nvPr>
+            <p:ph type="hdr" sz="quarter"/>
+          </p:nvPr>
+        </p:nvSpPr>
+        <p:spPr>
+          <a:xfrm>
+            <a:off x="0" y="0"/>
+            <a:ext cx="2971800" cy="458788"/>
+          </a:xfrm>
+          <a:prstGeom prst="rect">
+            <a:avLst/>
+          </a:prstGeom>
+        </p:spPr>
+        <p:txBody>
+          <a:bodyPr vert="horz" lIns="91440" tIns="45720" rIns="91440" bIns="45720" rtlCol="0"/>
+          <a:lstStyle>
+            <a:lvl1pPr algn="l">
+              <a:defRPr sz="1200"/>
+            </a:lvl1pPr>
+          </a:lstStyle>
+          <a:p>
+            <a:endParaRPr lang="en-IE"/>
+          </a:p>
+        </p:txBody>
+      </p:sp>
+      <p:sp>
+        <p:nvSpPr>
+          <p:cNvPr id="3" name="Date Placeholder 2"/>
+          <p:cNvSpPr>
+            <a:spLocks noGrp="1"/>
+          </p:cNvSpPr>
+          <p:nvPr>
+            <p:ph type="dt" idx="1"/>
+          </p:nvPr>
+        </p:nvSpPr>
+        <p:spPr>
+          <a:xfrm>
+            <a:off x="3884613" y="0"/>
+            <a:ext cx="2971800" cy="458788"/>
+          </a:xfrm>
+          <a:prstGeom prst="rect">
+            <a:avLst/>
+          </a:prstGeom>
+        </p:spPr>
+        <p:txBody>
+          <a:bodyPr vert="horz" lIns="91440" tIns="45720" rIns="91440" bIns="45720" rtlCol="0"/>
+          <a:lstStyle>
+            <a:lvl1pPr algn="r">
+              <a:defRPr sz="1200"/>
+            </a:lvl1pPr>
+          </a:lstStyle>
+          <a:p>
+            <a:fld id="{377368BC-E7E1-4DE4-A680-B359EC263427}" type="datetimeFigureOut">
+              <a:rPr lang="en-IE" smtClean="0"/>
+              <a:t>09/04/2026</a:t>
+            </a:fld>
+            <a:endParaRPr lang="en-IE"/>
+          </a:p>
+        </p:txBody>
+      </p:sp>
+      <p:sp>
+        <p:nvSpPr>
+          <p:cNvPr id="4" name="Slide Image Placeholder 3"/>
+          <p:cNvSpPr>
+            <a:spLocks noGrp="1" noRot="1" noChangeAspect="1"/>
+          </p:cNvSpPr>
+          <p:nvPr>
+            <p:ph type="sldImg" idx="2"/>
+          </p:nvPr>
+        </p:nvSpPr>
+        <p:spPr>
+          <a:xfrm>
+            <a:off x="685800" y="1143000"/>
+            <a:ext cx="5486400" cy="3086100"/>
+          </a:xfrm>
+          <a:prstGeom prst="rect">
+            <a:avLst/>
+          </a:prstGeom>
+          <a:noFill/>
+          <a:ln w="12700">
+            <a:solidFill>
+              <a:prstClr val="black"/>
+            </a:solidFill>
+          </a:ln>
+        </p:spPr>
+        <p:txBody>
+          <a:bodyPr vert="horz" lIns="91440" tIns="45720" rIns="91440" bIns="45720" rtlCol="0" anchor="ctr"/>
+          <a:lstStyle/>
+          <a:p>
+            <a:endParaRPr lang="en-IE"/>
+          </a:p>
+        </p:txBody>
+      </p:sp>
+      <p:sp>
+        <p:nvSpPr>
+          <p:cNvPr id="5" name="Notes Placeholder 4"/>
+          <p:cNvSpPr>
+            <a:spLocks noGrp="1"/>
+          </p:cNvSpPr>
+          <p:nvPr>
+            <p:ph type="body" sz="quarter" idx="3"/>
+          </p:nvPr>
+        </p:nvSpPr>
+        <p:spPr>
+          <a:xfrm>
+            <a:off x="685800" y="4400550"/>
+            <a:ext cx="5486400" cy="3600450"/>
+          </a:xfrm>
+          <a:prstGeom prst="rect">
+            <a:avLst/>
+          </a:prstGeom>
+        </p:spPr>
+        <p:txBody>
+          <a:bodyPr vert="horz" lIns="91440" tIns="45720" rIns="91440" bIns="45720" rtlCol="0"/>
+          <a:lstStyle/>
+          <a:p>
+            <a:pPr lvl="0"/>
+            <a:r>
+              <a:rPr lang="en-GB"/>
+              <a:t>Click to edit Master text styles</a:t>
+            </a:r>
+          </a:p>
+          <a:p>
+            <a:pPr lvl="1"/>
+            <a:r>
+              <a:rPr lang="en-GB"/>
+              <a:t>Second level</a:t>
+            </a:r>
+          </a:p>
+          <a:p>
+            <a:pPr lvl="2"/>
+            <a:r>
+              <a:rPr lang="en-GB"/>
+              <a:t>Third level</a:t>
+            </a:r>
+          </a:p>
+          <a:p>
+            <a:pPr lvl="3"/>
+            <a:r>
+              <a:rPr lang="en-GB"/>
+              <a:t>Fourth level</a:t>
+            </a:r>
+          </a:p>
+          <a:p>
+            <a:pPr lvl="4"/>
+            <a:r>
+              <a:rPr lang="en-GB"/>
+              <a:t>Fifth level</a:t>
+            </a:r>
+            <a:endParaRPr lang="en-IE"/>
+          </a:p>
+        </p:txBody>
+      </p:sp>
+      <p:sp>
+        <p:nvSpPr>
+          <p:cNvPr id="6" name="Footer Placeholder 5"/>
+          <p:cNvSpPr>
+            <a:spLocks noGrp="1"/>
+          </p:cNvSpPr>
+          <p:nvPr>
+            <p:ph type="ftr" sz="quarter" idx="4"/>
+          </p:nvPr>
+        </p:nvSpPr>
+        <p:spPr>
+          <a:xfrm>
+            <a:off x="0" y="8685213"/>
+            <a:ext cx="2971800" cy="458787"/>
+          </a:xfrm>
+          <a:prstGeom prst="rect">
+            <a:avLst/>
+          </a:prstGeom>
+        </p:spPr>
+        <p:txBody>
+          <a:bodyPr vert="horz" lIns="91440" tIns="45720" rIns="91440" bIns="45720" rtlCol="0" anchor="b"/>
+          <a:lstStyle>
+            <a:lvl1pPr algn="l">
+              <a:defRPr sz="1200"/>
+            </a:lvl1pPr>
+          </a:lstStyle>
+          <a:p>
+            <a:endParaRPr lang="en-IE"/>
+          </a:p>
+        </p:txBody>
+      </p:sp>
+      <p:sp>
+        <p:nvSpPr>
+          <p:cNvPr id="7" name="Slide Number Placeholder 6"/>
+          <p:cNvSpPr>
+            <a:spLocks noGrp="1"/>
+          </p:cNvSpPr>
+          <p:nvPr>
+            <p:ph type="sldNum" sz="quarter" idx="5"/>
+          </p:nvPr>
+        </p:nvSpPr>
+        <p:spPr>
+          <a:xfrm>
+            <a:off x="3884613" y="8685213"/>
+            <a:ext cx="2971800" cy="458787"/>
+          </a:xfrm>
+          <a:prstGeom prst="rect">
+            <a:avLst/>
+          </a:prstGeom>
+        </p:spPr>
+        <p:txBody>
+          <a:bodyPr vert="horz" lIns="91440" tIns="45720" rIns="91440" bIns="45720" rtlCol="0" anchor="b"/>
+          <a:lstStyle>
+            <a:lvl1pPr algn="r">
+              <a:defRPr sz="1200"/>
+            </a:lvl1pPr>
+          </a:lstStyle>
+          <a:p>
+            <a:fld id="{C78813D0-B141-48C3-B44C-F59AD8F8415A}" type="slidenum">
+              <a:rPr lang="en-IE" smtClean="0"/>
+              <a:t>‹#›</a:t>
+            </a:fld>
+            <a:endParaRPr lang="en-IE"/>
+          </a:p>
+        </p:txBody>
+      </p:sp>
+    </p:spTree>
+    <p:extLst>
+      <p:ext uri="{BB962C8B-B14F-4D97-AF65-F5344CB8AC3E}">
+        <p14:creationId xmlns:p14="http://schemas.microsoft.com/office/powerpoint/2010/main" val="2838725747"/>
+      </p:ext>
+    </p:extLst>
+  </p:cSld>
+  <p:clrMap bg1="lt1" tx1="dk1" bg2="lt2" tx2="dk2" accent1="accent1" accent2="accent2" accent3="accent3" accent4="accent4" accent5="accent5" accent6="accent6" hlink="hlink" folHlink="folHlink"/>
+  <p:notesStyle>
+    <a:lvl1pPr marL="0" algn="l" defTabSz="914400" rtl="0" eaLnBrk="1" latinLnBrk="0" hangingPunct="1">
+      <a:defRPr sz="1200" kern="1200">
+        <a:solidFill>
+          <a:schemeClr val="tx1"/>
+        </a:solidFill>
+        <a:latin typeface="+mn-lt"/>
+        <a:ea typeface="+mn-ea"/>
+        <a:cs typeface="+mn-cs"/>
+      </a:defRPr>
+    </a:lvl1pPr>
+    <a:lvl2pPr marL="457200" algn="l" defTabSz="914400" rtl="0" eaLnBrk="1" latinLnBrk="0" hangingPunct="1">
+      <a:defRPr sz="1200" kern="1200">
+        <a:solidFill>
+          <a:schemeClr val="tx1"/>
+        </a:solidFill>
+        <a:latin typeface="+mn-lt"/>
+        <a:ea typeface="+mn-ea"/>
+        <a:cs typeface="+mn-cs"/>
+      </a:defRPr>
+    </a:lvl2pPr>
+    <a:lvl3pPr marL="914400" algn="l" defTabSz="914400" rtl="0" eaLnBrk="1" latinLnBrk="0" hangingPunct="1">
+      <a:defRPr sz="1200" kern="1200">
+        <a:solidFill>
+          <a:schemeClr val="tx1"/>
+        </a:solidFill>
+        <a:latin typeface="+mn-lt"/>
+        <a:ea typeface="+mn-ea"/>
+        <a:cs typeface="+mn-cs"/>
+      </a:defRPr>
+    </a:lvl3pPr>
+    <a:lvl4pPr marL="1371600" algn="l" defTabSz="914400" rtl="0" eaLnBrk="1" latinLnBrk="0" hangingPunct="1">
+      <a:defRPr sz="1200" kern="1200">
+        <a:solidFill>
+          <a:schemeClr val="tx1"/>
+        </a:solidFill>
+        <a:latin typeface="+mn-lt"/>
+        <a:ea typeface="+mn-ea"/>
+        <a:cs typeface="+mn-cs"/>
+      </a:defRPr>
+    </a:lvl4pPr>
+    <a:lvl5pPr marL="1828800" algn="l" defTabSz="914400" rtl="0" eaLnBrk="1" latinLnBrk="0" hangingPunct="1">
+      <a:defRPr sz="1200" kern="1200">
+        <a:solidFill>
+          <a:schemeClr val="tx1"/>
+        </a:solidFill>
+        <a:latin typeface="+mn-lt"/>
+        <a:ea typeface="+mn-ea"/>
+        <a:cs typeface="+mn-cs"/>
+      </a:defRPr>
+    </a:lvl5pPr>
+    <a:lvl6pPr marL="2286000" algn="l" defTabSz="914400" rtl="0" eaLnBrk="1" latinLnBrk="0" hangingPunct="1">
+      <a:defRPr sz="1200" kern="1200">
+        <a:solidFill>
+          <a:schemeClr val="tx1"/>
+        </a:solidFill>
+        <a:latin typeface="+mn-lt"/>
+        <a:ea typeface="+mn-ea"/>
+        <a:cs typeface="+mn-cs"/>
+      </a:defRPr>
+    </a:lvl6pPr>
+    <a:lvl7pPr marL="2743200" algn="l" defTabSz="914400" rtl="0" eaLnBrk="1" latinLnBrk="0" hangingPunct="1">
+      <a:defRPr sz="1200" kern="1200">
+        <a:solidFill>
+          <a:schemeClr val="tx1"/>
+        </a:solidFill>
+        <a:latin typeface="+mn-lt"/>
+        <a:ea typeface="+mn-ea"/>
+        <a:cs typeface="+mn-cs"/>
+      </a:defRPr>
+    </a:lvl7pPr>
+    <a:lvl8pPr marL="3200400" algn="l" defTabSz="914400" rtl="0" eaLnBrk="1" latinLnBrk="0" hangingPunct="1">
+      <a:defRPr sz="1200" kern="1200">
+        <a:solidFill>
+          <a:schemeClr val="tx1"/>
+        </a:solidFill>
+        <a:latin typeface="+mn-lt"/>
+        <a:ea typeface="+mn-ea"/>
+        <a:cs typeface="+mn-cs"/>
+      </a:defRPr>
+    </a:lvl8pPr>
+    <a:lvl9pPr marL="3657600" algn="l" defTabSz="914400" rtl="0" eaLnBrk="1" latinLnBrk="0" hangingPunct="1">
+      <a:defRPr sz="1200" kern="1200">
+        <a:solidFill>
+          <a:schemeClr val="tx1"/>
+        </a:solidFill>
+        <a:latin typeface="+mn-lt"/>
+        <a:ea typeface="+mn-ea"/>
+        <a:cs typeface="+mn-cs"/>
+      </a:defRPr>
+    </a:lvl9pPr>
+  </p:notesStyle>
+</p:notesMaster>
+</file>
+
+<file path=ppt/notesSlides/notesSlide1.xml><?xml version="1.0" encoding="utf-8"?>
+<p:notes xmlns:a="http://schemas.openxmlformats.org/drawingml/2006/main" xmlns:r="http://schemas.openxmlformats.org/officeDocument/2006/relationships" xmlns:p="http://schemas.openxmlformats.org/presentationml/2006/main">
+  <p:cSld>
+    <p:spTree>
+      <p:nvGrpSpPr>
+        <p:cNvPr id="1" name=""/>
+        <p:cNvGrpSpPr/>
+        <p:nvPr/>
+      </p:nvGrpSpPr>
+      <p:grpSpPr>
+        <a:xfrm>
+          <a:off x="0" y="0"/>
+          <a:ext cx="0" cy="0"/>
+          <a:chOff x="0" y="0"/>
+          <a:chExt cx="0" cy="0"/>
+        </a:xfrm>
+      </p:grpSpPr>
+      <p:sp>
+        <p:nvSpPr>
+          <p:cNvPr id="2" name="Slide Image Placeholder 1"/>
+          <p:cNvSpPr>
+            <a:spLocks noGrp="1" noRot="1" noChangeAspect="1"/>
+          </p:cNvSpPr>
+          <p:nvPr>
+            <p:ph type="sldImg"/>
+          </p:nvPr>
+        </p:nvSpPr>
+        <p:spPr/>
+      </p:sp>
+      <p:sp>
+        <p:nvSpPr>
+          <p:cNvPr id="3" name="Notes Placeholder 2"/>
+          <p:cNvSpPr>
+            <a:spLocks noGrp="1"/>
+          </p:cNvSpPr>
+          <p:nvPr>
+            <p:ph type="body" idx="1"/>
+          </p:nvPr>
+        </p:nvSpPr>
+        <p:spPr/>
+        <p:txBody>
+          <a:bodyPr/>
+          <a:lstStyle/>
+          <a:p>
+            <a:r>
+              <a:rPr lang="en-IE" dirty="0"/>
+              <a:t>There is another key consideration – SD positioning is relative to MCR right?</a:t>
+            </a:r>
+          </a:p>
+        </p:txBody>
+      </p:sp>
+      <p:sp>
+        <p:nvSpPr>
+          <p:cNvPr id="4" name="Slide Number Placeholder 3"/>
+          <p:cNvSpPr>
+            <a:spLocks noGrp="1"/>
+          </p:cNvSpPr>
+          <p:nvPr>
+            <p:ph type="sldNum" sz="quarter" idx="5"/>
+          </p:nvPr>
+        </p:nvSpPr>
+        <p:spPr/>
+        <p:txBody>
+          <a:bodyPr/>
+          <a:lstStyle/>
+          <a:p>
+            <a:fld id="{C78813D0-B141-48C3-B44C-F59AD8F8415A}" type="slidenum">
+              <a:rPr lang="en-IE" smtClean="0"/>
+              <a:t>5</a:t>
+            </a:fld>
+            <a:endParaRPr lang="en-IE"/>
+          </a:p>
+        </p:txBody>
+      </p:sp>
+    </p:spTree>
+    <p:extLst>
+      <p:ext uri="{BB962C8B-B14F-4D97-AF65-F5344CB8AC3E}">
+        <p14:creationId xmlns:p14="http://schemas.microsoft.com/office/powerpoint/2010/main" val="149386665"/>
+      </p:ext>
+    </p:extLst>
+  </p:cSld>
+  <p:clrMapOvr>
+    <a:masterClrMapping/>
+  </p:clrMapOvr>
+</p:notes>
+</file>
+
+<file path=ppt/notesSlides/notesSlide2.xml><?xml version="1.0" encoding="utf-8"?>
+<p:notes xmlns:a="http://schemas.openxmlformats.org/drawingml/2006/main" xmlns:r="http://schemas.openxmlformats.org/officeDocument/2006/relationships" xmlns:p="http://schemas.openxmlformats.org/presentationml/2006/main">
+  <p:cSld>
+    <p:spTree>
+      <p:nvGrpSpPr>
+        <p:cNvPr id="1" name=""/>
+        <p:cNvGrpSpPr/>
+        <p:nvPr/>
+      </p:nvGrpSpPr>
+      <p:grpSpPr>
+        <a:xfrm>
+          <a:off x="0" y="0"/>
+          <a:ext cx="0" cy="0"/>
+          <a:chOff x="0" y="0"/>
+          <a:chExt cx="0" cy="0"/>
+        </a:xfrm>
+      </p:grpSpPr>
+      <p:sp>
+        <p:nvSpPr>
+          <p:cNvPr id="2" name="Slide Image Placeholder 1"/>
+          <p:cNvSpPr>
+            <a:spLocks noGrp="1" noRot="1" noChangeAspect="1"/>
+          </p:cNvSpPr>
+          <p:nvPr>
+            <p:ph type="sldImg"/>
+          </p:nvPr>
+        </p:nvSpPr>
+        <p:spPr/>
+      </p:sp>
+      <p:sp>
+        <p:nvSpPr>
+          <p:cNvPr id="3" name="Notes Placeholder 2"/>
+          <p:cNvSpPr>
+            <a:spLocks noGrp="1"/>
+          </p:cNvSpPr>
+          <p:nvPr>
+            <p:ph type="body" idx="1"/>
+          </p:nvPr>
+        </p:nvSpPr>
+        <p:spPr/>
+        <p:txBody>
+          <a:bodyPr/>
+          <a:lstStyle/>
+          <a:p>
+            <a:r>
+              <a:rPr lang="en-IE" dirty="0"/>
+              <a:t>Clear skew on economics, GAL-TAN seems to vary more.</a:t>
+            </a:r>
+          </a:p>
+        </p:txBody>
+      </p:sp>
+      <p:sp>
+        <p:nvSpPr>
+          <p:cNvPr id="4" name="Slide Number Placeholder 3"/>
+          <p:cNvSpPr>
+            <a:spLocks noGrp="1"/>
+          </p:cNvSpPr>
+          <p:nvPr>
+            <p:ph type="sldNum" sz="quarter" idx="5"/>
+          </p:nvPr>
+        </p:nvSpPr>
+        <p:spPr/>
+        <p:txBody>
+          <a:bodyPr/>
+          <a:lstStyle/>
+          <a:p>
+            <a:fld id="{C78813D0-B141-48C3-B44C-F59AD8F8415A}" type="slidenum">
+              <a:rPr lang="en-IE" smtClean="0"/>
+              <a:t>8</a:t>
+            </a:fld>
+            <a:endParaRPr lang="en-IE"/>
+          </a:p>
+        </p:txBody>
+      </p:sp>
+    </p:spTree>
+    <p:extLst>
+      <p:ext uri="{BB962C8B-B14F-4D97-AF65-F5344CB8AC3E}">
+        <p14:creationId xmlns:p14="http://schemas.microsoft.com/office/powerpoint/2010/main" val="1852299927"/>
+      </p:ext>
+    </p:extLst>
+  </p:cSld>
+  <p:clrMapOvr>
+    <a:masterClrMapping/>
+  </p:clrMapOvr>
+</p:notes>
 </file>
 
 <file path=ppt/slideLayouts/slideLayout1.xml><?xml version="1.0" encoding="utf-8"?>
@@ -853,7 +1742,7 @@
           <a:p>
             <a:fld id="{EA00010D-EE6E-49D4-999F-14933D66CA71}" type="datetimeFigureOut">
               <a:rPr lang="en-IE" smtClean="0"/>
-              <a:t>31/03/2026</a:t>
+              <a:t>09/04/2026</a:t>
             </a:fld>
             <a:endParaRPr lang="en-IE"/>
           </a:p>
@@ -1053,7 +1942,7 @@
           <a:p>
             <a:fld id="{EA00010D-EE6E-49D4-999F-14933D66CA71}" type="datetimeFigureOut">
               <a:rPr lang="en-IE" smtClean="0"/>
-              <a:t>31/03/2026</a:t>
+              <a:t>09/04/2026</a:t>
             </a:fld>
             <a:endParaRPr lang="en-IE"/>
           </a:p>
@@ -1263,7 +2152,7 @@
           <a:p>
             <a:fld id="{EA00010D-EE6E-49D4-999F-14933D66CA71}" type="datetimeFigureOut">
               <a:rPr lang="en-IE" smtClean="0"/>
-              <a:t>31/03/2026</a:t>
+              <a:t>09/04/2026</a:t>
             </a:fld>
             <a:endParaRPr lang="en-IE"/>
           </a:p>
@@ -1463,7 +2352,7 @@
           <a:p>
             <a:fld id="{EA00010D-EE6E-49D4-999F-14933D66CA71}" type="datetimeFigureOut">
               <a:rPr lang="en-IE" smtClean="0"/>
-              <a:t>31/03/2026</a:t>
+              <a:t>09/04/2026</a:t>
             </a:fld>
             <a:endParaRPr lang="en-IE"/>
           </a:p>
@@ -1739,7 +2628,7 @@
           <a:p>
             <a:fld id="{EA00010D-EE6E-49D4-999F-14933D66CA71}" type="datetimeFigureOut">
               <a:rPr lang="en-IE" smtClean="0"/>
-              <a:t>31/03/2026</a:t>
+              <a:t>09/04/2026</a:t>
             </a:fld>
             <a:endParaRPr lang="en-IE"/>
           </a:p>
@@ -2007,7 +2896,7 @@
           <a:p>
             <a:fld id="{EA00010D-EE6E-49D4-999F-14933D66CA71}" type="datetimeFigureOut">
               <a:rPr lang="en-IE" smtClean="0"/>
-              <a:t>31/03/2026</a:t>
+              <a:t>09/04/2026</a:t>
             </a:fld>
             <a:endParaRPr lang="en-IE"/>
           </a:p>
@@ -2422,7 +3311,7 @@
           <a:p>
             <a:fld id="{EA00010D-EE6E-49D4-999F-14933D66CA71}" type="datetimeFigureOut">
               <a:rPr lang="en-IE" smtClean="0"/>
-              <a:t>31/03/2026</a:t>
+              <a:t>09/04/2026</a:t>
             </a:fld>
             <a:endParaRPr lang="en-IE"/>
           </a:p>
@@ -2564,7 +3453,7 @@
           <a:p>
             <a:fld id="{EA00010D-EE6E-49D4-999F-14933D66CA71}" type="datetimeFigureOut">
               <a:rPr lang="en-IE" smtClean="0"/>
-              <a:t>31/03/2026</a:t>
+              <a:t>09/04/2026</a:t>
             </a:fld>
             <a:endParaRPr lang="en-IE"/>
           </a:p>
@@ -2677,7 +3566,7 @@
           <a:p>
             <a:fld id="{EA00010D-EE6E-49D4-999F-14933D66CA71}" type="datetimeFigureOut">
               <a:rPr lang="en-IE" smtClean="0"/>
-              <a:t>31/03/2026</a:t>
+              <a:t>09/04/2026</a:t>
             </a:fld>
             <a:endParaRPr lang="en-IE"/>
           </a:p>
@@ -2990,7 +3879,7 @@
           <a:p>
             <a:fld id="{EA00010D-EE6E-49D4-999F-14933D66CA71}" type="datetimeFigureOut">
               <a:rPr lang="en-IE" smtClean="0"/>
-              <a:t>31/03/2026</a:t>
+              <a:t>09/04/2026</a:t>
             </a:fld>
             <a:endParaRPr lang="en-IE"/>
           </a:p>
@@ -3279,7 +4168,7 @@
           <a:p>
             <a:fld id="{EA00010D-EE6E-49D4-999F-14933D66CA71}" type="datetimeFigureOut">
               <a:rPr lang="en-IE" smtClean="0"/>
-              <a:t>31/03/2026</a:t>
+              <a:t>09/04/2026</a:t>
             </a:fld>
             <a:endParaRPr lang="en-IE"/>
           </a:p>
@@ -3522,7 +4411,7 @@
           <a:p>
             <a:fld id="{EA00010D-EE6E-49D4-999F-14933D66CA71}" type="datetimeFigureOut">
               <a:rPr lang="en-IE" smtClean="0"/>
-              <a:t>31/03/2026</a:t>
+              <a:t>09/04/2026</a:t>
             </a:fld>
             <a:endParaRPr lang="en-IE"/>
           </a:p>
@@ -5254,6 +6143,513 @@
   <p:cSld>
     <p:spTree>
       <p:nvGrpSpPr>
+        <p:cNvPr id="1" name=""/>
+        <p:cNvGrpSpPr/>
+        <p:nvPr/>
+      </p:nvGrpSpPr>
+      <p:grpSpPr>
+        <a:xfrm>
+          <a:off x="0" y="0"/>
+          <a:ext cx="0" cy="0"/>
+          <a:chOff x="0" y="0"/>
+          <a:chExt cx="0" cy="0"/>
+        </a:xfrm>
+      </p:grpSpPr>
+      <p:sp>
+        <p:nvSpPr>
+          <p:cNvPr id="2" name="Title 1">
+            <a:extLst>
+              <a:ext uri="{FF2B5EF4-FFF2-40B4-BE49-F238E27FC236}">
+                <a16:creationId xmlns:a16="http://schemas.microsoft.com/office/drawing/2014/main" id="{777A5E61-73B1-744D-B3DF-948FFAC86125}"/>
+              </a:ext>
+            </a:extLst>
+          </p:cNvPr>
+          <p:cNvSpPr>
+            <a:spLocks noGrp="1"/>
+          </p:cNvSpPr>
+          <p:nvPr>
+            <p:ph type="title"/>
+          </p:nvPr>
+        </p:nvSpPr>
+        <p:spPr>
+          <a:xfrm>
+            <a:off x="838200" y="365125"/>
+            <a:ext cx="5900928" cy="1325563"/>
+          </a:xfrm>
+        </p:spPr>
+        <p:txBody>
+          <a:bodyPr>
+            <a:normAutofit/>
+          </a:bodyPr>
+          <a:lstStyle/>
+          <a:p>
+            <a:r>
+              <a:rPr lang="en-IE" sz="4000" b="1" dirty="0">
+                <a:latin typeface="Verdana" panose="020B0604030504040204" pitchFamily="34" charset="0"/>
+                <a:ea typeface="Verdana" panose="020B0604030504040204" pitchFamily="34" charset="0"/>
+              </a:rPr>
+              <a:t>Replication Part 3: Regression</a:t>
+            </a:r>
+          </a:p>
+        </p:txBody>
+      </p:sp>
+      <p:sp>
+        <p:nvSpPr>
+          <p:cNvPr id="3" name="Content Placeholder 2">
+            <a:extLst>
+              <a:ext uri="{FF2B5EF4-FFF2-40B4-BE49-F238E27FC236}">
+                <a16:creationId xmlns:a16="http://schemas.microsoft.com/office/drawing/2014/main" id="{C50329FD-A7F1-47DF-54DD-BC573B81BFE0}"/>
+              </a:ext>
+            </a:extLst>
+          </p:cNvPr>
+          <p:cNvSpPr>
+            <a:spLocks noGrp="1"/>
+          </p:cNvSpPr>
+          <p:nvPr>
+            <p:ph idx="1"/>
+          </p:nvPr>
+        </p:nvSpPr>
+        <p:spPr>
+          <a:xfrm>
+            <a:off x="838200" y="1825625"/>
+            <a:ext cx="5507736" cy="4351338"/>
+          </a:xfrm>
+        </p:spPr>
+        <p:txBody>
+          <a:bodyPr>
+            <a:normAutofit fontScale="62500" lnSpcReduction="20000"/>
+          </a:bodyPr>
+          <a:lstStyle/>
+          <a:p>
+            <a:pPr marL="0" indent="0">
+              <a:buNone/>
+            </a:pPr>
+            <a:r>
+              <a:rPr lang="en-IE" b="1" dirty="0"/>
+              <a:t>Three models</a:t>
+            </a:r>
+          </a:p>
+          <a:p>
+            <a:pPr marL="514350" indent="-514350">
+              <a:buFont typeface="+mj-lt"/>
+              <a:buAutoNum type="arabicPeriod"/>
+            </a:pPr>
+            <a:r>
+              <a:rPr lang="en-IE" dirty="0"/>
+              <a:t>Controls</a:t>
+            </a:r>
+          </a:p>
+          <a:p>
+            <a:pPr marL="514350" indent="-514350">
+              <a:buFont typeface="+mj-lt"/>
+              <a:buAutoNum type="arabicPeriod"/>
+            </a:pPr>
+            <a:r>
+              <a:rPr lang="en-IE" dirty="0"/>
+              <a:t>Key IVs: RLP &amp; SD positions.</a:t>
+            </a:r>
+          </a:p>
+          <a:p>
+            <a:pPr marL="514350" indent="-514350">
+              <a:buFont typeface="+mj-lt"/>
+              <a:buAutoNum type="arabicPeriod"/>
+            </a:pPr>
+            <a:r>
+              <a:rPr lang="en-IE" dirty="0"/>
+              <a:t>Interaction effects</a:t>
+            </a:r>
+          </a:p>
+          <a:p>
+            <a:pPr marL="514350" indent="-514350">
+              <a:buFont typeface="+mj-lt"/>
+              <a:buAutoNum type="arabicPeriod"/>
+            </a:pPr>
+            <a:endParaRPr lang="en-IE" dirty="0"/>
+          </a:p>
+          <a:p>
+            <a:pPr marL="0" indent="0">
+              <a:buNone/>
+            </a:pPr>
+            <a:r>
+              <a:rPr lang="en-IE" dirty="0"/>
+              <a:t>All models are OLS with party and @@ clustered with @@ fixed effects.</a:t>
+            </a:r>
+          </a:p>
+          <a:p>
+            <a:pPr marL="0" indent="0">
+              <a:buNone/>
+            </a:pPr>
+            <a:endParaRPr lang="en-IE" dirty="0"/>
+          </a:p>
+          <a:p>
+            <a:pPr marL="0" indent="0">
+              <a:buNone/>
+            </a:pPr>
+            <a:r>
+              <a:rPr lang="en-IE" dirty="0"/>
+              <a:t>Statistically significant effects among most controls – not lagged vote, GDP or governmental support.</a:t>
+            </a:r>
+          </a:p>
+          <a:p>
+            <a:pPr marL="0" indent="0">
+              <a:buNone/>
+            </a:pPr>
+            <a:endParaRPr lang="en-IE" dirty="0"/>
+          </a:p>
+          <a:p>
+            <a:pPr marL="0" indent="0">
+              <a:buNone/>
+            </a:pPr>
+            <a:r>
+              <a:rPr lang="en-IE" dirty="0"/>
+              <a:t>GDP becomes significant, both RLP positions are significant when holding all else constant.</a:t>
+            </a:r>
+          </a:p>
+          <a:p>
+            <a:pPr marL="0" indent="0">
+              <a:buNone/>
+            </a:pPr>
+            <a:r>
+              <a:rPr lang="en-IE" dirty="0"/>
+              <a:t>Interaction effect – statistically significant on econ. SD econ position moving rightward hurts RLPs</a:t>
+            </a:r>
+          </a:p>
+        </p:txBody>
+      </p:sp>
+      <p:pic>
+        <p:nvPicPr>
+          <p:cNvPr id="5" name="Picture 4">
+            <a:extLst>
+              <a:ext uri="{FF2B5EF4-FFF2-40B4-BE49-F238E27FC236}">
+                <a16:creationId xmlns:a16="http://schemas.microsoft.com/office/drawing/2014/main" id="{4AE1E1BC-39D4-EE57-31EB-B83E80568852}"/>
+              </a:ext>
+            </a:extLst>
+          </p:cNvPr>
+          <p:cNvPicPr>
+            <a:picLocks noChangeAspect="1"/>
+          </p:cNvPicPr>
+          <p:nvPr/>
+        </p:nvPicPr>
+        <p:blipFill>
+          <a:blip r:embed="rId2"/>
+          <a:stretch>
+            <a:fillRect/>
+          </a:stretch>
+        </p:blipFill>
+        <p:spPr>
+          <a:xfrm>
+            <a:off x="7016018" y="365125"/>
+            <a:ext cx="4734853" cy="6309360"/>
+          </a:xfrm>
+          <a:prstGeom prst="rect">
+            <a:avLst/>
+          </a:prstGeom>
+        </p:spPr>
+      </p:pic>
+    </p:spTree>
+    <p:extLst>
+      <p:ext uri="{BB962C8B-B14F-4D97-AF65-F5344CB8AC3E}">
+        <p14:creationId xmlns:p14="http://schemas.microsoft.com/office/powerpoint/2010/main" val="3376276946"/>
+      </p:ext>
+    </p:extLst>
+  </p:cSld>
+  <p:clrMapOvr>
+    <a:masterClrMapping/>
+  </p:clrMapOvr>
+</p:sld>
+</file>
+
+<file path=ppt/slides/slide11.xml><?xml version="1.0" encoding="utf-8"?>
+<p:sld xmlns:a="http://schemas.openxmlformats.org/drawingml/2006/main" xmlns:r="http://schemas.openxmlformats.org/officeDocument/2006/relationships" xmlns:p="http://schemas.openxmlformats.org/presentationml/2006/main">
+  <p:cSld>
+    <p:spTree>
+      <p:nvGrpSpPr>
+        <p:cNvPr id="1" name=""/>
+        <p:cNvGrpSpPr/>
+        <p:nvPr/>
+      </p:nvGrpSpPr>
+      <p:grpSpPr>
+        <a:xfrm>
+          <a:off x="0" y="0"/>
+          <a:ext cx="0" cy="0"/>
+          <a:chOff x="0" y="0"/>
+          <a:chExt cx="0" cy="0"/>
+        </a:xfrm>
+      </p:grpSpPr>
+      <p:sp>
+        <p:nvSpPr>
+          <p:cNvPr id="3" name="Content Placeholder 2">
+            <a:extLst>
+              <a:ext uri="{FF2B5EF4-FFF2-40B4-BE49-F238E27FC236}">
+                <a16:creationId xmlns:a16="http://schemas.microsoft.com/office/drawing/2014/main" id="{128549CF-B07C-C514-4A0B-D2EA0BD1390F}"/>
+              </a:ext>
+            </a:extLst>
+          </p:cNvPr>
+          <p:cNvSpPr>
+            <a:spLocks noGrp="1"/>
+          </p:cNvSpPr>
+          <p:nvPr>
+            <p:ph idx="1"/>
+          </p:nvPr>
+        </p:nvSpPr>
+        <p:spPr/>
+        <p:txBody>
+          <a:bodyPr/>
+          <a:lstStyle/>
+          <a:p>
+            <a:endParaRPr lang="en-IE" dirty="0"/>
+          </a:p>
+        </p:txBody>
+      </p:sp>
+      <p:pic>
+        <p:nvPicPr>
+          <p:cNvPr id="5" name="Picture 4">
+            <a:extLst>
+              <a:ext uri="{FF2B5EF4-FFF2-40B4-BE49-F238E27FC236}">
+                <a16:creationId xmlns:a16="http://schemas.microsoft.com/office/drawing/2014/main" id="{BA3CCDA1-9B27-1059-5AA0-14B938D639E1}"/>
+              </a:ext>
+            </a:extLst>
+          </p:cNvPr>
+          <p:cNvPicPr>
+            <a:picLocks noChangeAspect="1"/>
+          </p:cNvPicPr>
+          <p:nvPr/>
+        </p:nvPicPr>
+        <p:blipFill>
+          <a:blip r:embed="rId2"/>
+          <a:srcRect r="7484"/>
+          <a:stretch>
+            <a:fillRect/>
+          </a:stretch>
+        </p:blipFill>
+        <p:spPr>
+          <a:xfrm>
+            <a:off x="1810513" y="1390399"/>
+            <a:ext cx="7671816" cy="4692115"/>
+          </a:xfrm>
+          <a:prstGeom prst="rect">
+            <a:avLst/>
+          </a:prstGeom>
+        </p:spPr>
+      </p:pic>
+      <p:pic>
+        <p:nvPicPr>
+          <p:cNvPr id="7" name="Picture 6">
+            <a:extLst>
+              <a:ext uri="{FF2B5EF4-FFF2-40B4-BE49-F238E27FC236}">
+                <a16:creationId xmlns:a16="http://schemas.microsoft.com/office/drawing/2014/main" id="{D0BAEB18-3533-0AA4-CD02-17B59619934B}"/>
+              </a:ext>
+            </a:extLst>
+          </p:cNvPr>
+          <p:cNvPicPr>
+            <a:picLocks noChangeAspect="1"/>
+          </p:cNvPicPr>
+          <p:nvPr/>
+        </p:nvPicPr>
+        <p:blipFill>
+          <a:blip r:embed="rId3"/>
+          <a:stretch>
+            <a:fillRect/>
+          </a:stretch>
+        </p:blipFill>
+        <p:spPr>
+          <a:xfrm>
+            <a:off x="1673352" y="5776679"/>
+            <a:ext cx="8845296" cy="800568"/>
+          </a:xfrm>
+          <a:prstGeom prst="rect">
+            <a:avLst/>
+          </a:prstGeom>
+        </p:spPr>
+      </p:pic>
+      <p:sp>
+        <p:nvSpPr>
+          <p:cNvPr id="2" name="Title 1">
+            <a:extLst>
+              <a:ext uri="{FF2B5EF4-FFF2-40B4-BE49-F238E27FC236}">
+                <a16:creationId xmlns:a16="http://schemas.microsoft.com/office/drawing/2014/main" id="{C9DBB717-E9F4-0D61-5929-831A1993B149}"/>
+              </a:ext>
+            </a:extLst>
+          </p:cNvPr>
+          <p:cNvSpPr>
+            <a:spLocks noGrp="1"/>
+          </p:cNvSpPr>
+          <p:nvPr>
+            <p:ph type="title"/>
+          </p:nvPr>
+        </p:nvSpPr>
+        <p:spPr>
+          <a:xfrm>
+            <a:off x="2057400" y="280753"/>
+            <a:ext cx="8077200" cy="1325563"/>
+          </a:xfrm>
+        </p:spPr>
+        <p:txBody>
+          <a:bodyPr>
+            <a:normAutofit fontScale="90000"/>
+          </a:bodyPr>
+          <a:lstStyle/>
+          <a:p>
+            <a:pPr algn="ctr"/>
+            <a:r>
+              <a:rPr lang="en-IE" sz="4000" b="1" dirty="0">
+                <a:latin typeface="Verdana" panose="020B0604030504040204" pitchFamily="34" charset="0"/>
+                <a:ea typeface="Verdana" panose="020B0604030504040204" pitchFamily="34" charset="0"/>
+              </a:rPr>
+              <a:t>Replication Part 4:</a:t>
+            </a:r>
+            <a:r>
+              <a:rPr lang="en-GB" sz="4000" b="1" dirty="0">
+                <a:latin typeface="Verdana" panose="020B0604030504040204" pitchFamily="34" charset="0"/>
+                <a:ea typeface="Verdana" panose="020B0604030504040204" pitchFamily="34" charset="0"/>
+              </a:rPr>
+              <a:t> Marginal effect of economic moderation</a:t>
+            </a:r>
+            <a:endParaRPr lang="en-IE" sz="4000" dirty="0"/>
+          </a:p>
+        </p:txBody>
+      </p:sp>
+    </p:spTree>
+    <p:extLst>
+      <p:ext uri="{BB962C8B-B14F-4D97-AF65-F5344CB8AC3E}">
+        <p14:creationId xmlns:p14="http://schemas.microsoft.com/office/powerpoint/2010/main" val="1175315257"/>
+      </p:ext>
+    </p:extLst>
+  </p:cSld>
+  <p:clrMapOvr>
+    <a:masterClrMapping/>
+  </p:clrMapOvr>
+</p:sld>
+</file>
+
+<file path=ppt/slides/slide12.xml><?xml version="1.0" encoding="utf-8"?>
+<p:sld xmlns:a="http://schemas.openxmlformats.org/drawingml/2006/main" xmlns:r="http://schemas.openxmlformats.org/officeDocument/2006/relationships" xmlns:p="http://schemas.openxmlformats.org/presentationml/2006/main">
+  <p:cSld>
+    <p:spTree>
+      <p:nvGrpSpPr>
+        <p:cNvPr id="1" name=""/>
+        <p:cNvGrpSpPr/>
+        <p:nvPr/>
+      </p:nvGrpSpPr>
+      <p:grpSpPr>
+        <a:xfrm>
+          <a:off x="0" y="0"/>
+          <a:ext cx="0" cy="0"/>
+          <a:chOff x="0" y="0"/>
+          <a:chExt cx="0" cy="0"/>
+        </a:xfrm>
+      </p:grpSpPr>
+      <p:sp>
+        <p:nvSpPr>
+          <p:cNvPr id="2" name="Title 1">
+            <a:extLst>
+              <a:ext uri="{FF2B5EF4-FFF2-40B4-BE49-F238E27FC236}">
+                <a16:creationId xmlns:a16="http://schemas.microsoft.com/office/drawing/2014/main" id="{E313EEE7-AC17-2182-D9DC-D6902B7A3F36}"/>
+              </a:ext>
+            </a:extLst>
+          </p:cNvPr>
+          <p:cNvSpPr>
+            <a:spLocks noGrp="1"/>
+          </p:cNvSpPr>
+          <p:nvPr>
+            <p:ph type="title"/>
+          </p:nvPr>
+        </p:nvSpPr>
+        <p:spPr/>
+        <p:txBody>
+          <a:bodyPr/>
+          <a:lstStyle/>
+          <a:p>
+            <a:r>
+              <a:rPr lang="en-GB" dirty="0"/>
+              <a:t>My coding journey</a:t>
+            </a:r>
+            <a:endParaRPr lang="en-IE" dirty="0"/>
+          </a:p>
+        </p:txBody>
+      </p:sp>
+      <p:sp>
+        <p:nvSpPr>
+          <p:cNvPr id="3" name="Content Placeholder 2">
+            <a:extLst>
+              <a:ext uri="{FF2B5EF4-FFF2-40B4-BE49-F238E27FC236}">
+                <a16:creationId xmlns:a16="http://schemas.microsoft.com/office/drawing/2014/main" id="{7E7764B9-16E9-7189-E5CB-BA7FD135DF53}"/>
+              </a:ext>
+            </a:extLst>
+          </p:cNvPr>
+          <p:cNvSpPr>
+            <a:spLocks noGrp="1"/>
+          </p:cNvSpPr>
+          <p:nvPr>
+            <p:ph idx="1"/>
+          </p:nvPr>
+        </p:nvSpPr>
+        <p:spPr/>
+        <p:txBody>
+          <a:bodyPr/>
+          <a:lstStyle/>
+          <a:p>
+            <a:r>
+              <a:rPr lang="en-IE" dirty="0"/>
+              <a:t>Using previously coded data for masters thesis which codes for key centre-right party and data. </a:t>
+            </a:r>
+          </a:p>
+          <a:p>
+            <a:r>
+              <a:rPr lang="en-IE" b="1" dirty="0"/>
+              <a:t>Steps:</a:t>
+            </a:r>
+          </a:p>
+          <a:p>
+            <a:pPr lvl="1"/>
+            <a:r>
+              <a:rPr lang="en-IE" dirty="0"/>
+              <a:t>Code MAPOR data in-line with Lowe, et al. (2011) – as done by paper.</a:t>
+            </a:r>
+          </a:p>
+          <a:p>
+            <a:pPr lvl="1"/>
+            <a:r>
+              <a:rPr lang="en-IE" dirty="0"/>
+              <a:t>Calculate difference in position between parties.</a:t>
+            </a:r>
+          </a:p>
+          <a:p>
+            <a:pPr lvl="1"/>
+            <a:r>
+              <a:rPr lang="en-IE" dirty="0"/>
+              <a:t>Additional interaction variables between RLP positions and this difference. </a:t>
+            </a:r>
+          </a:p>
+          <a:p>
+            <a:pPr marL="0" indent="0">
+              <a:buNone/>
+            </a:pPr>
+            <a:r>
+              <a:rPr lang="en-IE" dirty="0"/>
+              <a:t>Leading Mainstream Centre-right party</a:t>
+            </a:r>
+          </a:p>
+        </p:txBody>
+      </p:sp>
+    </p:spTree>
+    <p:extLst>
+      <p:ext uri="{BB962C8B-B14F-4D97-AF65-F5344CB8AC3E}">
+        <p14:creationId xmlns:p14="http://schemas.microsoft.com/office/powerpoint/2010/main" val="519172753"/>
+      </p:ext>
+    </p:extLst>
+  </p:cSld>
+  <p:clrMapOvr>
+    <a:masterClrMapping/>
+  </p:clrMapOvr>
+</p:sld>
+</file>
+
+<file path=ppt/slides/slide13.xml><?xml version="1.0" encoding="utf-8"?>
+<p:sld xmlns:a="http://schemas.openxmlformats.org/drawingml/2006/main" xmlns:r="http://schemas.openxmlformats.org/officeDocument/2006/relationships" xmlns:p="http://schemas.openxmlformats.org/presentationml/2006/main">
+  <p:cSld>
+    <p:spTree>
+      <p:nvGrpSpPr>
         <p:cNvPr id="1" name="">
           <a:extLst>
             <a:ext uri="{FF2B5EF4-FFF2-40B4-BE49-F238E27FC236}">
@@ -5288,11 +6684,23 @@
             <p:ph type="title"/>
           </p:nvPr>
         </p:nvSpPr>
-        <p:spPr/>
+        <p:spPr>
+          <a:xfrm>
+            <a:off x="838200" y="365125"/>
+            <a:ext cx="5257800" cy="1325563"/>
+          </a:xfrm>
+        </p:spPr>
         <p:txBody>
           <a:bodyPr/>
           <a:lstStyle/>
           <a:p>
+            <a:r>
+              <a:rPr lang="en-IE" b="1" dirty="0">
+                <a:latin typeface="Verdana" panose="020B0604030504040204" pitchFamily="34" charset="0"/>
+                <a:ea typeface="Verdana" panose="020B0604030504040204" pitchFamily="34" charset="0"/>
+              </a:rPr>
+              <a:t>Replication Part 3: Regression</a:t>
+            </a:r>
             <a:endParaRPr lang="en-IE" dirty="0"/>
           </a:p>
         </p:txBody>
@@ -5313,12 +6721,71 @@
             <p:ph idx="1"/>
           </p:nvPr>
         </p:nvSpPr>
-        <p:spPr/>
+        <p:spPr>
+          <a:xfrm>
+            <a:off x="838200" y="1825625"/>
+            <a:ext cx="5122923" cy="4351338"/>
+          </a:xfrm>
+        </p:spPr>
         <p:txBody>
           <a:bodyPr/>
           <a:lstStyle/>
           <a:p>
-            <a:endParaRPr lang="en-IE"/>
+            <a:pPr marL="0" indent="0">
+              <a:buNone/>
+            </a:pPr>
+            <a:r>
+              <a:rPr lang="en-IE" b="1" dirty="0"/>
+              <a:t>4 models</a:t>
+            </a:r>
+          </a:p>
+          <a:p>
+            <a:pPr marL="514350" indent="-514350">
+              <a:buFont typeface="+mj-lt"/>
+              <a:buAutoNum type="arabicPeriod"/>
+            </a:pPr>
+            <a:r>
+              <a:rPr lang="en-IE" dirty="0"/>
+              <a:t>Both distance variables.</a:t>
+            </a:r>
+          </a:p>
+          <a:p>
+            <a:pPr marL="514350" indent="-514350">
+              <a:buFont typeface="+mj-lt"/>
+              <a:buAutoNum type="arabicPeriod"/>
+            </a:pPr>
+            <a:r>
+              <a:rPr lang="en-IE" dirty="0"/>
+              <a:t>Distance and interaction.</a:t>
+            </a:r>
+          </a:p>
+          <a:p>
+            <a:pPr marL="514350" indent="-514350">
+              <a:buFont typeface="+mj-lt"/>
+              <a:buAutoNum type="arabicPeriod"/>
+            </a:pPr>
+            <a:r>
+              <a:rPr lang="en-IE" dirty="0"/>
+              <a:t>Removal of </a:t>
+            </a:r>
+            <a:r>
+              <a:rPr lang="en-IE" dirty="0" err="1"/>
+              <a:t>sd</a:t>
+            </a:r>
+            <a:r>
+              <a:rPr lang="en-IE" dirty="0"/>
+              <a:t> positional vars, with distance.</a:t>
+            </a:r>
+          </a:p>
+          <a:p>
+            <a:pPr marL="514350" indent="-514350">
+              <a:buFont typeface="+mj-lt"/>
+              <a:buAutoNum type="arabicPeriod"/>
+            </a:pPr>
+            <a:r>
+              <a:rPr lang="en-IE" dirty="0"/>
+              <a:t>Removal of SD positional vars, with distance and interaction.</a:t>
+            </a:r>
           </a:p>
         </p:txBody>
       </p:sp>
@@ -5344,7 +6811,7 @@
         </p:blipFill>
         <p:spPr>
           <a:xfrm>
-            <a:off x="3126483" y="492771"/>
+            <a:off x="6096000" y="437907"/>
             <a:ext cx="5501050" cy="6235194"/>
           </a:xfrm>
           <a:prstGeom prst="rect">
@@ -5356,6 +6823,731 @@
     <p:extLst>
       <p:ext uri="{BB962C8B-B14F-4D97-AF65-F5344CB8AC3E}">
         <p14:creationId xmlns:p14="http://schemas.microsoft.com/office/powerpoint/2010/main" val="1623963838"/>
+      </p:ext>
+    </p:extLst>
+  </p:cSld>
+  <p:clrMapOvr>
+    <a:masterClrMapping/>
+  </p:clrMapOvr>
+</p:sld>
+</file>
+
+<file path=ppt/slides/slide14.xml><?xml version="1.0" encoding="utf-8"?>
+<p:sld xmlns:a="http://schemas.openxmlformats.org/drawingml/2006/main" xmlns:r="http://schemas.openxmlformats.org/officeDocument/2006/relationships" xmlns:p="http://schemas.openxmlformats.org/presentationml/2006/main">
+  <p:cSld>
+    <p:spTree>
+      <p:nvGrpSpPr>
+        <p:cNvPr id="1" name="">
+          <a:extLst>
+            <a:ext uri="{FF2B5EF4-FFF2-40B4-BE49-F238E27FC236}">
+              <a16:creationId xmlns:a16="http://schemas.microsoft.com/office/drawing/2014/main" id="{262E03BC-F8D4-3310-56F6-76508E17BE55}"/>
+            </a:ext>
+          </a:extLst>
+        </p:cNvPr>
+        <p:cNvGrpSpPr/>
+        <p:nvPr/>
+      </p:nvGrpSpPr>
+      <p:grpSpPr>
+        <a:xfrm>
+          <a:off x="0" y="0"/>
+          <a:ext cx="0" cy="0"/>
+          <a:chOff x="0" y="0"/>
+          <a:chExt cx="0" cy="0"/>
+        </a:xfrm>
+      </p:grpSpPr>
+      <p:sp>
+        <p:nvSpPr>
+          <p:cNvPr id="2" name="Title 1">
+            <a:extLst>
+              <a:ext uri="{FF2B5EF4-FFF2-40B4-BE49-F238E27FC236}">
+                <a16:creationId xmlns:a16="http://schemas.microsoft.com/office/drawing/2014/main" id="{75157770-F8CB-EE2C-9BAB-97F3EE1BE73E}"/>
+              </a:ext>
+            </a:extLst>
+          </p:cNvPr>
+          <p:cNvSpPr>
+            <a:spLocks noGrp="1"/>
+          </p:cNvSpPr>
+          <p:nvPr>
+            <p:ph type="title"/>
+          </p:nvPr>
+        </p:nvSpPr>
+        <p:spPr>
+          <a:xfrm>
+            <a:off x="838200" y="365125"/>
+            <a:ext cx="5900928" cy="1325563"/>
+          </a:xfrm>
+        </p:spPr>
+        <p:txBody>
+          <a:bodyPr>
+            <a:normAutofit/>
+          </a:bodyPr>
+          <a:lstStyle/>
+          <a:p>
+            <a:r>
+              <a:rPr lang="en-IE" sz="4000" b="1" dirty="0">
+                <a:latin typeface="Verdana" panose="020B0604030504040204" pitchFamily="34" charset="0"/>
+                <a:ea typeface="Verdana" panose="020B0604030504040204" pitchFamily="34" charset="0"/>
+              </a:rPr>
+              <a:t>Models 1 &amp; 2</a:t>
+            </a:r>
+          </a:p>
+        </p:txBody>
+      </p:sp>
+      <p:sp>
+        <p:nvSpPr>
+          <p:cNvPr id="3" name="Content Placeholder 2">
+            <a:extLst>
+              <a:ext uri="{FF2B5EF4-FFF2-40B4-BE49-F238E27FC236}">
+                <a16:creationId xmlns:a16="http://schemas.microsoft.com/office/drawing/2014/main" id="{D9330ACF-692C-9E53-8051-14CE8F467A02}"/>
+              </a:ext>
+            </a:extLst>
+          </p:cNvPr>
+          <p:cNvSpPr>
+            <a:spLocks noGrp="1"/>
+          </p:cNvSpPr>
+          <p:nvPr>
+            <p:ph idx="1"/>
+          </p:nvPr>
+        </p:nvSpPr>
+        <p:spPr>
+          <a:xfrm>
+            <a:off x="838200" y="1825625"/>
+            <a:ext cx="5507736" cy="4351338"/>
+          </a:xfrm>
+        </p:spPr>
+        <p:txBody>
+          <a:bodyPr/>
+          <a:lstStyle/>
+          <a:p>
+            <a:pPr marL="0" indent="0">
+              <a:buNone/>
+            </a:pPr>
+            <a:r>
+              <a:rPr lang="en-IE" dirty="0"/>
+              <a:t>Both include SD positioning,</a:t>
+            </a:r>
+          </a:p>
+          <a:p>
+            <a:pPr marL="0" indent="0">
+              <a:buNone/>
+            </a:pPr>
+            <a:endParaRPr lang="en-IE" dirty="0"/>
+          </a:p>
+          <a:p>
+            <a:pPr marL="0" indent="0">
+              <a:buNone/>
+            </a:pPr>
+            <a:r>
+              <a:rPr lang="en-IE" b="1" dirty="0"/>
+              <a:t>Model 1: </a:t>
+            </a:r>
+            <a:r>
+              <a:rPr lang="en-IE" dirty="0"/>
+              <a:t>results largely resemble Krause (2020). </a:t>
+            </a:r>
+          </a:p>
+          <a:p>
+            <a:pPr marL="0" indent="0">
+              <a:buNone/>
+            </a:pPr>
+            <a:r>
+              <a:rPr lang="en-IE" dirty="0"/>
+              <a:t>SD-MCR non-econ distance marginally significant, positive.</a:t>
+            </a:r>
+          </a:p>
+          <a:p>
+            <a:pPr marL="0" indent="0">
+              <a:buNone/>
+            </a:pPr>
+            <a:r>
+              <a:rPr lang="en-IE" b="1" dirty="0"/>
+              <a:t>Model 2: </a:t>
+            </a:r>
+            <a:r>
+              <a:rPr lang="en-IE" dirty="0"/>
+              <a:t>Including interaction effect completely removes RLP position significance. </a:t>
+            </a:r>
+            <a:r>
+              <a:rPr lang="en-IE" dirty="0">
+                <a:solidFill>
+                  <a:srgbClr val="FF0000"/>
+                </a:solidFill>
+              </a:rPr>
+              <a:t>meaning</a:t>
+            </a:r>
+            <a:endParaRPr lang="en-IE" dirty="0"/>
+          </a:p>
+          <a:p>
+            <a:pPr marL="0" indent="0">
+              <a:buNone/>
+            </a:pPr>
+            <a:endParaRPr lang="en-IE" dirty="0"/>
+          </a:p>
+          <a:p>
+            <a:pPr marL="0" indent="0">
+              <a:buNone/>
+            </a:pPr>
+            <a:endParaRPr lang="en-IE" dirty="0"/>
+          </a:p>
+        </p:txBody>
+      </p:sp>
+      <p:pic>
+        <p:nvPicPr>
+          <p:cNvPr id="6" name="Picture 5">
+            <a:extLst>
+              <a:ext uri="{FF2B5EF4-FFF2-40B4-BE49-F238E27FC236}">
+                <a16:creationId xmlns:a16="http://schemas.microsoft.com/office/drawing/2014/main" id="{2FE01FCB-F665-83ED-86AE-1CA2C22F0DE8}"/>
+              </a:ext>
+            </a:extLst>
+          </p:cNvPr>
+          <p:cNvPicPr>
+            <a:picLocks noChangeAspect="1"/>
+          </p:cNvPicPr>
+          <p:nvPr/>
+        </p:nvPicPr>
+        <p:blipFill>
+          <a:blip r:embed="rId2"/>
+          <a:stretch>
+            <a:fillRect/>
+          </a:stretch>
+        </p:blipFill>
+        <p:spPr>
+          <a:xfrm>
+            <a:off x="8004037" y="173736"/>
+            <a:ext cx="4024830" cy="6510528"/>
+          </a:xfrm>
+          <a:prstGeom prst="rect">
+            <a:avLst/>
+          </a:prstGeom>
+          <a:ln w="57150">
+            <a:solidFill>
+              <a:schemeClr val="tx1"/>
+            </a:solidFill>
+          </a:ln>
+        </p:spPr>
+      </p:pic>
+    </p:spTree>
+    <p:extLst>
+      <p:ext uri="{BB962C8B-B14F-4D97-AF65-F5344CB8AC3E}">
+        <p14:creationId xmlns:p14="http://schemas.microsoft.com/office/powerpoint/2010/main" val="2052214948"/>
+      </p:ext>
+    </p:extLst>
+  </p:cSld>
+  <p:clrMapOvr>
+    <a:masterClrMapping/>
+  </p:clrMapOvr>
+</p:sld>
+</file>
+
+<file path=ppt/slides/slide15.xml><?xml version="1.0" encoding="utf-8"?>
+<p:sld xmlns:a="http://schemas.openxmlformats.org/drawingml/2006/main" xmlns:r="http://schemas.openxmlformats.org/officeDocument/2006/relationships" xmlns:p="http://schemas.openxmlformats.org/presentationml/2006/main">
+  <p:cSld>
+    <p:spTree>
+      <p:nvGrpSpPr>
+        <p:cNvPr id="1" name="">
+          <a:extLst>
+            <a:ext uri="{FF2B5EF4-FFF2-40B4-BE49-F238E27FC236}">
+              <a16:creationId xmlns:a16="http://schemas.microsoft.com/office/drawing/2014/main" id="{0C6D1701-007E-254B-D5EA-336BE523D585}"/>
+            </a:ext>
+          </a:extLst>
+        </p:cNvPr>
+        <p:cNvGrpSpPr/>
+        <p:nvPr/>
+      </p:nvGrpSpPr>
+      <p:grpSpPr>
+        <a:xfrm>
+          <a:off x="0" y="0"/>
+          <a:ext cx="0" cy="0"/>
+          <a:chOff x="0" y="0"/>
+          <a:chExt cx="0" cy="0"/>
+        </a:xfrm>
+      </p:grpSpPr>
+      <p:sp>
+        <p:nvSpPr>
+          <p:cNvPr id="8" name="Rectangle 7">
+            <a:extLst>
+              <a:ext uri="{FF2B5EF4-FFF2-40B4-BE49-F238E27FC236}">
+                <a16:creationId xmlns:a16="http://schemas.microsoft.com/office/drawing/2014/main" id="{C13E822B-7036-87AF-5274-089CE2BEFC50}"/>
+              </a:ext>
+            </a:extLst>
+          </p:cNvPr>
+          <p:cNvSpPr/>
+          <p:nvPr/>
+        </p:nvSpPr>
+        <p:spPr>
+          <a:xfrm>
+            <a:off x="8167639" y="208849"/>
+            <a:ext cx="3820146" cy="6440302"/>
+          </a:xfrm>
+          <a:prstGeom prst="rect">
+            <a:avLst/>
+          </a:prstGeom>
+          <a:noFill/>
+          <a:ln w="57150">
+            <a:solidFill>
+              <a:schemeClr val="tx1"/>
+            </a:solidFill>
+          </a:ln>
+        </p:spPr>
+        <p:style>
+          <a:lnRef idx="2">
+            <a:schemeClr val="accent1">
+              <a:shade val="15000"/>
+            </a:schemeClr>
+          </a:lnRef>
+          <a:fillRef idx="1">
+            <a:schemeClr val="accent1"/>
+          </a:fillRef>
+          <a:effectRef idx="0">
+            <a:schemeClr val="accent1"/>
+          </a:effectRef>
+          <a:fontRef idx="minor">
+            <a:schemeClr val="lt1"/>
+          </a:fontRef>
+        </p:style>
+        <p:txBody>
+          <a:bodyPr rtlCol="0" anchor="ctr"/>
+          <a:lstStyle/>
+          <a:p>
+            <a:pPr algn="ctr"/>
+            <a:endParaRPr lang="en-IE"/>
+          </a:p>
+        </p:txBody>
+      </p:sp>
+      <p:sp>
+        <p:nvSpPr>
+          <p:cNvPr id="2" name="Title 1">
+            <a:extLst>
+              <a:ext uri="{FF2B5EF4-FFF2-40B4-BE49-F238E27FC236}">
+                <a16:creationId xmlns:a16="http://schemas.microsoft.com/office/drawing/2014/main" id="{C59DA7BC-9875-B36F-D6A5-2AB3654A8572}"/>
+              </a:ext>
+            </a:extLst>
+          </p:cNvPr>
+          <p:cNvSpPr>
+            <a:spLocks noGrp="1"/>
+          </p:cNvSpPr>
+          <p:nvPr>
+            <p:ph type="title"/>
+          </p:nvPr>
+        </p:nvSpPr>
+        <p:spPr>
+          <a:xfrm>
+            <a:off x="838200" y="365125"/>
+            <a:ext cx="5900928" cy="1325563"/>
+          </a:xfrm>
+        </p:spPr>
+        <p:txBody>
+          <a:bodyPr>
+            <a:normAutofit/>
+          </a:bodyPr>
+          <a:lstStyle/>
+          <a:p>
+            <a:r>
+              <a:rPr lang="en-IE" sz="4000" b="1" dirty="0">
+                <a:latin typeface="Verdana" panose="020B0604030504040204" pitchFamily="34" charset="0"/>
+                <a:ea typeface="Verdana" panose="020B0604030504040204" pitchFamily="34" charset="0"/>
+              </a:rPr>
+              <a:t>Models 3 &amp; 4</a:t>
+            </a:r>
+          </a:p>
+        </p:txBody>
+      </p:sp>
+      <p:sp>
+        <p:nvSpPr>
+          <p:cNvPr id="3" name="Content Placeholder 2">
+            <a:extLst>
+              <a:ext uri="{FF2B5EF4-FFF2-40B4-BE49-F238E27FC236}">
+                <a16:creationId xmlns:a16="http://schemas.microsoft.com/office/drawing/2014/main" id="{9B6422F9-AE2D-329A-598E-1F3E0199D9D5}"/>
+              </a:ext>
+            </a:extLst>
+          </p:cNvPr>
+          <p:cNvSpPr>
+            <a:spLocks noGrp="1"/>
+          </p:cNvSpPr>
+          <p:nvPr>
+            <p:ph idx="1"/>
+          </p:nvPr>
+        </p:nvSpPr>
+        <p:spPr>
+          <a:xfrm>
+            <a:off x="838200" y="1825625"/>
+            <a:ext cx="5507736" cy="4351338"/>
+          </a:xfrm>
+        </p:spPr>
+        <p:txBody>
+          <a:bodyPr>
+            <a:normAutofit fontScale="85000" lnSpcReduction="20000"/>
+          </a:bodyPr>
+          <a:lstStyle/>
+          <a:p>
+            <a:pPr marL="0" indent="0">
+              <a:buNone/>
+            </a:pPr>
+            <a:r>
+              <a:rPr lang="en-IE" dirty="0"/>
+              <a:t>Both include SD positioning,</a:t>
+            </a:r>
+          </a:p>
+          <a:p>
+            <a:pPr marL="0" indent="0">
+              <a:buNone/>
+            </a:pPr>
+            <a:endParaRPr lang="en-IE" dirty="0"/>
+          </a:p>
+          <a:p>
+            <a:pPr marL="0" indent="0">
+              <a:buNone/>
+            </a:pPr>
+            <a:r>
+              <a:rPr lang="en-IE" b="1" dirty="0"/>
+              <a:t>Model 1: </a:t>
+            </a:r>
+            <a:r>
+              <a:rPr lang="en-IE" dirty="0"/>
+              <a:t>results largely resemble Krause (2020). </a:t>
+            </a:r>
+          </a:p>
+          <a:p>
+            <a:pPr marL="0" indent="0">
+              <a:buNone/>
+            </a:pPr>
+            <a:r>
+              <a:rPr lang="en-IE" dirty="0"/>
+              <a:t>SD-MCR non-econ distance marginally significant, positive.</a:t>
+            </a:r>
+          </a:p>
+          <a:p>
+            <a:pPr marL="0" indent="0">
+              <a:buNone/>
+            </a:pPr>
+            <a:r>
+              <a:rPr lang="en-IE" b="1" dirty="0"/>
+              <a:t>Model 2: </a:t>
+            </a:r>
+            <a:r>
+              <a:rPr lang="en-IE" dirty="0"/>
+              <a:t>Including interaction effect completely removes RLP position significance. </a:t>
+            </a:r>
+            <a:r>
+              <a:rPr lang="en-IE" dirty="0">
+                <a:solidFill>
+                  <a:srgbClr val="FF0000"/>
+                </a:solidFill>
+              </a:rPr>
+              <a:t>Meaning</a:t>
+            </a:r>
+          </a:p>
+          <a:p>
+            <a:pPr marL="0" indent="0">
+              <a:buNone/>
+            </a:pPr>
+            <a:r>
+              <a:rPr lang="en-IE" dirty="0">
+                <a:solidFill>
+                  <a:srgbClr val="FF0000"/>
+                </a:solidFill>
+              </a:rPr>
+              <a:t>Suggests that RLP positioning is conditional on </a:t>
+            </a:r>
+          </a:p>
+          <a:p>
+            <a:pPr marL="0" indent="0">
+              <a:buNone/>
+            </a:pPr>
+            <a:r>
+              <a:rPr lang="en-IE" dirty="0">
+                <a:solidFill>
+                  <a:srgbClr val="FF0000"/>
+                </a:solidFill>
+              </a:rPr>
+              <a:t>But testing for correlation – seems to be some correlation </a:t>
+            </a:r>
+            <a:endParaRPr lang="en-IE" dirty="0"/>
+          </a:p>
+          <a:p>
+            <a:pPr marL="0" indent="0">
+              <a:buNone/>
+            </a:pPr>
+            <a:endParaRPr lang="en-IE" dirty="0"/>
+          </a:p>
+          <a:p>
+            <a:pPr marL="0" indent="0">
+              <a:buNone/>
+            </a:pPr>
+            <a:endParaRPr lang="en-IE" dirty="0"/>
+          </a:p>
+        </p:txBody>
+      </p:sp>
+      <p:grpSp>
+        <p:nvGrpSpPr>
+          <p:cNvPr id="7" name="Group 6">
+            <a:extLst>
+              <a:ext uri="{FF2B5EF4-FFF2-40B4-BE49-F238E27FC236}">
+                <a16:creationId xmlns:a16="http://schemas.microsoft.com/office/drawing/2014/main" id="{C492A40D-13B9-BDAD-9204-663DB424EF7F}"/>
+              </a:ext>
+            </a:extLst>
+          </p:cNvPr>
+          <p:cNvGrpSpPr/>
+          <p:nvPr/>
+        </p:nvGrpSpPr>
+        <p:grpSpPr>
+          <a:xfrm>
+            <a:off x="8293608" y="262956"/>
+            <a:ext cx="3542460" cy="6224312"/>
+            <a:chOff x="8004037" y="173736"/>
+            <a:chExt cx="3671907" cy="6510528"/>
+          </a:xfrm>
+        </p:grpSpPr>
+        <p:pic>
+          <p:nvPicPr>
+            <p:cNvPr id="6" name="Picture 5">
+              <a:extLst>
+                <a:ext uri="{FF2B5EF4-FFF2-40B4-BE49-F238E27FC236}">
+                  <a16:creationId xmlns:a16="http://schemas.microsoft.com/office/drawing/2014/main" id="{B65C2A4C-C975-2337-D134-456658CCC597}"/>
+                </a:ext>
+              </a:extLst>
+            </p:cNvPr>
+            <p:cNvPicPr>
+              <a:picLocks noChangeAspect="1"/>
+            </p:cNvPicPr>
+            <p:nvPr/>
+          </p:nvPicPr>
+          <p:blipFill>
+            <a:blip r:embed="rId2"/>
+            <a:srcRect t="3200" r="61159"/>
+            <a:stretch>
+              <a:fillRect/>
+            </a:stretch>
+          </p:blipFill>
+          <p:spPr>
+            <a:xfrm>
+              <a:off x="8004037" y="365124"/>
+              <a:ext cx="1563296" cy="6302205"/>
+            </a:xfrm>
+            <a:prstGeom prst="rect">
+              <a:avLst/>
+            </a:prstGeom>
+            <a:ln w="57150">
+              <a:noFill/>
+            </a:ln>
+          </p:spPr>
+        </p:pic>
+        <p:pic>
+          <p:nvPicPr>
+            <p:cNvPr id="5" name="Picture 4">
+              <a:extLst>
+                <a:ext uri="{FF2B5EF4-FFF2-40B4-BE49-F238E27FC236}">
+                  <a16:creationId xmlns:a16="http://schemas.microsoft.com/office/drawing/2014/main" id="{3AA60A2C-5C41-794F-CADB-4BC84587A2AB}"/>
+                </a:ext>
+              </a:extLst>
+            </p:cNvPr>
+            <p:cNvPicPr>
+              <a:picLocks noChangeAspect="1"/>
+            </p:cNvPicPr>
+            <p:nvPr/>
+          </p:nvPicPr>
+          <p:blipFill>
+            <a:blip r:embed="rId3"/>
+            <a:stretch>
+              <a:fillRect/>
+            </a:stretch>
+          </p:blipFill>
+          <p:spPr>
+            <a:xfrm>
+              <a:off x="9567333" y="173736"/>
+              <a:ext cx="2108611" cy="6510528"/>
+            </a:xfrm>
+            <a:prstGeom prst="rect">
+              <a:avLst/>
+            </a:prstGeom>
+          </p:spPr>
+        </p:pic>
+      </p:grpSp>
+      <p:sp>
+        <p:nvSpPr>
+          <p:cNvPr id="9" name="Rectangle 8">
+            <a:extLst>
+              <a:ext uri="{FF2B5EF4-FFF2-40B4-BE49-F238E27FC236}">
+                <a16:creationId xmlns:a16="http://schemas.microsoft.com/office/drawing/2014/main" id="{1FE6A54A-A78C-66A1-160E-BF85BDCA7DFE}"/>
+              </a:ext>
+            </a:extLst>
+          </p:cNvPr>
+          <p:cNvSpPr/>
+          <p:nvPr/>
+        </p:nvSpPr>
+        <p:spPr>
+          <a:xfrm>
+            <a:off x="8293608" y="3310128"/>
+            <a:ext cx="3542460" cy="722376"/>
+          </a:xfrm>
+          <a:prstGeom prst="rect">
+            <a:avLst/>
+          </a:prstGeom>
+          <a:noFill/>
+          <a:ln w="38100">
+            <a:solidFill>
+              <a:srgbClr val="FF0000"/>
+            </a:solidFill>
+          </a:ln>
+        </p:spPr>
+        <p:style>
+          <a:lnRef idx="2">
+            <a:schemeClr val="accent1">
+              <a:shade val="15000"/>
+            </a:schemeClr>
+          </a:lnRef>
+          <a:fillRef idx="1">
+            <a:schemeClr val="accent1"/>
+          </a:fillRef>
+          <a:effectRef idx="0">
+            <a:schemeClr val="accent1"/>
+          </a:effectRef>
+          <a:fontRef idx="minor">
+            <a:schemeClr val="lt1"/>
+          </a:fontRef>
+        </p:style>
+        <p:txBody>
+          <a:bodyPr rtlCol="0" anchor="ctr"/>
+          <a:lstStyle/>
+          <a:p>
+            <a:pPr algn="ctr"/>
+            <a:endParaRPr lang="en-IE"/>
+          </a:p>
+        </p:txBody>
+      </p:sp>
+    </p:spTree>
+    <p:extLst>
+      <p:ext uri="{BB962C8B-B14F-4D97-AF65-F5344CB8AC3E}">
+        <p14:creationId xmlns:p14="http://schemas.microsoft.com/office/powerpoint/2010/main" val="252362121"/>
+      </p:ext>
+    </p:extLst>
+  </p:cSld>
+  <p:clrMapOvr>
+    <a:masterClrMapping/>
+  </p:clrMapOvr>
+</p:sld>
+</file>
+
+<file path=ppt/slides/slide16.xml><?xml version="1.0" encoding="utf-8"?>
+<p:sld xmlns:a="http://schemas.openxmlformats.org/drawingml/2006/main" xmlns:r="http://schemas.openxmlformats.org/officeDocument/2006/relationships" xmlns:p="http://schemas.openxmlformats.org/presentationml/2006/main">
+  <p:cSld>
+    <p:spTree>
+      <p:nvGrpSpPr>
+        <p:cNvPr id="1" name=""/>
+        <p:cNvGrpSpPr/>
+        <p:nvPr/>
+      </p:nvGrpSpPr>
+      <p:grpSpPr>
+        <a:xfrm>
+          <a:off x="0" y="0"/>
+          <a:ext cx="0" cy="0"/>
+          <a:chOff x="0" y="0"/>
+          <a:chExt cx="0" cy="0"/>
+        </a:xfrm>
+      </p:grpSpPr>
+      <p:sp>
+        <p:nvSpPr>
+          <p:cNvPr id="2" name="Title 1">
+            <a:extLst>
+              <a:ext uri="{FF2B5EF4-FFF2-40B4-BE49-F238E27FC236}">
+                <a16:creationId xmlns:a16="http://schemas.microsoft.com/office/drawing/2014/main" id="{70862895-263B-F43F-670C-14D0E7B928C9}"/>
+              </a:ext>
+            </a:extLst>
+          </p:cNvPr>
+          <p:cNvSpPr>
+            <a:spLocks noGrp="1"/>
+          </p:cNvSpPr>
+          <p:nvPr>
+            <p:ph type="title"/>
+          </p:nvPr>
+        </p:nvSpPr>
+        <p:spPr/>
+        <p:txBody>
+          <a:bodyPr/>
+          <a:lstStyle/>
+          <a:p>
+            <a:r>
+              <a:rPr lang="en-IE" dirty="0"/>
+              <a:t>Key finding</a:t>
+            </a:r>
+          </a:p>
+        </p:txBody>
+      </p:sp>
+      <p:sp>
+        <p:nvSpPr>
+          <p:cNvPr id="3" name="Content Placeholder 2">
+            <a:extLst>
+              <a:ext uri="{FF2B5EF4-FFF2-40B4-BE49-F238E27FC236}">
+                <a16:creationId xmlns:a16="http://schemas.microsoft.com/office/drawing/2014/main" id="{41B15701-F9E4-B590-06CD-F0365BC3265E}"/>
+              </a:ext>
+            </a:extLst>
+          </p:cNvPr>
+          <p:cNvSpPr>
+            <a:spLocks noGrp="1"/>
+          </p:cNvSpPr>
+          <p:nvPr>
+            <p:ph idx="1"/>
+          </p:nvPr>
+        </p:nvSpPr>
+        <p:spPr/>
+        <p:txBody>
+          <a:bodyPr>
+            <a:normAutofit lnSpcReduction="10000"/>
+          </a:bodyPr>
+          <a:lstStyle/>
+          <a:p>
+            <a:r>
+              <a:rPr lang="en-IE" dirty="0"/>
+              <a:t>Non-significant effect of SD-MCR distance on economic or culture.</a:t>
+            </a:r>
+          </a:p>
+          <a:p>
+            <a:r>
+              <a:rPr lang="en-IE" dirty="0"/>
+              <a:t>Including interaction variable – unlike Krause (2020) interaction – significance of </a:t>
+            </a:r>
+          </a:p>
+          <a:p>
+            <a:endParaRPr lang="en-IE" dirty="0"/>
+          </a:p>
+          <a:p>
+            <a:pPr marL="0" indent="0">
+              <a:buNone/>
+            </a:pPr>
+            <a:r>
+              <a:rPr lang="en-IE" dirty="0"/>
+              <a:t>These findings mean the null hypothesis cannot be rejected:</a:t>
+            </a:r>
+          </a:p>
+          <a:p>
+            <a:pPr marL="0" indent="0">
+              <a:buNone/>
+            </a:pPr>
+            <a:r>
+              <a:rPr lang="en-IE" dirty="0"/>
+              <a:t> that on average, when holding the additional variables constant – the distance in MCR and SD positions on economic and non-economic issues does not</a:t>
+            </a:r>
+          </a:p>
+          <a:p>
+            <a:pPr marL="0" indent="0">
+              <a:buNone/>
+            </a:pPr>
+            <a:r>
+              <a:rPr lang="en-IE" b="1" dirty="0"/>
+              <a:t>A potential addition to further test: </a:t>
+            </a:r>
+            <a:r>
+              <a:rPr lang="en-IE" dirty="0"/>
+              <a:t>limited observations</a:t>
+            </a:r>
+            <a:endParaRPr lang="en-IE" b="1" dirty="0"/>
+          </a:p>
+        </p:txBody>
+      </p:sp>
+    </p:spTree>
+    <p:extLst>
+      <p:ext uri="{BB962C8B-B14F-4D97-AF65-F5344CB8AC3E}">
+        <p14:creationId xmlns:p14="http://schemas.microsoft.com/office/powerpoint/2010/main" val="3514585462"/>
       </p:ext>
     </p:extLst>
   </p:cSld>
@@ -5404,8 +7596,11 @@
           <a:lstStyle/>
           <a:p>
             <a:r>
-              <a:rPr lang="en-IE" dirty="0"/>
-              <a:t>Original Paper</a:t>
+              <a:rPr lang="en-IE" b="1" dirty="0">
+                <a:latin typeface="Verdana" panose="020B0604030504040204" pitchFamily="34" charset="0"/>
+                <a:ea typeface="Verdana" panose="020B0604030504040204" pitchFamily="34" charset="0"/>
+              </a:rPr>
+              <a:t>Original Paper – Werner Krause</a:t>
             </a:r>
           </a:p>
         </p:txBody>
@@ -5429,7 +7624,7 @@
         <p:spPr/>
         <p:txBody>
           <a:bodyPr>
-            <a:normAutofit fontScale="85000" lnSpcReduction="10000"/>
+            <a:normAutofit fontScale="70000" lnSpcReduction="20000"/>
           </a:bodyPr>
           <a:lstStyle/>
           <a:p>
@@ -5437,8 +7632,22 @@
               <a:buNone/>
             </a:pPr>
             <a:r>
+              <a:rPr lang="en-IE" sz="4100" b="1" dirty="0"/>
+              <a:t>Context</a:t>
+            </a:r>
+            <a:endParaRPr lang="en-IE" dirty="0"/>
+          </a:p>
+          <a:p>
+            <a:pPr marL="0" indent="0">
+              <a:buNone/>
+            </a:pPr>
+            <a:r>
+              <a:rPr lang="en-IE" b="1" dirty="0"/>
+              <a:t>RQ: </a:t>
+            </a:r>
+            <a:r>
               <a:rPr lang="en-IE" dirty="0"/>
-              <a:t>Two-dimensions of competition: Economics and Culture.</a:t>
+              <a:t>Radical Left Parties (RLPs) emerged as a strong force across Europe – why? Is this related to other parties? Are they effectively positioning themselves to ‘replace’ traditional mainstream centre-left parties, i.e. Social Democrats (SDs).</a:t>
             </a:r>
           </a:p>
           <a:p>
@@ -5453,7 +7662,7 @@
             </a:pPr>
             <a:r>
               <a:rPr lang="en-IE" dirty="0"/>
-              <a:t>Radical Left Parties (RLPs) emerged as a strong force across Europe – why? Is this related to other parties? Are they effectively positioning themselves in place of traditional mainstream centre-left, i.e. Social Democrats (SDs)</a:t>
+              <a:t>Key focus: how RLPs positioning themselves on issues relative to other parties benefits them.</a:t>
             </a:r>
           </a:p>
           <a:p>
@@ -5524,6 +7733,1495 @@
 </file>
 
 <file path=ppt/slides/slide3.xml><?xml version="1.0" encoding="utf-8"?>
+<p:sld xmlns:a="http://schemas.openxmlformats.org/drawingml/2006/main" xmlns:r="http://schemas.openxmlformats.org/officeDocument/2006/relationships" xmlns:p="http://schemas.openxmlformats.org/presentationml/2006/main">
+  <p:cSld>
+    <p:bg>
+      <p:bgPr>
+        <a:solidFill>
+          <a:schemeClr val="bg1"/>
+        </a:solidFill>
+        <a:effectLst/>
+      </p:bgPr>
+    </p:bg>
+    <p:spTree>
+      <p:nvGrpSpPr>
+        <p:cNvPr id="1" name=""/>
+        <p:cNvGrpSpPr/>
+        <p:nvPr/>
+      </p:nvGrpSpPr>
+      <p:grpSpPr>
+        <a:xfrm>
+          <a:off x="0" y="0"/>
+          <a:ext cx="0" cy="0"/>
+          <a:chOff x="0" y="0"/>
+          <a:chExt cx="0" cy="0"/>
+        </a:xfrm>
+      </p:grpSpPr>
+      <p:sp useBgFill="1">
+        <p:nvSpPr>
+          <p:cNvPr id="9" name="Rectangle 8">
+            <a:extLst>
+              <a:ext uri="{FF2B5EF4-FFF2-40B4-BE49-F238E27FC236}">
+                <a16:creationId xmlns:a16="http://schemas.microsoft.com/office/drawing/2014/main" id="{058A14AF-9FB5-4CC7-BA35-E8E85D3EDF0E}"/>
+              </a:ext>
+              <a:ext uri="{C183D7F6-B498-43B3-948B-1728B52AA6E4}">
+                <adec:decorative xmlns:adec="http://schemas.microsoft.com/office/drawing/2017/decorative" val="1"/>
+              </a:ext>
+            </a:extLst>
+          </p:cNvPr>
+          <p:cNvSpPr>
+            <a:spLocks noGrp="1" noRot="1" noChangeAspect="1" noMove="1" noResize="1" noEditPoints="1" noAdjustHandles="1" noChangeArrowheads="1" noChangeShapeType="1" noTextEdit="1"/>
+          </p:cNvSpPr>
+          <p:nvPr>
+            <p:extLst>
+              <p:ext uri="{386F3935-93C4-4BCD-93E2-E3B085C9AB24}">
+                <p16:designElem xmlns:p16="http://schemas.microsoft.com/office/powerpoint/2015/main" val="1"/>
+              </p:ext>
+            </p:extLst>
+          </p:nvPr>
+        </p:nvSpPr>
+        <p:spPr>
+          <a:xfrm>
+            <a:off x="0" y="0"/>
+            <a:ext cx="12191999" cy="6857365"/>
+          </a:xfrm>
+          <a:prstGeom prst="rect">
+            <a:avLst/>
+          </a:prstGeom>
+          <a:ln>
+            <a:noFill/>
+          </a:ln>
+        </p:spPr>
+        <p:style>
+          <a:lnRef idx="2">
+            <a:schemeClr val="accent1">
+              <a:shade val="50000"/>
+            </a:schemeClr>
+          </a:lnRef>
+          <a:fillRef idx="1">
+            <a:schemeClr val="accent1"/>
+          </a:fillRef>
+          <a:effectRef idx="0">
+            <a:schemeClr val="accent1"/>
+          </a:effectRef>
+          <a:fontRef idx="minor">
+            <a:schemeClr val="lt1"/>
+          </a:fontRef>
+        </p:style>
+        <p:txBody>
+          <a:bodyPr rtlCol="0" anchor="ctr"/>
+          <a:lstStyle/>
+          <a:p>
+            <a:pPr algn="ctr"/>
+            <a:endParaRPr lang="en-US"/>
+          </a:p>
+        </p:txBody>
+      </p:sp>
+      <p:sp>
+        <p:nvSpPr>
+          <p:cNvPr id="2" name="Title 1">
+            <a:extLst>
+              <a:ext uri="{FF2B5EF4-FFF2-40B4-BE49-F238E27FC236}">
+                <a16:creationId xmlns:a16="http://schemas.microsoft.com/office/drawing/2014/main" id="{B246D3F8-D43B-69A9-BBC0-611EBF253E55}"/>
+              </a:ext>
+            </a:extLst>
+          </p:cNvPr>
+          <p:cNvSpPr>
+            <a:spLocks noGrp="1"/>
+          </p:cNvSpPr>
+          <p:nvPr>
+            <p:ph type="title"/>
+          </p:nvPr>
+        </p:nvSpPr>
+        <p:spPr>
+          <a:xfrm>
+            <a:off x="793662" y="386930"/>
+            <a:ext cx="10066122" cy="1298448"/>
+          </a:xfrm>
+        </p:spPr>
+        <p:txBody>
+          <a:bodyPr anchor="b">
+            <a:normAutofit/>
+          </a:bodyPr>
+          <a:lstStyle/>
+          <a:p>
+            <a:r>
+              <a:rPr lang="en-IE" b="1" dirty="0" err="1">
+                <a:latin typeface="Verdana" panose="020B0604030504040204" pitchFamily="34" charset="0"/>
+                <a:ea typeface="Verdana" panose="020B0604030504040204" pitchFamily="34" charset="0"/>
+              </a:rPr>
+              <a:t>Downsian</a:t>
+            </a:r>
+            <a:r>
+              <a:rPr lang="en-IE" b="1" dirty="0">
+                <a:latin typeface="Verdana" panose="020B0604030504040204" pitchFamily="34" charset="0"/>
+                <a:ea typeface="Verdana" panose="020B0604030504040204" pitchFamily="34" charset="0"/>
+              </a:rPr>
+              <a:t> model – Median voter </a:t>
+            </a:r>
+            <a:r>
+              <a:rPr lang="en-IE" b="1" dirty="0" err="1">
+                <a:latin typeface="Verdana" panose="020B0604030504040204" pitchFamily="34" charset="0"/>
+                <a:ea typeface="Verdana" panose="020B0604030504040204" pitchFamily="34" charset="0"/>
+              </a:rPr>
+              <a:t>theorm</a:t>
+            </a:r>
+            <a:endParaRPr lang="en-IE" b="1" dirty="0">
+              <a:latin typeface="Verdana" panose="020B0604030504040204" pitchFamily="34" charset="0"/>
+              <a:ea typeface="Verdana" panose="020B0604030504040204" pitchFamily="34" charset="0"/>
+            </a:endParaRPr>
+          </a:p>
+        </p:txBody>
+      </p:sp>
+      <p:sp>
+        <p:nvSpPr>
+          <p:cNvPr id="11" name="Rectangle 10">
+            <a:extLst>
+              <a:ext uri="{FF2B5EF4-FFF2-40B4-BE49-F238E27FC236}">
+                <a16:creationId xmlns:a16="http://schemas.microsoft.com/office/drawing/2014/main" id="{3A9A4357-BD1D-4622-A4FE-766E6AB8DE84}"/>
+              </a:ext>
+              <a:ext uri="{C183D7F6-B498-43B3-948B-1728B52AA6E4}">
+                <adec:decorative xmlns:adec="http://schemas.microsoft.com/office/drawing/2017/decorative" val="1"/>
+              </a:ext>
+            </a:extLst>
+          </p:cNvPr>
+          <p:cNvSpPr>
+            <a:spLocks noGrp="1" noRot="1" noChangeAspect="1" noMove="1" noResize="1" noEditPoints="1" noAdjustHandles="1" noChangeArrowheads="1" noChangeShapeType="1" noTextEdit="1"/>
+          </p:cNvSpPr>
+          <p:nvPr>
+            <p:extLst>
+              <p:ext uri="{386F3935-93C4-4BCD-93E2-E3B085C9AB24}">
+                <p16:designElem xmlns:p16="http://schemas.microsoft.com/office/powerpoint/2015/main" val="1"/>
+              </p:ext>
+            </p:extLst>
+          </p:nvPr>
+        </p:nvSpPr>
+        <p:spPr>
+          <a:xfrm flipH="1" flipV="1">
+            <a:off x="-2" y="1998845"/>
+            <a:ext cx="11454595" cy="781699"/>
+          </a:xfrm>
+          <a:prstGeom prst="rect">
+            <a:avLst/>
+          </a:prstGeom>
+          <a:solidFill>
+            <a:schemeClr val="accent4"/>
+          </a:solidFill>
+          <a:ln>
+            <a:noFill/>
+          </a:ln>
+        </p:spPr>
+        <p:style>
+          <a:lnRef idx="2">
+            <a:schemeClr val="accent1">
+              <a:shade val="50000"/>
+            </a:schemeClr>
+          </a:lnRef>
+          <a:fillRef idx="1">
+            <a:schemeClr val="accent1"/>
+          </a:fillRef>
+          <a:effectRef idx="0">
+            <a:schemeClr val="accent1"/>
+          </a:effectRef>
+          <a:fontRef idx="minor">
+            <a:schemeClr val="lt1"/>
+          </a:fontRef>
+        </p:style>
+        <p:txBody>
+          <a:bodyPr rtlCol="0" anchor="ctr"/>
+          <a:lstStyle/>
+          <a:p>
+            <a:pPr algn="ctr"/>
+            <a:endParaRPr lang="en-US"/>
+          </a:p>
+        </p:txBody>
+      </p:sp>
+      <p:sp>
+        <p:nvSpPr>
+          <p:cNvPr id="13" name="Rectangle 12">
+            <a:extLst>
+              <a:ext uri="{FF2B5EF4-FFF2-40B4-BE49-F238E27FC236}">
+                <a16:creationId xmlns:a16="http://schemas.microsoft.com/office/drawing/2014/main" id="{E659831F-0D9A-4C63-9EBB-8435B85A440F}"/>
+              </a:ext>
+              <a:ext uri="{C183D7F6-B498-43B3-948B-1728B52AA6E4}">
+                <adec:decorative xmlns:adec="http://schemas.microsoft.com/office/drawing/2017/decorative" val="1"/>
+              </a:ext>
+            </a:extLst>
+          </p:cNvPr>
+          <p:cNvSpPr>
+            <a:spLocks noGrp="1" noRot="1" noChangeAspect="1" noMove="1" noResize="1" noEditPoints="1" noAdjustHandles="1" noChangeArrowheads="1" noChangeShapeType="1" noTextEdit="1"/>
+          </p:cNvSpPr>
+          <p:nvPr>
+            <p:extLst>
+              <p:ext uri="{386F3935-93C4-4BCD-93E2-E3B085C9AB24}">
+                <p16:designElem xmlns:p16="http://schemas.microsoft.com/office/powerpoint/2015/main" val="1"/>
+              </p:ext>
+            </p:extLst>
+          </p:nvPr>
+        </p:nvSpPr>
+        <p:spPr>
+          <a:xfrm>
+            <a:off x="0" y="2203079"/>
+            <a:ext cx="11383362" cy="4267991"/>
+          </a:xfrm>
+          <a:prstGeom prst="rect">
+            <a:avLst/>
+          </a:prstGeom>
+          <a:solidFill>
+            <a:schemeClr val="bg1"/>
+          </a:solidFill>
+          <a:ln>
+            <a:noFill/>
+          </a:ln>
+          <a:effectLst>
+            <a:outerShdw blurRad="139700" dist="127000" dir="5400000" algn="t" rotWithShape="0">
+              <a:prstClr val="black">
+                <a:alpha val="15000"/>
+              </a:prstClr>
+            </a:outerShdw>
+          </a:effectLst>
+        </p:spPr>
+        <p:style>
+          <a:lnRef idx="2">
+            <a:schemeClr val="accent1">
+              <a:shade val="50000"/>
+            </a:schemeClr>
+          </a:lnRef>
+          <a:fillRef idx="1">
+            <a:schemeClr val="accent1"/>
+          </a:fillRef>
+          <a:effectRef idx="0">
+            <a:schemeClr val="accent1"/>
+          </a:effectRef>
+          <a:fontRef idx="minor">
+            <a:schemeClr val="lt1"/>
+          </a:fontRef>
+        </p:style>
+        <p:txBody>
+          <a:bodyPr rtlCol="0" anchor="ctr"/>
+          <a:lstStyle/>
+          <a:p>
+            <a:pPr algn="ctr"/>
+            <a:endParaRPr lang="en-US"/>
+          </a:p>
+        </p:txBody>
+      </p:sp>
+      <p:sp>
+        <p:nvSpPr>
+          <p:cNvPr id="3" name="Content Placeholder 2">
+            <a:extLst>
+              <a:ext uri="{FF2B5EF4-FFF2-40B4-BE49-F238E27FC236}">
+                <a16:creationId xmlns:a16="http://schemas.microsoft.com/office/drawing/2014/main" id="{F298F96C-FEC8-2A74-F9A6-493BB6189543}"/>
+              </a:ext>
+            </a:extLst>
+          </p:cNvPr>
+          <p:cNvSpPr>
+            <a:spLocks noGrp="1"/>
+          </p:cNvSpPr>
+          <p:nvPr>
+            <p:ph idx="1"/>
+          </p:nvPr>
+        </p:nvSpPr>
+        <p:spPr>
+          <a:xfrm>
+            <a:off x="793661" y="2599509"/>
+            <a:ext cx="4530898" cy="3639450"/>
+          </a:xfrm>
+        </p:spPr>
+        <p:txBody>
+          <a:bodyPr anchor="ctr">
+            <a:normAutofit/>
+          </a:bodyPr>
+          <a:lstStyle/>
+          <a:p>
+            <a:r>
+              <a:rPr lang="en-IE" sz="2000" dirty="0"/>
+              <a:t>Downs (1957).</a:t>
+            </a:r>
+          </a:p>
+          <a:p>
+            <a:pPr marL="0" indent="0">
+              <a:buNone/>
+            </a:pPr>
+            <a:endParaRPr lang="en-IE" sz="2000" dirty="0"/>
+          </a:p>
+          <a:p>
+            <a:r>
+              <a:rPr lang="en-IE" sz="2000" dirty="0"/>
+              <a:t>Uni-dimensional axis on economic positions.</a:t>
+            </a:r>
+          </a:p>
+          <a:p>
+            <a:pPr marL="0" indent="0">
+              <a:buNone/>
+            </a:pPr>
+            <a:endParaRPr lang="en-IE" sz="2000" dirty="0"/>
+          </a:p>
+          <a:p>
+            <a:r>
+              <a:rPr lang="en-IE" sz="2000" dirty="0"/>
+              <a:t>Voters choose the candidate they are closest to.</a:t>
+            </a:r>
+          </a:p>
+        </p:txBody>
+      </p:sp>
+      <p:pic>
+        <p:nvPicPr>
+          <p:cNvPr id="4" name="Picture 2" descr="undefined">
+            <a:extLst>
+              <a:ext uri="{FF2B5EF4-FFF2-40B4-BE49-F238E27FC236}">
+                <a16:creationId xmlns:a16="http://schemas.microsoft.com/office/drawing/2014/main" id="{2AEDB068-FE27-8EE6-F318-69FAE1C97830}"/>
+              </a:ext>
+            </a:extLst>
+          </p:cNvPr>
+          <p:cNvPicPr>
+            <a:picLocks noChangeAspect="1" noChangeArrowheads="1"/>
+          </p:cNvPicPr>
+          <p:nvPr/>
+        </p:nvPicPr>
+        <p:blipFill>
+          <a:blip r:embed="rId2">
+            <a:extLst>
+              <a:ext uri="{28A0092B-C50C-407E-A947-70E740481C1C}">
+                <a14:useLocalDpi xmlns:a14="http://schemas.microsoft.com/office/drawing/2010/main" val="0"/>
+              </a:ext>
+            </a:extLst>
+          </a:blip>
+          <a:stretch>
+            <a:fillRect/>
+          </a:stretch>
+        </p:blipFill>
+        <p:spPr bwMode="auto">
+          <a:xfrm>
+            <a:off x="5911532" y="3098872"/>
+            <a:ext cx="5150277" cy="2485009"/>
+          </a:xfrm>
+          <a:prstGeom prst="rect">
+            <a:avLst/>
+          </a:prstGeom>
+          <a:noFill/>
+          <a:extLst>
+            <a:ext uri="{909E8E84-426E-40DD-AFC4-6F175D3DCCD1}">
+              <a14:hiddenFill xmlns:a14="http://schemas.microsoft.com/office/drawing/2010/main">
+                <a:solidFill>
+                  <a:srgbClr val="FFFFFF"/>
+                </a:solidFill>
+              </a14:hiddenFill>
+            </a:ext>
+          </a:extLst>
+        </p:spPr>
+      </p:pic>
+      <p:sp>
+        <p:nvSpPr>
+          <p:cNvPr id="15" name="Rectangle 14">
+            <a:extLst>
+              <a:ext uri="{FF2B5EF4-FFF2-40B4-BE49-F238E27FC236}">
+                <a16:creationId xmlns:a16="http://schemas.microsoft.com/office/drawing/2014/main" id="{E6995CE5-F890-4ABA-82A2-26507CE8D2A3}"/>
+              </a:ext>
+              <a:ext uri="{C183D7F6-B498-43B3-948B-1728B52AA6E4}">
+                <adec:decorative xmlns:adec="http://schemas.microsoft.com/office/drawing/2017/decorative" val="1"/>
+              </a:ext>
+            </a:extLst>
+          </p:cNvPr>
+          <p:cNvSpPr>
+            <a:spLocks noGrp="1" noRot="1" noChangeAspect="1" noMove="1" noResize="1" noEditPoints="1" noAdjustHandles="1" noChangeArrowheads="1" noChangeShapeType="1" noTextEdit="1"/>
+          </p:cNvSpPr>
+          <p:nvPr>
+            <p:extLst>
+              <p:ext uri="{386F3935-93C4-4BCD-93E2-E3B085C9AB24}">
+                <p16:designElem xmlns:p16="http://schemas.microsoft.com/office/powerpoint/2015/main" val="1"/>
+              </p:ext>
+            </p:extLst>
+          </p:nvPr>
+        </p:nvSpPr>
+        <p:spPr>
+          <a:xfrm rot="5400000">
+            <a:off x="11228040" y="2313027"/>
+            <a:ext cx="781700" cy="152382"/>
+          </a:xfrm>
+          <a:prstGeom prst="rect">
+            <a:avLst/>
+          </a:prstGeom>
+          <a:solidFill>
+            <a:schemeClr val="accent4"/>
+          </a:solidFill>
+          <a:ln>
+            <a:noFill/>
+          </a:ln>
+        </p:spPr>
+        <p:style>
+          <a:lnRef idx="2">
+            <a:schemeClr val="accent1">
+              <a:shade val="50000"/>
+            </a:schemeClr>
+          </a:lnRef>
+          <a:fillRef idx="1">
+            <a:schemeClr val="accent1"/>
+          </a:fillRef>
+          <a:effectRef idx="0">
+            <a:schemeClr val="accent1"/>
+          </a:effectRef>
+          <a:fontRef idx="minor">
+            <a:schemeClr val="lt1"/>
+          </a:fontRef>
+        </p:style>
+        <p:txBody>
+          <a:bodyPr rtlCol="0" anchor="ctr"/>
+          <a:lstStyle/>
+          <a:p>
+            <a:pPr algn="ctr"/>
+            <a:endParaRPr lang="en-US"/>
+          </a:p>
+        </p:txBody>
+      </p:sp>
+    </p:spTree>
+    <p:extLst>
+      <p:ext uri="{BB962C8B-B14F-4D97-AF65-F5344CB8AC3E}">
+        <p14:creationId xmlns:p14="http://schemas.microsoft.com/office/powerpoint/2010/main" val="1923262649"/>
+      </p:ext>
+    </p:extLst>
+  </p:cSld>
+  <p:clrMapOvr>
+    <a:masterClrMapping/>
+  </p:clrMapOvr>
+</p:sld>
+</file>
+
+<file path=ppt/slides/slide4.xml><?xml version="1.0" encoding="utf-8"?>
+<p:sld xmlns:a="http://schemas.openxmlformats.org/drawingml/2006/main" xmlns:r="http://schemas.openxmlformats.org/officeDocument/2006/relationships" xmlns:p="http://schemas.openxmlformats.org/presentationml/2006/main">
+  <p:cSld>
+    <p:bg>
+      <p:bgPr>
+        <a:solidFill>
+          <a:schemeClr val="bg1"/>
+        </a:solidFill>
+        <a:effectLst/>
+      </p:bgPr>
+    </p:bg>
+    <p:spTree>
+      <p:nvGrpSpPr>
+        <p:cNvPr id="1" name=""/>
+        <p:cNvGrpSpPr/>
+        <p:nvPr/>
+      </p:nvGrpSpPr>
+      <p:grpSpPr>
+        <a:xfrm>
+          <a:off x="0" y="0"/>
+          <a:ext cx="0" cy="0"/>
+          <a:chOff x="0" y="0"/>
+          <a:chExt cx="0" cy="0"/>
+        </a:xfrm>
+      </p:grpSpPr>
+      <p:sp useBgFill="1">
+        <p:nvSpPr>
+          <p:cNvPr id="10" name="Rectangle 9">
+            <a:extLst>
+              <a:ext uri="{FF2B5EF4-FFF2-40B4-BE49-F238E27FC236}">
+                <a16:creationId xmlns:a16="http://schemas.microsoft.com/office/drawing/2014/main" id="{201CC55D-ED54-4C5C-95E6-10947BD1103B}"/>
+              </a:ext>
+              <a:ext uri="{C183D7F6-B498-43B3-948B-1728B52AA6E4}">
+                <adec:decorative xmlns:adec="http://schemas.microsoft.com/office/drawing/2017/decorative" val="1"/>
+              </a:ext>
+            </a:extLst>
+          </p:cNvPr>
+          <p:cNvSpPr>
+            <a:spLocks noGrp="1" noRot="1" noChangeAspect="1" noMove="1" noResize="1" noEditPoints="1" noAdjustHandles="1" noChangeArrowheads="1" noChangeShapeType="1" noTextEdit="1"/>
+          </p:cNvSpPr>
+          <p:nvPr>
+            <p:extLst>
+              <p:ext uri="{386F3935-93C4-4BCD-93E2-E3B085C9AB24}">
+                <p16:designElem xmlns:p16="http://schemas.microsoft.com/office/powerpoint/2015/main" val="1"/>
+              </p:ext>
+            </p:extLst>
+          </p:nvPr>
+        </p:nvSpPr>
+        <p:spPr>
+          <a:xfrm>
+            <a:off x="0" y="0"/>
+            <a:ext cx="12191999" cy="6857365"/>
+          </a:xfrm>
+          <a:prstGeom prst="rect">
+            <a:avLst/>
+          </a:prstGeom>
+          <a:ln>
+            <a:noFill/>
+          </a:ln>
+        </p:spPr>
+        <p:style>
+          <a:lnRef idx="2">
+            <a:schemeClr val="accent1">
+              <a:shade val="50000"/>
+            </a:schemeClr>
+          </a:lnRef>
+          <a:fillRef idx="1">
+            <a:schemeClr val="accent1"/>
+          </a:fillRef>
+          <a:effectRef idx="0">
+            <a:schemeClr val="accent1"/>
+          </a:effectRef>
+          <a:fontRef idx="minor">
+            <a:schemeClr val="lt1"/>
+          </a:fontRef>
+        </p:style>
+        <p:txBody>
+          <a:bodyPr rtlCol="0" anchor="ctr"/>
+          <a:lstStyle/>
+          <a:p>
+            <a:pPr algn="ctr"/>
+            <a:endParaRPr lang="en-US"/>
+          </a:p>
+        </p:txBody>
+      </p:sp>
+      <p:sp>
+        <p:nvSpPr>
+          <p:cNvPr id="2" name="Title 1">
+            <a:extLst>
+              <a:ext uri="{FF2B5EF4-FFF2-40B4-BE49-F238E27FC236}">
+                <a16:creationId xmlns:a16="http://schemas.microsoft.com/office/drawing/2014/main" id="{7E58BF8D-5097-7138-8E91-C6A246E24B92}"/>
+              </a:ext>
+            </a:extLst>
+          </p:cNvPr>
+          <p:cNvSpPr>
+            <a:spLocks noGrp="1"/>
+          </p:cNvSpPr>
+          <p:nvPr>
+            <p:ph type="title"/>
+          </p:nvPr>
+        </p:nvSpPr>
+        <p:spPr>
+          <a:xfrm>
+            <a:off x="589560" y="856180"/>
+            <a:ext cx="4560584" cy="1128068"/>
+          </a:xfrm>
+        </p:spPr>
+        <p:txBody>
+          <a:bodyPr anchor="ctr">
+            <a:normAutofit/>
+          </a:bodyPr>
+          <a:lstStyle/>
+          <a:p>
+            <a:r>
+              <a:rPr lang="en-IE" sz="3400" b="1">
+                <a:latin typeface="Verdana" panose="020B0604030504040204" pitchFamily="34" charset="0"/>
+                <a:ea typeface="Verdana" panose="020B0604030504040204" pitchFamily="34" charset="0"/>
+              </a:rPr>
+              <a:t>Multidimensional approach</a:t>
+            </a:r>
+          </a:p>
+        </p:txBody>
+      </p:sp>
+      <p:grpSp>
+        <p:nvGrpSpPr>
+          <p:cNvPr id="12" name="Group 11">
+            <a:extLst>
+              <a:ext uri="{FF2B5EF4-FFF2-40B4-BE49-F238E27FC236}">
+                <a16:creationId xmlns:a16="http://schemas.microsoft.com/office/drawing/2014/main" id="{1DE889C7-FAD6-4397-98E2-05D503484459}"/>
+              </a:ext>
+              <a:ext uri="{C183D7F6-B498-43B3-948B-1728B52AA6E4}">
+                <adec:decorative xmlns:adec="http://schemas.microsoft.com/office/drawing/2017/decorative" val="1"/>
+              </a:ext>
+            </a:extLst>
+          </p:cNvPr>
+          <p:cNvGrpSpPr>
+            <a:grpSpLocks noGrp="1" noUngrp="1" noRot="1" noChangeAspect="1" noMove="1" noResize="1"/>
+          </p:cNvGrpSpPr>
+          <p:nvPr>
+            <p:extLst>
+              <p:ext uri="{386F3935-93C4-4BCD-93E2-E3B085C9AB24}">
+                <p16:designElem xmlns:p16="http://schemas.microsoft.com/office/powerpoint/2015/main" val="1"/>
+              </p:ext>
+            </p:extLst>
+          </p:nvPr>
+        </p:nvGrpSpPr>
+        <p:grpSpPr>
+          <a:xfrm>
+            <a:off x="0" y="1083484"/>
+            <a:ext cx="355196" cy="673460"/>
+            <a:chOff x="0" y="823811"/>
+            <a:chExt cx="355196" cy="673460"/>
+          </a:xfrm>
+        </p:grpSpPr>
+        <p:sp>
+          <p:nvSpPr>
+            <p:cNvPr id="13" name="Rectangle 12">
+              <a:extLst>
+                <a:ext uri="{FF2B5EF4-FFF2-40B4-BE49-F238E27FC236}">
+                  <a16:creationId xmlns:a16="http://schemas.microsoft.com/office/drawing/2014/main" id="{F399A70F-F8CD-4992-9EF5-6CF15472E73F}"/>
+                </a:ext>
+                <a:ext uri="{C183D7F6-B498-43B3-948B-1728B52AA6E4}">
+                  <adec:decorative xmlns:adec="http://schemas.microsoft.com/office/drawing/2017/decorative" val="1"/>
+                </a:ext>
+              </a:extLst>
+            </p:cNvPr>
+            <p:cNvSpPr/>
+            <p:nvPr>
+              <p:extLst>
+                <p:ext uri="{386F3935-93C4-4BCD-93E2-E3B085C9AB24}">
+                  <p16:designElem xmlns:p16="http://schemas.microsoft.com/office/powerpoint/2015/main" val="1"/>
+                </p:ext>
+              </p:extLst>
+            </p:nvPr>
+          </p:nvSpPr>
+          <p:spPr>
+            <a:xfrm>
+              <a:off x="0" y="823811"/>
+              <a:ext cx="87363" cy="673460"/>
+            </a:xfrm>
+            <a:prstGeom prst="rect">
+              <a:avLst/>
+            </a:prstGeom>
+            <a:solidFill>
+              <a:schemeClr val="accent4"/>
+            </a:solidFill>
+            <a:ln>
+              <a:noFill/>
+            </a:ln>
+          </p:spPr>
+          <p:style>
+            <a:lnRef idx="2">
+              <a:schemeClr val="accent1">
+                <a:shade val="50000"/>
+              </a:schemeClr>
+            </a:lnRef>
+            <a:fillRef idx="1">
+              <a:schemeClr val="accent1"/>
+            </a:fillRef>
+            <a:effectRef idx="0">
+              <a:schemeClr val="accent1"/>
+            </a:effectRef>
+            <a:fontRef idx="minor">
+              <a:schemeClr val="lt1"/>
+            </a:fontRef>
+          </p:style>
+          <p:txBody>
+            <a:bodyPr rtlCol="0" anchor="ctr"/>
+            <a:lstStyle/>
+            <a:p>
+              <a:pPr algn="ctr"/>
+              <a:endParaRPr lang="en-US"/>
+            </a:p>
+          </p:txBody>
+        </p:sp>
+        <p:sp>
+          <p:nvSpPr>
+            <p:cNvPr id="14" name="Rectangle 13">
+              <a:extLst>
+                <a:ext uri="{FF2B5EF4-FFF2-40B4-BE49-F238E27FC236}">
+                  <a16:creationId xmlns:a16="http://schemas.microsoft.com/office/drawing/2014/main" id="{48F4FEDC-6D80-458C-A665-075D9B9500FD}"/>
+                </a:ext>
+                <a:ext uri="{C183D7F6-B498-43B3-948B-1728B52AA6E4}">
+                  <adec:decorative xmlns:adec="http://schemas.microsoft.com/office/drawing/2017/decorative" val="1"/>
+                </a:ext>
+              </a:extLst>
+            </p:cNvPr>
+            <p:cNvSpPr/>
+            <p:nvPr>
+              <p:extLst>
+                <p:ext uri="{386F3935-93C4-4BCD-93E2-E3B085C9AB24}">
+                  <p16:designElem xmlns:p16="http://schemas.microsoft.com/office/powerpoint/2015/main" val="1"/>
+                </p:ext>
+              </p:extLst>
+            </p:nvPr>
+          </p:nvSpPr>
+          <p:spPr>
+            <a:xfrm>
+              <a:off x="159341" y="823811"/>
+              <a:ext cx="195855" cy="673460"/>
+            </a:xfrm>
+            <a:prstGeom prst="rect">
+              <a:avLst/>
+            </a:prstGeom>
+            <a:solidFill>
+              <a:schemeClr val="accent4"/>
+            </a:solidFill>
+            <a:ln>
+              <a:noFill/>
+            </a:ln>
+          </p:spPr>
+          <p:style>
+            <a:lnRef idx="2">
+              <a:schemeClr val="accent1">
+                <a:shade val="50000"/>
+              </a:schemeClr>
+            </a:lnRef>
+            <a:fillRef idx="1">
+              <a:schemeClr val="accent1"/>
+            </a:fillRef>
+            <a:effectRef idx="0">
+              <a:schemeClr val="accent1"/>
+            </a:effectRef>
+            <a:fontRef idx="minor">
+              <a:schemeClr val="lt1"/>
+            </a:fontRef>
+          </p:style>
+          <p:txBody>
+            <a:bodyPr rtlCol="0" anchor="ctr"/>
+            <a:lstStyle/>
+            <a:p>
+              <a:pPr algn="ctr"/>
+              <a:endParaRPr lang="en-US"/>
+            </a:p>
+          </p:txBody>
+        </p:sp>
+      </p:grpSp>
+      <p:sp>
+        <p:nvSpPr>
+          <p:cNvPr id="16" name="Rectangle 15">
+            <a:extLst>
+              <a:ext uri="{FF2B5EF4-FFF2-40B4-BE49-F238E27FC236}">
+                <a16:creationId xmlns:a16="http://schemas.microsoft.com/office/drawing/2014/main" id="{3873B707-463F-40B0-8227-E8CC6C67EB25}"/>
+              </a:ext>
+              <a:ext uri="{C183D7F6-B498-43B3-948B-1728B52AA6E4}">
+                <adec:decorative xmlns:adec="http://schemas.microsoft.com/office/drawing/2017/decorative" val="1"/>
+              </a:ext>
+            </a:extLst>
+          </p:cNvPr>
+          <p:cNvSpPr>
+            <a:spLocks noGrp="1" noRot="1" noChangeAspect="1" noMove="1" noResize="1" noEditPoints="1" noAdjustHandles="1" noChangeArrowheads="1" noChangeShapeType="1" noTextEdit="1"/>
+          </p:cNvSpPr>
+          <p:nvPr>
+            <p:extLst>
+              <p:ext uri="{386F3935-93C4-4BCD-93E2-E3B085C9AB24}">
+                <p16:designElem xmlns:p16="http://schemas.microsoft.com/office/powerpoint/2015/main" val="1"/>
+              </p:ext>
+            </p:extLst>
+          </p:nvPr>
+        </p:nvSpPr>
+        <p:spPr>
+          <a:xfrm flipH="1">
+            <a:off x="665085" y="2090569"/>
+            <a:ext cx="4297680" cy="27432"/>
+          </a:xfrm>
+          <a:prstGeom prst="rect">
+            <a:avLst/>
+          </a:prstGeom>
+          <a:solidFill>
+            <a:schemeClr val="accent4"/>
+          </a:solidFill>
+          <a:ln>
+            <a:noFill/>
+          </a:ln>
+        </p:spPr>
+        <p:style>
+          <a:lnRef idx="2">
+            <a:schemeClr val="accent1">
+              <a:shade val="50000"/>
+            </a:schemeClr>
+          </a:lnRef>
+          <a:fillRef idx="1">
+            <a:schemeClr val="accent1"/>
+          </a:fillRef>
+          <a:effectRef idx="0">
+            <a:schemeClr val="accent1"/>
+          </a:effectRef>
+          <a:fontRef idx="minor">
+            <a:schemeClr val="lt1"/>
+          </a:fontRef>
+        </p:style>
+        <p:txBody>
+          <a:bodyPr rtlCol="0" anchor="ctr"/>
+          <a:lstStyle/>
+          <a:p>
+            <a:pPr algn="ctr"/>
+            <a:endParaRPr lang="en-US"/>
+          </a:p>
+        </p:txBody>
+      </p:sp>
+      <p:sp>
+        <p:nvSpPr>
+          <p:cNvPr id="3" name="Content Placeholder 2">
+            <a:extLst>
+              <a:ext uri="{FF2B5EF4-FFF2-40B4-BE49-F238E27FC236}">
+                <a16:creationId xmlns:a16="http://schemas.microsoft.com/office/drawing/2014/main" id="{3669820E-B81B-632B-5955-A901DCE2B57D}"/>
+              </a:ext>
+            </a:extLst>
+          </p:cNvPr>
+          <p:cNvSpPr>
+            <a:spLocks noGrp="1"/>
+          </p:cNvSpPr>
+          <p:nvPr>
+            <p:ph idx="1"/>
+          </p:nvPr>
+        </p:nvSpPr>
+        <p:spPr>
+          <a:xfrm>
+            <a:off x="590719" y="2330505"/>
+            <a:ext cx="4559425" cy="3979585"/>
+          </a:xfrm>
+        </p:spPr>
+        <p:txBody>
+          <a:bodyPr anchor="ctr">
+            <a:normAutofit/>
+          </a:bodyPr>
+          <a:lstStyle/>
+          <a:p>
+            <a:r>
+              <a:rPr lang="en-IE" sz="2000"/>
+              <a:t>Multi-dimensional axis.</a:t>
+            </a:r>
+          </a:p>
+          <a:p>
+            <a:pPr marL="0" indent="0">
+              <a:buNone/>
+            </a:pPr>
+            <a:endParaRPr lang="en-IE" sz="2000"/>
+          </a:p>
+          <a:p>
+            <a:r>
+              <a:rPr lang="en-IE" sz="2000"/>
+              <a:t>Recognises the increasing prominence of second-dimension issues.</a:t>
+            </a:r>
+          </a:p>
+          <a:p>
+            <a:pPr marL="0" indent="0">
+              <a:buNone/>
+            </a:pPr>
+            <a:endParaRPr lang="en-IE" sz="2000"/>
+          </a:p>
+          <a:p>
+            <a:r>
+              <a:rPr lang="en-IE" sz="2000"/>
+              <a:t>Similar logic applies with the median voter theorm.</a:t>
+            </a:r>
+          </a:p>
+        </p:txBody>
+      </p:sp>
+      <p:sp>
+        <p:nvSpPr>
+          <p:cNvPr id="18" name="Rectangle 17">
+            <a:extLst>
+              <a:ext uri="{FF2B5EF4-FFF2-40B4-BE49-F238E27FC236}">
+                <a16:creationId xmlns:a16="http://schemas.microsoft.com/office/drawing/2014/main" id="{C13237C8-E62C-4F0D-A318-BD6FB6C2D138}"/>
+              </a:ext>
+              <a:ext uri="{C183D7F6-B498-43B3-948B-1728B52AA6E4}">
+                <adec:decorative xmlns:adec="http://schemas.microsoft.com/office/drawing/2017/decorative" val="1"/>
+              </a:ext>
+            </a:extLst>
+          </p:cNvPr>
+          <p:cNvSpPr>
+            <a:spLocks noGrp="1" noRot="1" noChangeAspect="1" noMove="1" noResize="1" noEditPoints="1" noAdjustHandles="1" noChangeArrowheads="1" noChangeShapeType="1" noTextEdit="1"/>
+          </p:cNvSpPr>
+          <p:nvPr>
+            <p:extLst>
+              <p:ext uri="{386F3935-93C4-4BCD-93E2-E3B085C9AB24}">
+                <p16:designElem xmlns:p16="http://schemas.microsoft.com/office/powerpoint/2015/main" val="1"/>
+              </p:ext>
+            </p:extLst>
+          </p:nvPr>
+        </p:nvSpPr>
+        <p:spPr>
+          <a:xfrm flipH="1">
+            <a:off x="10697670" y="0"/>
+            <a:ext cx="1494330" cy="6858000"/>
+          </a:xfrm>
+          <a:prstGeom prst="rect">
+            <a:avLst/>
+          </a:prstGeom>
+          <a:solidFill>
+            <a:schemeClr val="accent4"/>
+          </a:solidFill>
+          <a:ln>
+            <a:noFill/>
+          </a:ln>
+        </p:spPr>
+        <p:style>
+          <a:lnRef idx="2">
+            <a:schemeClr val="accent1">
+              <a:shade val="50000"/>
+            </a:schemeClr>
+          </a:lnRef>
+          <a:fillRef idx="1">
+            <a:schemeClr val="accent1"/>
+          </a:fillRef>
+          <a:effectRef idx="0">
+            <a:schemeClr val="accent1"/>
+          </a:effectRef>
+          <a:fontRef idx="minor">
+            <a:schemeClr val="lt1"/>
+          </a:fontRef>
+        </p:style>
+        <p:txBody>
+          <a:bodyPr rtlCol="0" anchor="ctr"/>
+          <a:lstStyle/>
+          <a:p>
+            <a:pPr algn="ctr"/>
+            <a:endParaRPr lang="en-US"/>
+          </a:p>
+        </p:txBody>
+      </p:sp>
+      <p:sp>
+        <p:nvSpPr>
+          <p:cNvPr id="20" name="Rectangle 19">
+            <a:extLst>
+              <a:ext uri="{FF2B5EF4-FFF2-40B4-BE49-F238E27FC236}">
+                <a16:creationId xmlns:a16="http://schemas.microsoft.com/office/drawing/2014/main" id="{19C9EAEA-39D0-4B0E-A0EB-51E7B26740B1}"/>
+              </a:ext>
+              <a:ext uri="{C183D7F6-B498-43B3-948B-1728B52AA6E4}">
+                <adec:decorative xmlns:adec="http://schemas.microsoft.com/office/drawing/2017/decorative" val="1"/>
+              </a:ext>
+            </a:extLst>
+          </p:cNvPr>
+          <p:cNvSpPr>
+            <a:spLocks noGrp="1" noRot="1" noChangeAspect="1" noMove="1" noResize="1" noEditPoints="1" noAdjustHandles="1" noChangeArrowheads="1" noChangeShapeType="1" noTextEdit="1"/>
+          </p:cNvSpPr>
+          <p:nvPr>
+            <p:extLst>
+              <p:ext uri="{386F3935-93C4-4BCD-93E2-E3B085C9AB24}">
+                <p16:designElem xmlns:p16="http://schemas.microsoft.com/office/powerpoint/2015/main" val="1"/>
+              </p:ext>
+            </p:extLst>
+          </p:nvPr>
+        </p:nvSpPr>
+        <p:spPr>
+          <a:xfrm>
+            <a:off x="5685810" y="513853"/>
+            <a:ext cx="6009366" cy="5834577"/>
+          </a:xfrm>
+          <a:prstGeom prst="rect">
+            <a:avLst/>
+          </a:prstGeom>
+          <a:solidFill>
+            <a:schemeClr val="bg1"/>
+          </a:solidFill>
+          <a:ln>
+            <a:noFill/>
+          </a:ln>
+          <a:effectLst>
+            <a:outerShdw blurRad="139700" dist="127000" dir="5400000" algn="t" rotWithShape="0">
+              <a:prstClr val="black">
+                <a:alpha val="15000"/>
+              </a:prstClr>
+            </a:outerShdw>
+          </a:effectLst>
+        </p:spPr>
+        <p:style>
+          <a:lnRef idx="2">
+            <a:schemeClr val="accent1">
+              <a:shade val="50000"/>
+            </a:schemeClr>
+          </a:lnRef>
+          <a:fillRef idx="1">
+            <a:schemeClr val="accent1"/>
+          </a:fillRef>
+          <a:effectRef idx="0">
+            <a:schemeClr val="accent1"/>
+          </a:effectRef>
+          <a:fontRef idx="minor">
+            <a:schemeClr val="lt1"/>
+          </a:fontRef>
+        </p:style>
+        <p:txBody>
+          <a:bodyPr rtlCol="0" anchor="ctr"/>
+          <a:lstStyle/>
+          <a:p>
+            <a:pPr algn="ctr"/>
+            <a:endParaRPr lang="en-US"/>
+          </a:p>
+        </p:txBody>
+      </p:sp>
+      <p:pic>
+        <p:nvPicPr>
+          <p:cNvPr id="5" name="Picture 4">
+            <a:extLst>
+              <a:ext uri="{FF2B5EF4-FFF2-40B4-BE49-F238E27FC236}">
+                <a16:creationId xmlns:a16="http://schemas.microsoft.com/office/drawing/2014/main" id="{DB6BB64F-CD39-167B-5527-7960754578BC}"/>
+              </a:ext>
+            </a:extLst>
+          </p:cNvPr>
+          <p:cNvPicPr>
+            <a:picLocks noChangeAspect="1"/>
+          </p:cNvPicPr>
+          <p:nvPr/>
+        </p:nvPicPr>
+        <p:blipFill>
+          <a:blip r:embed="rId2"/>
+          <a:srcRect r="7156" b="-1"/>
+          <a:stretch>
+            <a:fillRect/>
+          </a:stretch>
+        </p:blipFill>
+        <p:spPr>
+          <a:xfrm>
+            <a:off x="5977788" y="799352"/>
+            <a:ext cx="5425410" cy="5259296"/>
+          </a:xfrm>
+          <a:prstGeom prst="rect">
+            <a:avLst/>
+          </a:prstGeom>
+        </p:spPr>
+      </p:pic>
+    </p:spTree>
+    <p:extLst>
+      <p:ext uri="{BB962C8B-B14F-4D97-AF65-F5344CB8AC3E}">
+        <p14:creationId xmlns:p14="http://schemas.microsoft.com/office/powerpoint/2010/main" val="850707843"/>
+      </p:ext>
+    </p:extLst>
+  </p:cSld>
+  <p:clrMapOvr>
+    <a:masterClrMapping/>
+  </p:clrMapOvr>
+</p:sld>
+</file>
+
+<file path=ppt/slides/slide5.xml><?xml version="1.0" encoding="utf-8"?>
+<p:sld xmlns:a="http://schemas.openxmlformats.org/drawingml/2006/main" xmlns:r="http://schemas.openxmlformats.org/officeDocument/2006/relationships" xmlns:p="http://schemas.openxmlformats.org/presentationml/2006/main">
+  <p:cSld>
+    <p:bg>
+      <p:bgPr>
+        <a:solidFill>
+          <a:schemeClr val="bg1"/>
+        </a:solidFill>
+        <a:effectLst/>
+      </p:bgPr>
+    </p:bg>
+    <p:spTree>
+      <p:nvGrpSpPr>
+        <p:cNvPr id="1" name=""/>
+        <p:cNvGrpSpPr/>
+        <p:nvPr/>
+      </p:nvGrpSpPr>
+      <p:grpSpPr>
+        <a:xfrm>
+          <a:off x="0" y="0"/>
+          <a:ext cx="0" cy="0"/>
+          <a:chOff x="0" y="0"/>
+          <a:chExt cx="0" cy="0"/>
+        </a:xfrm>
+      </p:grpSpPr>
+      <p:sp useBgFill="1">
+        <p:nvSpPr>
+          <p:cNvPr id="5" name="Rectangle 4">
+            <a:extLst>
+              <a:ext uri="{FF2B5EF4-FFF2-40B4-BE49-F238E27FC236}">
+                <a16:creationId xmlns:a16="http://schemas.microsoft.com/office/drawing/2014/main" id="{DBF61EA3-B236-439E-9C0B-340980D56BEE}"/>
+              </a:ext>
+              <a:ext uri="{C183D7F6-B498-43B3-948B-1728B52AA6E4}">
+                <adec:decorative xmlns:adec="http://schemas.microsoft.com/office/drawing/2017/decorative" val="1"/>
+              </a:ext>
+            </a:extLst>
+          </p:cNvPr>
+          <p:cNvSpPr>
+            <a:spLocks noGrp="1" noRot="1" noChangeAspect="1" noMove="1" noResize="1" noEditPoints="1" noAdjustHandles="1" noChangeArrowheads="1" noChangeShapeType="1" noTextEdit="1"/>
+          </p:cNvSpPr>
+          <p:nvPr>
+            <p:extLst>
+              <p:ext uri="{386F3935-93C4-4BCD-93E2-E3B085C9AB24}">
+                <p16:designElem xmlns:p16="http://schemas.microsoft.com/office/powerpoint/2015/main" val="1"/>
+              </p:ext>
+            </p:extLst>
+          </p:nvPr>
+        </p:nvSpPr>
+        <p:spPr>
+          <a:xfrm>
+            <a:off x="0" y="0"/>
+            <a:ext cx="12191999" cy="6857365"/>
+          </a:xfrm>
+          <a:prstGeom prst="rect">
+            <a:avLst/>
+          </a:prstGeom>
+          <a:ln>
+            <a:noFill/>
+          </a:ln>
+        </p:spPr>
+        <p:style>
+          <a:lnRef idx="2">
+            <a:schemeClr val="accent1">
+              <a:shade val="50000"/>
+            </a:schemeClr>
+          </a:lnRef>
+          <a:fillRef idx="1">
+            <a:schemeClr val="accent1"/>
+          </a:fillRef>
+          <a:effectRef idx="0">
+            <a:schemeClr val="accent1"/>
+          </a:effectRef>
+          <a:fontRef idx="minor">
+            <a:schemeClr val="lt1"/>
+          </a:fontRef>
+        </p:style>
+        <p:txBody>
+          <a:bodyPr rtlCol="0" anchor="ctr"/>
+          <a:lstStyle/>
+          <a:p>
+            <a:pPr algn="ctr"/>
+            <a:endParaRPr lang="en-US"/>
+          </a:p>
+        </p:txBody>
+      </p:sp>
+      <p:sp>
+        <p:nvSpPr>
+          <p:cNvPr id="2" name="Title 1">
+            <a:extLst>
+              <a:ext uri="{FF2B5EF4-FFF2-40B4-BE49-F238E27FC236}">
+                <a16:creationId xmlns:a16="http://schemas.microsoft.com/office/drawing/2014/main" id="{E41AA746-17DD-6318-5805-EAC8E9000DA4}"/>
+              </a:ext>
+            </a:extLst>
+          </p:cNvPr>
+          <p:cNvSpPr>
+            <a:spLocks noGrp="1"/>
+          </p:cNvSpPr>
+          <p:nvPr>
+            <p:ph type="title"/>
+          </p:nvPr>
+        </p:nvSpPr>
+        <p:spPr>
+          <a:xfrm>
+            <a:off x="808638" y="386930"/>
+            <a:ext cx="9236700" cy="1188950"/>
+          </a:xfrm>
+        </p:spPr>
+        <p:txBody>
+          <a:bodyPr anchor="b">
+            <a:normAutofit/>
+          </a:bodyPr>
+          <a:lstStyle/>
+          <a:p>
+            <a:r>
+              <a:rPr lang="en-IE" sz="5400" b="1">
+                <a:latin typeface="Verdana" panose="020B0604030504040204" pitchFamily="34" charset="0"/>
+                <a:ea typeface="Verdana" panose="020B0604030504040204" pitchFamily="34" charset="0"/>
+              </a:rPr>
+              <a:t>My extension - Theory</a:t>
+            </a:r>
+          </a:p>
+        </p:txBody>
+      </p:sp>
+      <p:grpSp>
+        <p:nvGrpSpPr>
+          <p:cNvPr id="6" name="Group 5">
+            <a:extLst>
+              <a:ext uri="{FF2B5EF4-FFF2-40B4-BE49-F238E27FC236}">
+                <a16:creationId xmlns:a16="http://schemas.microsoft.com/office/drawing/2014/main" id="{28FAF094-D087-493F-8DF9-A486C2D6BBAA}"/>
+              </a:ext>
+              <a:ext uri="{C183D7F6-B498-43B3-948B-1728B52AA6E4}">
+                <adec:decorative xmlns:adec="http://schemas.microsoft.com/office/drawing/2017/decorative" val="1"/>
+              </a:ext>
+            </a:extLst>
+          </p:cNvPr>
+          <p:cNvGrpSpPr>
+            <a:grpSpLocks noGrp="1" noUngrp="1" noRot="1" noChangeAspect="1" noMove="1" noResize="1"/>
+          </p:cNvGrpSpPr>
+          <p:nvPr>
+            <p:extLst>
+              <p:ext uri="{386F3935-93C4-4BCD-93E2-E3B085C9AB24}">
+                <p16:designElem xmlns:p16="http://schemas.microsoft.com/office/powerpoint/2015/main" val="1"/>
+              </p:ext>
+            </p:extLst>
+          </p:nvPr>
+        </p:nvGrpSpPr>
+        <p:grpSpPr>
+          <a:xfrm>
+            <a:off x="-2" y="1998368"/>
+            <a:ext cx="11695083" cy="782176"/>
+            <a:chOff x="-2" y="1998368"/>
+            <a:chExt cx="11695083" cy="782176"/>
+          </a:xfrm>
+        </p:grpSpPr>
+        <p:sp>
+          <p:nvSpPr>
+            <p:cNvPr id="7" name="Rectangle 6">
+              <a:extLst>
+                <a:ext uri="{FF2B5EF4-FFF2-40B4-BE49-F238E27FC236}">
+                  <a16:creationId xmlns:a16="http://schemas.microsoft.com/office/drawing/2014/main" id="{8D7C88D8-5509-4514-925A-9CE148E5CBD6}"/>
+                </a:ext>
+                <a:ext uri="{C183D7F6-B498-43B3-948B-1728B52AA6E4}">
+                  <adec:decorative xmlns:adec="http://schemas.microsoft.com/office/drawing/2017/decorative" val="1"/>
+                </a:ext>
+              </a:extLst>
+            </p:cNvPr>
+            <p:cNvSpPr/>
+            <p:nvPr>
+              <p:extLst>
+                <p:ext uri="{386F3935-93C4-4BCD-93E2-E3B085C9AB24}">
+                  <p16:designElem xmlns:p16="http://schemas.microsoft.com/office/powerpoint/2015/main" val="1"/>
+                </p:ext>
+              </p:extLst>
+            </p:nvPr>
+          </p:nvSpPr>
+          <p:spPr>
+            <a:xfrm rot="5400000">
+              <a:off x="11228040" y="2313027"/>
+              <a:ext cx="781700" cy="152382"/>
+            </a:xfrm>
+            <a:prstGeom prst="rect">
+              <a:avLst/>
+            </a:prstGeom>
+            <a:solidFill>
+              <a:schemeClr val="accent4"/>
+            </a:solidFill>
+            <a:ln>
+              <a:noFill/>
+            </a:ln>
+          </p:spPr>
+          <p:style>
+            <a:lnRef idx="2">
+              <a:schemeClr val="accent1">
+                <a:shade val="50000"/>
+              </a:schemeClr>
+            </a:lnRef>
+            <a:fillRef idx="1">
+              <a:schemeClr val="accent1"/>
+            </a:fillRef>
+            <a:effectRef idx="0">
+              <a:schemeClr val="accent1"/>
+            </a:effectRef>
+            <a:fontRef idx="minor">
+              <a:schemeClr val="lt1"/>
+            </a:fontRef>
+          </p:style>
+          <p:txBody>
+            <a:bodyPr rtlCol="0" anchor="ctr"/>
+            <a:lstStyle/>
+            <a:p>
+              <a:pPr algn="ctr"/>
+              <a:endParaRPr lang="en-US"/>
+            </a:p>
+          </p:txBody>
+        </p:sp>
+        <p:sp>
+          <p:nvSpPr>
+            <p:cNvPr id="9" name="Rectangle 8">
+              <a:extLst>
+                <a:ext uri="{FF2B5EF4-FFF2-40B4-BE49-F238E27FC236}">
+                  <a16:creationId xmlns:a16="http://schemas.microsoft.com/office/drawing/2014/main" id="{7275593D-F75E-4426-AE3E-2CDEFD228D25}"/>
+                </a:ext>
+                <a:ext uri="{C183D7F6-B498-43B3-948B-1728B52AA6E4}">
+                  <adec:decorative xmlns:adec="http://schemas.microsoft.com/office/drawing/2017/decorative" val="1"/>
+                </a:ext>
+              </a:extLst>
+            </p:cNvPr>
+            <p:cNvSpPr/>
+            <p:nvPr>
+              <p:extLst>
+                <p:ext uri="{386F3935-93C4-4BCD-93E2-E3B085C9AB24}">
+                  <p16:designElem xmlns:p16="http://schemas.microsoft.com/office/powerpoint/2015/main" val="1"/>
+                </p:ext>
+              </p:extLst>
+            </p:nvPr>
+          </p:nvSpPr>
+          <p:spPr>
+            <a:xfrm flipH="1" flipV="1">
+              <a:off x="-2" y="1998845"/>
+              <a:ext cx="11454595" cy="781699"/>
+            </a:xfrm>
+            <a:prstGeom prst="rect">
+              <a:avLst/>
+            </a:prstGeom>
+            <a:solidFill>
+              <a:schemeClr val="accent4"/>
+            </a:solidFill>
+            <a:ln>
+              <a:noFill/>
+            </a:ln>
+          </p:spPr>
+          <p:style>
+            <a:lnRef idx="2">
+              <a:schemeClr val="accent1">
+                <a:shade val="50000"/>
+              </a:schemeClr>
+            </a:lnRef>
+            <a:fillRef idx="1">
+              <a:schemeClr val="accent1"/>
+            </a:fillRef>
+            <a:effectRef idx="0">
+              <a:schemeClr val="accent1"/>
+            </a:effectRef>
+            <a:fontRef idx="minor">
+              <a:schemeClr val="lt1"/>
+            </a:fontRef>
+          </p:style>
+          <p:txBody>
+            <a:bodyPr rtlCol="0" anchor="ctr"/>
+            <a:lstStyle/>
+            <a:p>
+              <a:pPr algn="ctr"/>
+              <a:endParaRPr lang="en-US"/>
+            </a:p>
+          </p:txBody>
+        </p:sp>
+      </p:grpSp>
+      <p:sp>
+        <p:nvSpPr>
+          <p:cNvPr id="13" name="Rectangle 12">
+            <a:extLst>
+              <a:ext uri="{FF2B5EF4-FFF2-40B4-BE49-F238E27FC236}">
+                <a16:creationId xmlns:a16="http://schemas.microsoft.com/office/drawing/2014/main" id="{E659831F-0D9A-4C63-9EBB-8435B85A440F}"/>
+              </a:ext>
+              <a:ext uri="{C183D7F6-B498-43B3-948B-1728B52AA6E4}">
+                <adec:decorative xmlns:adec="http://schemas.microsoft.com/office/drawing/2017/decorative" val="1"/>
+              </a:ext>
+            </a:extLst>
+          </p:cNvPr>
+          <p:cNvSpPr>
+            <a:spLocks noGrp="1" noRot="1" noChangeAspect="1" noMove="1" noResize="1" noEditPoints="1" noAdjustHandles="1" noChangeArrowheads="1" noChangeShapeType="1" noTextEdit="1"/>
+          </p:cNvSpPr>
+          <p:nvPr>
+            <p:extLst>
+              <p:ext uri="{386F3935-93C4-4BCD-93E2-E3B085C9AB24}">
+                <p16:designElem xmlns:p16="http://schemas.microsoft.com/office/powerpoint/2015/main" val="1"/>
+              </p:ext>
+            </p:extLst>
+          </p:nvPr>
+        </p:nvSpPr>
+        <p:spPr>
+          <a:xfrm>
+            <a:off x="0" y="2203079"/>
+            <a:ext cx="11383362" cy="4147845"/>
+          </a:xfrm>
+          <a:prstGeom prst="rect">
+            <a:avLst/>
+          </a:prstGeom>
+          <a:solidFill>
+            <a:schemeClr val="bg1"/>
+          </a:solidFill>
+          <a:ln>
+            <a:noFill/>
+          </a:ln>
+          <a:effectLst>
+            <a:outerShdw blurRad="139700" dist="127000" dir="5400000" algn="t" rotWithShape="0">
+              <a:prstClr val="black">
+                <a:alpha val="15000"/>
+              </a:prstClr>
+            </a:outerShdw>
+          </a:effectLst>
+        </p:spPr>
+        <p:style>
+          <a:lnRef idx="2">
+            <a:schemeClr val="accent1">
+              <a:shade val="50000"/>
+            </a:schemeClr>
+          </a:lnRef>
+          <a:fillRef idx="1">
+            <a:schemeClr val="accent1"/>
+          </a:fillRef>
+          <a:effectRef idx="0">
+            <a:schemeClr val="accent1"/>
+          </a:effectRef>
+          <a:fontRef idx="minor">
+            <a:schemeClr val="lt1"/>
+          </a:fontRef>
+        </p:style>
+        <p:txBody>
+          <a:bodyPr rtlCol="0" anchor="ctr"/>
+          <a:lstStyle/>
+          <a:p>
+            <a:pPr algn="ctr"/>
+            <a:endParaRPr lang="en-US"/>
+          </a:p>
+        </p:txBody>
+      </p:sp>
+      <p:sp>
+        <p:nvSpPr>
+          <p:cNvPr id="3" name="Content Placeholder 2">
+            <a:extLst>
+              <a:ext uri="{FF2B5EF4-FFF2-40B4-BE49-F238E27FC236}">
+                <a16:creationId xmlns:a16="http://schemas.microsoft.com/office/drawing/2014/main" id="{ADB2CDDA-ACA5-6BC2-18DB-72E3A581C60C}"/>
+              </a:ext>
+            </a:extLst>
+          </p:cNvPr>
+          <p:cNvSpPr>
+            <a:spLocks noGrp="1"/>
+          </p:cNvSpPr>
+          <p:nvPr>
+            <p:ph idx="1"/>
+          </p:nvPr>
+        </p:nvSpPr>
+        <p:spPr>
+          <a:xfrm>
+            <a:off x="793660" y="2599509"/>
+            <a:ext cx="10143668" cy="3435531"/>
+          </a:xfrm>
+        </p:spPr>
+        <p:txBody>
+          <a:bodyPr anchor="ctr">
+            <a:normAutofit/>
+          </a:bodyPr>
+          <a:lstStyle/>
+          <a:p>
+            <a:pPr marL="0" indent="0">
+              <a:buNone/>
+            </a:pPr>
+            <a:r>
+              <a:rPr lang="en-IE" sz="1500" b="1"/>
+              <a:t>Core point of Krause (2020): </a:t>
+            </a:r>
+            <a:r>
+              <a:rPr lang="en-IE" sz="1500"/>
+              <a:t>RLP competition with SDs and (occasionally) alternative Lib-Left parties influences result.</a:t>
+            </a:r>
+          </a:p>
+          <a:p>
+            <a:pPr marL="0" indent="0">
+              <a:buNone/>
+            </a:pPr>
+            <a:endParaRPr lang="en-IE" sz="1500"/>
+          </a:p>
+          <a:p>
+            <a:pPr marL="0" indent="0">
+              <a:buNone/>
+            </a:pPr>
+            <a:r>
+              <a:rPr lang="en-IE" sz="1500" b="1" u="sng"/>
+              <a:t>My addition: SD distance from MCR</a:t>
+            </a:r>
+          </a:p>
+          <a:p>
+            <a:r>
+              <a:rPr lang="en-IE" sz="1500"/>
+              <a:t>Lit on SDs suggests that Third-way moderation and austerity participation hurt SDs.</a:t>
+            </a:r>
+          </a:p>
+          <a:p>
+            <a:r>
+              <a:rPr lang="en-IE" sz="1500"/>
+              <a:t>In-part this involved blurring the lines between them and Main Centre-right party.</a:t>
+            </a:r>
+          </a:p>
+          <a:p>
+            <a:pPr lvl="1"/>
+            <a:endParaRPr lang="en-IE" sz="1500"/>
+          </a:p>
+          <a:p>
+            <a:pPr marL="0" indent="0">
+              <a:buNone/>
+            </a:pPr>
+            <a:r>
+              <a:rPr lang="en-IE" sz="1500"/>
+              <a:t>Theoretically this should benefit alternative economic issue owners – RLPs.</a:t>
+            </a:r>
+          </a:p>
+          <a:p>
+            <a:r>
+              <a:rPr lang="en-IE" sz="1500" b="1"/>
+              <a:t>Argument: </a:t>
+            </a:r>
+            <a:r>
+              <a:rPr lang="en-IE" sz="1500"/>
+              <a:t>The smaller the difference between SD and MCR on economics, the more likely RLPs increase their vote share.</a:t>
+            </a:r>
+          </a:p>
+          <a:p>
+            <a:r>
+              <a:rPr lang="en-IE" sz="1500" b="1"/>
+              <a:t>Interaction effect: RLPs positions may be related to SD-MCR distance.</a:t>
+            </a:r>
+          </a:p>
+        </p:txBody>
+      </p:sp>
+    </p:spTree>
+    <p:extLst>
+      <p:ext uri="{BB962C8B-B14F-4D97-AF65-F5344CB8AC3E}">
+        <p14:creationId xmlns:p14="http://schemas.microsoft.com/office/powerpoint/2010/main" val="4214789934"/>
+      </p:ext>
+    </p:extLst>
+  </p:cSld>
+  <p:clrMapOvr>
+    <a:masterClrMapping/>
+  </p:clrMapOvr>
+</p:sld>
+</file>
+
+<file path=ppt/slides/slide6.xml><?xml version="1.0" encoding="utf-8"?>
 <p:sld xmlns:a="http://schemas.openxmlformats.org/drawingml/2006/main" xmlns:r="http://schemas.openxmlformats.org/officeDocument/2006/relationships" xmlns:p="http://schemas.openxmlformats.org/presentationml/2006/main">
   <p:cSld>
     <p:spTree>
@@ -5545,7 +9243,7 @@
           <p:cNvPr id="2" name="Title 1">
             <a:extLst>
               <a:ext uri="{FF2B5EF4-FFF2-40B4-BE49-F238E27FC236}">
-                <a16:creationId xmlns:a16="http://schemas.microsoft.com/office/drawing/2014/main" id="{E41AA746-17DD-6318-5805-EAC8E9000DA4}"/>
+                <a16:creationId xmlns:a16="http://schemas.microsoft.com/office/drawing/2014/main" id="{5F30F0C3-2FE7-70DA-3774-99ABB816E4D7}"/>
               </a:ext>
             </a:extLst>
           </p:cNvPr>
@@ -5561,139 +9259,12 @@
           <a:bodyPr/>
           <a:lstStyle/>
           <a:p>
-            <a:r>
-              <a:rPr lang="en-IE" dirty="0"/>
-              <a:t>My extension - Theory</a:t>
-            </a:r>
-          </a:p>
-        </p:txBody>
-      </p:sp>
-      <p:sp>
-        <p:nvSpPr>
-          <p:cNvPr id="3" name="Content Placeholder 2">
-            <a:extLst>
-              <a:ext uri="{FF2B5EF4-FFF2-40B4-BE49-F238E27FC236}">
-                <a16:creationId xmlns:a16="http://schemas.microsoft.com/office/drawing/2014/main" id="{ADB2CDDA-ACA5-6BC2-18DB-72E3A581C60C}"/>
-              </a:ext>
-            </a:extLst>
-          </p:cNvPr>
-          <p:cNvSpPr>
-            <a:spLocks noGrp="1"/>
-          </p:cNvSpPr>
-          <p:nvPr>
-            <p:ph idx="1"/>
-          </p:nvPr>
-        </p:nvSpPr>
-        <p:spPr>
-          <a:xfrm>
-            <a:off x="419100" y="1825625"/>
-            <a:ext cx="11303000" cy="4351338"/>
-          </a:xfrm>
-        </p:spPr>
-        <p:txBody>
-          <a:bodyPr>
-            <a:normAutofit lnSpcReduction="10000"/>
-          </a:bodyPr>
-          <a:lstStyle/>
-          <a:p>
-            <a:r>
-              <a:rPr lang="en-IE" dirty="0"/>
-              <a:t>Core point of the paper is competition with SDs and (occasionally) alternative Lib-Left parties.</a:t>
-            </a:r>
-          </a:p>
-          <a:p>
-            <a:r>
-              <a:rPr lang="en-IE" b="1" dirty="0"/>
-              <a:t>Third-way moderation:</a:t>
-            </a:r>
-          </a:p>
-          <a:p>
-            <a:pPr lvl="1"/>
-            <a:r>
-              <a:rPr lang="en-IE" dirty="0"/>
-              <a:t>Lit on SDs suggests that Third-way moderation and austerity participation hurt SDs.</a:t>
-            </a:r>
-          </a:p>
-          <a:p>
-            <a:pPr lvl="1"/>
-            <a:r>
-              <a:rPr lang="en-IE" dirty="0"/>
-              <a:t>In-part this involved blurring the lines between them and Main Centre-right party.</a:t>
-            </a:r>
-          </a:p>
-          <a:p>
-            <a:r>
-              <a:rPr lang="en-IE" dirty="0"/>
-              <a:t>Theoretically this should benefit alternative economic issue owners – RLPs.</a:t>
-            </a:r>
-          </a:p>
-          <a:p>
-            <a:r>
-              <a:rPr lang="en-IE" b="1" dirty="0"/>
-              <a:t>Argument: </a:t>
-            </a:r>
-            <a:r>
-              <a:rPr lang="en-IE" dirty="0"/>
-              <a:t>The smaller the difference between SD and MCR on economics, the more likely RLPs increase their vote share.</a:t>
-            </a:r>
-            <a:endParaRPr lang="en-IE" b="1" dirty="0"/>
-          </a:p>
-        </p:txBody>
-      </p:sp>
-    </p:spTree>
-    <p:extLst>
-      <p:ext uri="{BB962C8B-B14F-4D97-AF65-F5344CB8AC3E}">
-        <p14:creationId xmlns:p14="http://schemas.microsoft.com/office/powerpoint/2010/main" val="4214789934"/>
-      </p:ext>
-    </p:extLst>
-  </p:cSld>
-  <p:clrMapOvr>
-    <a:masterClrMapping/>
-  </p:clrMapOvr>
-</p:sld>
-</file>
-
-<file path=ppt/slides/slide4.xml><?xml version="1.0" encoding="utf-8"?>
-<p:sld xmlns:a="http://schemas.openxmlformats.org/drawingml/2006/main" xmlns:r="http://schemas.openxmlformats.org/officeDocument/2006/relationships" xmlns:p="http://schemas.openxmlformats.org/presentationml/2006/main">
-  <p:cSld>
-    <p:spTree>
-      <p:nvGrpSpPr>
-        <p:cNvPr id="1" name=""/>
-        <p:cNvGrpSpPr/>
-        <p:nvPr/>
-      </p:nvGrpSpPr>
-      <p:grpSpPr>
-        <a:xfrm>
-          <a:off x="0" y="0"/>
-          <a:ext cx="0" cy="0"/>
-          <a:chOff x="0" y="0"/>
-          <a:chExt cx="0" cy="0"/>
-        </a:xfrm>
-      </p:grpSpPr>
-      <p:sp>
-        <p:nvSpPr>
-          <p:cNvPr id="2" name="Title 1">
-            <a:extLst>
-              <a:ext uri="{FF2B5EF4-FFF2-40B4-BE49-F238E27FC236}">
-                <a16:creationId xmlns:a16="http://schemas.microsoft.com/office/drawing/2014/main" id="{5F30F0C3-2FE7-70DA-3774-99ABB816E4D7}"/>
-              </a:ext>
-            </a:extLst>
-          </p:cNvPr>
-          <p:cNvSpPr>
-            <a:spLocks noGrp="1"/>
-          </p:cNvSpPr>
-          <p:nvPr>
-            <p:ph type="title"/>
-          </p:nvPr>
-        </p:nvSpPr>
-        <p:spPr/>
-        <p:txBody>
-          <a:bodyPr/>
-          <a:lstStyle/>
-          <a:p>
             <a:pPr algn="ctr"/>
             <a:r>
-              <a:rPr lang="en-IE" b="1" dirty="0"/>
+              <a:rPr lang="en-IE" b="1" dirty="0">
+                <a:latin typeface="Verdana" panose="020B0604030504040204" pitchFamily="34" charset="0"/>
+                <a:ea typeface="Verdana" panose="020B0604030504040204" pitchFamily="34" charset="0"/>
+              </a:rPr>
               <a:t>Examples</a:t>
             </a:r>
           </a:p>
@@ -7702,9 +11273,702 @@
 </p:sld>
 </file>
 
-<file path=ppt/slides/slide5.xml><?xml version="1.0" encoding="utf-8"?>
+<file path=ppt/slides/slide7.xml><?xml version="1.0" encoding="utf-8"?>
 <p:sld xmlns:a="http://schemas.openxmlformats.org/drawingml/2006/main" xmlns:r="http://schemas.openxmlformats.org/officeDocument/2006/relationships" xmlns:p="http://schemas.openxmlformats.org/presentationml/2006/main">
   <p:cSld>
+    <p:bg>
+      <p:bgPr>
+        <a:solidFill>
+          <a:schemeClr val="bg1"/>
+        </a:solidFill>
+        <a:effectLst/>
+      </p:bgPr>
+    </p:bg>
+    <p:spTree>
+      <p:nvGrpSpPr>
+        <p:cNvPr id="1" name="">
+          <a:extLst>
+            <a:ext uri="{FF2B5EF4-FFF2-40B4-BE49-F238E27FC236}">
+              <a16:creationId xmlns:a16="http://schemas.microsoft.com/office/drawing/2014/main" id="{4710769A-B41E-EA6A-39FA-5F08AA7D1DA8}"/>
+            </a:ext>
+          </a:extLst>
+        </p:cNvPr>
+        <p:cNvGrpSpPr/>
+        <p:nvPr/>
+      </p:nvGrpSpPr>
+      <p:grpSpPr>
+        <a:xfrm>
+          <a:off x="0" y="0"/>
+          <a:ext cx="0" cy="0"/>
+          <a:chOff x="0" y="0"/>
+          <a:chExt cx="0" cy="0"/>
+        </a:xfrm>
+      </p:grpSpPr>
+      <p:sp useBgFill="1">
+        <p:nvSpPr>
+          <p:cNvPr id="10" name="Rectangle 9">
+            <a:extLst>
+              <a:ext uri="{FF2B5EF4-FFF2-40B4-BE49-F238E27FC236}">
+                <a16:creationId xmlns:a16="http://schemas.microsoft.com/office/drawing/2014/main" id="{BB223A01-2FF7-C280-B5F4-C903A4DF8C0F}"/>
+              </a:ext>
+              <a:ext uri="{C183D7F6-B498-43B3-948B-1728B52AA6E4}">
+                <adec:decorative xmlns:adec="http://schemas.microsoft.com/office/drawing/2017/decorative" val="1"/>
+              </a:ext>
+            </a:extLst>
+          </p:cNvPr>
+          <p:cNvSpPr>
+            <a:spLocks noGrp="1" noRot="1" noChangeAspect="1" noMove="1" noResize="1" noEditPoints="1" noAdjustHandles="1" noChangeArrowheads="1" noChangeShapeType="1" noTextEdit="1"/>
+          </p:cNvSpPr>
+          <p:nvPr>
+            <p:extLst>
+              <p:ext uri="{386F3935-93C4-4BCD-93E2-E3B085C9AB24}">
+                <p16:designElem xmlns:p16="http://schemas.microsoft.com/office/powerpoint/2015/main" val="1"/>
+              </p:ext>
+            </p:extLst>
+          </p:nvPr>
+        </p:nvSpPr>
+        <p:spPr>
+          <a:xfrm>
+            <a:off x="0" y="0"/>
+            <a:ext cx="12191999" cy="6857365"/>
+          </a:xfrm>
+          <a:prstGeom prst="rect">
+            <a:avLst/>
+          </a:prstGeom>
+          <a:ln>
+            <a:noFill/>
+          </a:ln>
+        </p:spPr>
+        <p:style>
+          <a:lnRef idx="2">
+            <a:schemeClr val="accent1">
+              <a:shade val="50000"/>
+            </a:schemeClr>
+          </a:lnRef>
+          <a:fillRef idx="1">
+            <a:schemeClr val="accent1"/>
+          </a:fillRef>
+          <a:effectRef idx="0">
+            <a:schemeClr val="accent1"/>
+          </a:effectRef>
+          <a:fontRef idx="minor">
+            <a:schemeClr val="lt1"/>
+          </a:fontRef>
+        </p:style>
+        <p:txBody>
+          <a:bodyPr rtlCol="0" anchor="ctr"/>
+          <a:lstStyle/>
+          <a:p>
+            <a:pPr algn="ctr"/>
+            <a:endParaRPr lang="en-US"/>
+          </a:p>
+        </p:txBody>
+      </p:sp>
+      <p:sp>
+        <p:nvSpPr>
+          <p:cNvPr id="2" name="Title 1">
+            <a:extLst>
+              <a:ext uri="{FF2B5EF4-FFF2-40B4-BE49-F238E27FC236}">
+                <a16:creationId xmlns:a16="http://schemas.microsoft.com/office/drawing/2014/main" id="{EC06435F-0E97-88F3-0826-655409FBB445}"/>
+              </a:ext>
+            </a:extLst>
+          </p:cNvPr>
+          <p:cNvSpPr>
+            <a:spLocks noGrp="1"/>
+          </p:cNvSpPr>
+          <p:nvPr>
+            <p:ph type="title"/>
+          </p:nvPr>
+        </p:nvSpPr>
+        <p:spPr>
+          <a:xfrm>
+            <a:off x="589560" y="856180"/>
+            <a:ext cx="4560584" cy="1128068"/>
+          </a:xfrm>
+        </p:spPr>
+        <p:txBody>
+          <a:bodyPr anchor="ctr">
+            <a:normAutofit/>
+          </a:bodyPr>
+          <a:lstStyle/>
+          <a:p>
+            <a:r>
+              <a:rPr lang="en-GB" sz="3600" b="1" dirty="0">
+                <a:latin typeface="Verdana" panose="020B0604030504040204" pitchFamily="34" charset="0"/>
+                <a:ea typeface="Verdana" panose="020B0604030504040204" pitchFamily="34" charset="0"/>
+              </a:rPr>
+              <a:t>M</a:t>
+            </a:r>
+            <a:r>
+              <a:rPr lang="en-IE" sz="3600" b="1" dirty="0" err="1">
+                <a:latin typeface="Verdana" panose="020B0604030504040204" pitchFamily="34" charset="0"/>
+                <a:ea typeface="Verdana" panose="020B0604030504040204" pitchFamily="34" charset="0"/>
+              </a:rPr>
+              <a:t>anifesto</a:t>
+            </a:r>
+            <a:r>
+              <a:rPr lang="en-IE" sz="3600" b="1" dirty="0">
+                <a:latin typeface="Verdana" panose="020B0604030504040204" pitchFamily="34" charset="0"/>
+                <a:ea typeface="Verdana" panose="020B0604030504040204" pitchFamily="34" charset="0"/>
+              </a:rPr>
+              <a:t> positions</a:t>
+            </a:r>
+            <a:endParaRPr lang="en-IE" sz="3400" b="1" dirty="0">
+              <a:latin typeface="Verdana" panose="020B0604030504040204" pitchFamily="34" charset="0"/>
+              <a:ea typeface="Verdana" panose="020B0604030504040204" pitchFamily="34" charset="0"/>
+            </a:endParaRPr>
+          </a:p>
+        </p:txBody>
+      </p:sp>
+      <p:grpSp>
+        <p:nvGrpSpPr>
+          <p:cNvPr id="12" name="Group 11">
+            <a:extLst>
+              <a:ext uri="{FF2B5EF4-FFF2-40B4-BE49-F238E27FC236}">
+                <a16:creationId xmlns:a16="http://schemas.microsoft.com/office/drawing/2014/main" id="{37A2308D-D741-2CD2-9007-B072C4DC071B}"/>
+              </a:ext>
+              <a:ext uri="{C183D7F6-B498-43B3-948B-1728B52AA6E4}">
+                <adec:decorative xmlns:adec="http://schemas.microsoft.com/office/drawing/2017/decorative" val="1"/>
+              </a:ext>
+            </a:extLst>
+          </p:cNvPr>
+          <p:cNvGrpSpPr>
+            <a:grpSpLocks noGrp="1" noUngrp="1" noRot="1" noChangeAspect="1" noMove="1" noResize="1"/>
+          </p:cNvGrpSpPr>
+          <p:nvPr>
+            <p:extLst>
+              <p:ext uri="{386F3935-93C4-4BCD-93E2-E3B085C9AB24}">
+                <p16:designElem xmlns:p16="http://schemas.microsoft.com/office/powerpoint/2015/main" val="1"/>
+              </p:ext>
+            </p:extLst>
+          </p:nvPr>
+        </p:nvGrpSpPr>
+        <p:grpSpPr>
+          <a:xfrm>
+            <a:off x="0" y="1083484"/>
+            <a:ext cx="355196" cy="673460"/>
+            <a:chOff x="0" y="823811"/>
+            <a:chExt cx="355196" cy="673460"/>
+          </a:xfrm>
+        </p:grpSpPr>
+        <p:sp>
+          <p:nvSpPr>
+            <p:cNvPr id="13" name="Rectangle 12">
+              <a:extLst>
+                <a:ext uri="{FF2B5EF4-FFF2-40B4-BE49-F238E27FC236}">
+                  <a16:creationId xmlns:a16="http://schemas.microsoft.com/office/drawing/2014/main" id="{94C79DCF-8FAA-49C2-D6F4-B49FAE93415F}"/>
+                </a:ext>
+                <a:ext uri="{C183D7F6-B498-43B3-948B-1728B52AA6E4}">
+                  <adec:decorative xmlns:adec="http://schemas.microsoft.com/office/drawing/2017/decorative" val="1"/>
+                </a:ext>
+              </a:extLst>
+            </p:cNvPr>
+            <p:cNvSpPr/>
+            <p:nvPr>
+              <p:extLst>
+                <p:ext uri="{386F3935-93C4-4BCD-93E2-E3B085C9AB24}">
+                  <p16:designElem xmlns:p16="http://schemas.microsoft.com/office/powerpoint/2015/main" val="1"/>
+                </p:ext>
+              </p:extLst>
+            </p:nvPr>
+          </p:nvSpPr>
+          <p:spPr>
+            <a:xfrm>
+              <a:off x="0" y="823811"/>
+              <a:ext cx="87363" cy="673460"/>
+            </a:xfrm>
+            <a:prstGeom prst="rect">
+              <a:avLst/>
+            </a:prstGeom>
+            <a:solidFill>
+              <a:schemeClr val="accent4"/>
+            </a:solidFill>
+            <a:ln>
+              <a:noFill/>
+            </a:ln>
+          </p:spPr>
+          <p:style>
+            <a:lnRef idx="2">
+              <a:schemeClr val="accent1">
+                <a:shade val="50000"/>
+              </a:schemeClr>
+            </a:lnRef>
+            <a:fillRef idx="1">
+              <a:schemeClr val="accent1"/>
+            </a:fillRef>
+            <a:effectRef idx="0">
+              <a:schemeClr val="accent1"/>
+            </a:effectRef>
+            <a:fontRef idx="minor">
+              <a:schemeClr val="lt1"/>
+            </a:fontRef>
+          </p:style>
+          <p:txBody>
+            <a:bodyPr rtlCol="0" anchor="ctr"/>
+            <a:lstStyle/>
+            <a:p>
+              <a:pPr algn="ctr"/>
+              <a:endParaRPr lang="en-US"/>
+            </a:p>
+          </p:txBody>
+        </p:sp>
+        <p:sp>
+          <p:nvSpPr>
+            <p:cNvPr id="14" name="Rectangle 13">
+              <a:extLst>
+                <a:ext uri="{FF2B5EF4-FFF2-40B4-BE49-F238E27FC236}">
+                  <a16:creationId xmlns:a16="http://schemas.microsoft.com/office/drawing/2014/main" id="{274D237D-2587-D1BF-F30F-20D5BFA74518}"/>
+                </a:ext>
+                <a:ext uri="{C183D7F6-B498-43B3-948B-1728B52AA6E4}">
+                  <adec:decorative xmlns:adec="http://schemas.microsoft.com/office/drawing/2017/decorative" val="1"/>
+                </a:ext>
+              </a:extLst>
+            </p:cNvPr>
+            <p:cNvSpPr/>
+            <p:nvPr>
+              <p:extLst>
+                <p:ext uri="{386F3935-93C4-4BCD-93E2-E3B085C9AB24}">
+                  <p16:designElem xmlns:p16="http://schemas.microsoft.com/office/powerpoint/2015/main" val="1"/>
+                </p:ext>
+              </p:extLst>
+            </p:nvPr>
+          </p:nvSpPr>
+          <p:spPr>
+            <a:xfrm>
+              <a:off x="159341" y="823811"/>
+              <a:ext cx="195855" cy="673460"/>
+            </a:xfrm>
+            <a:prstGeom prst="rect">
+              <a:avLst/>
+            </a:prstGeom>
+            <a:solidFill>
+              <a:schemeClr val="accent4"/>
+            </a:solidFill>
+            <a:ln>
+              <a:noFill/>
+            </a:ln>
+          </p:spPr>
+          <p:style>
+            <a:lnRef idx="2">
+              <a:schemeClr val="accent1">
+                <a:shade val="50000"/>
+              </a:schemeClr>
+            </a:lnRef>
+            <a:fillRef idx="1">
+              <a:schemeClr val="accent1"/>
+            </a:fillRef>
+            <a:effectRef idx="0">
+              <a:schemeClr val="accent1"/>
+            </a:effectRef>
+            <a:fontRef idx="minor">
+              <a:schemeClr val="lt1"/>
+            </a:fontRef>
+          </p:style>
+          <p:txBody>
+            <a:bodyPr rtlCol="0" anchor="ctr"/>
+            <a:lstStyle/>
+            <a:p>
+              <a:pPr algn="ctr"/>
+              <a:endParaRPr lang="en-US"/>
+            </a:p>
+          </p:txBody>
+        </p:sp>
+      </p:grpSp>
+      <p:sp>
+        <p:nvSpPr>
+          <p:cNvPr id="16" name="Rectangle 15">
+            <a:extLst>
+              <a:ext uri="{FF2B5EF4-FFF2-40B4-BE49-F238E27FC236}">
+                <a16:creationId xmlns:a16="http://schemas.microsoft.com/office/drawing/2014/main" id="{5C88F099-85FE-7A66-24D5-399902BA8BE3}"/>
+              </a:ext>
+              <a:ext uri="{C183D7F6-B498-43B3-948B-1728B52AA6E4}">
+                <adec:decorative xmlns:adec="http://schemas.microsoft.com/office/drawing/2017/decorative" val="1"/>
+              </a:ext>
+            </a:extLst>
+          </p:cNvPr>
+          <p:cNvSpPr>
+            <a:spLocks noGrp="1" noRot="1" noChangeAspect="1" noMove="1" noResize="1" noEditPoints="1" noAdjustHandles="1" noChangeArrowheads="1" noChangeShapeType="1" noTextEdit="1"/>
+          </p:cNvSpPr>
+          <p:nvPr>
+            <p:extLst>
+              <p:ext uri="{386F3935-93C4-4BCD-93E2-E3B085C9AB24}">
+                <p16:designElem xmlns:p16="http://schemas.microsoft.com/office/powerpoint/2015/main" val="1"/>
+              </p:ext>
+            </p:extLst>
+          </p:nvPr>
+        </p:nvSpPr>
+        <p:spPr>
+          <a:xfrm flipH="1">
+            <a:off x="665085" y="2090569"/>
+            <a:ext cx="4297680" cy="27432"/>
+          </a:xfrm>
+          <a:prstGeom prst="rect">
+            <a:avLst/>
+          </a:prstGeom>
+          <a:solidFill>
+            <a:schemeClr val="accent4"/>
+          </a:solidFill>
+          <a:ln>
+            <a:noFill/>
+          </a:ln>
+        </p:spPr>
+        <p:style>
+          <a:lnRef idx="2">
+            <a:schemeClr val="accent1">
+              <a:shade val="50000"/>
+            </a:schemeClr>
+          </a:lnRef>
+          <a:fillRef idx="1">
+            <a:schemeClr val="accent1"/>
+          </a:fillRef>
+          <a:effectRef idx="0">
+            <a:schemeClr val="accent1"/>
+          </a:effectRef>
+          <a:fontRef idx="minor">
+            <a:schemeClr val="lt1"/>
+          </a:fontRef>
+        </p:style>
+        <p:txBody>
+          <a:bodyPr rtlCol="0" anchor="ctr"/>
+          <a:lstStyle/>
+          <a:p>
+            <a:pPr algn="ctr"/>
+            <a:endParaRPr lang="en-US"/>
+          </a:p>
+        </p:txBody>
+      </p:sp>
+      <p:sp>
+        <p:nvSpPr>
+          <p:cNvPr id="3" name="Content Placeholder 2">
+            <a:extLst>
+              <a:ext uri="{FF2B5EF4-FFF2-40B4-BE49-F238E27FC236}">
+                <a16:creationId xmlns:a16="http://schemas.microsoft.com/office/drawing/2014/main" id="{83DF29DD-9391-E6AB-F2EE-28A8EF485B45}"/>
+              </a:ext>
+            </a:extLst>
+          </p:cNvPr>
+          <p:cNvSpPr>
+            <a:spLocks noGrp="1"/>
+          </p:cNvSpPr>
+          <p:nvPr>
+            <p:ph idx="1"/>
+          </p:nvPr>
+        </p:nvSpPr>
+        <p:spPr>
+          <a:xfrm>
+            <a:off x="590719" y="2330505"/>
+            <a:ext cx="4559425" cy="3979585"/>
+          </a:xfrm>
+        </p:spPr>
+        <p:txBody>
+          <a:bodyPr anchor="ctr">
+            <a:normAutofit lnSpcReduction="10000"/>
+          </a:bodyPr>
+          <a:lstStyle/>
+          <a:p>
+            <a:pPr marL="0" indent="0">
+              <a:buNone/>
+            </a:pPr>
+            <a:r>
+              <a:rPr lang="en-IE" sz="2000" b="1" dirty="0">
+                <a:latin typeface="Verdana" panose="020B0604030504040204" pitchFamily="34" charset="0"/>
+                <a:ea typeface="Verdana" panose="020B0604030504040204" pitchFamily="34" charset="0"/>
+              </a:rPr>
+              <a:t>Key methodological approach of the paper: </a:t>
+            </a:r>
+          </a:p>
+          <a:p>
+            <a:r>
+              <a:rPr lang="en-IE" sz="2000" dirty="0">
+                <a:latin typeface="Verdana" panose="020B0604030504040204" pitchFamily="34" charset="0"/>
+                <a:ea typeface="Verdana" panose="020B0604030504040204" pitchFamily="34" charset="0"/>
+              </a:rPr>
+              <a:t>Log transformed positioning variables –&gt; log ratio of position.</a:t>
+            </a:r>
+          </a:p>
+          <a:p>
+            <a:pPr marL="0" indent="0">
+              <a:buNone/>
+            </a:pPr>
+            <a:endParaRPr lang="en-IE" sz="2000" dirty="0">
+              <a:latin typeface="Verdana" panose="020B0604030504040204" pitchFamily="34" charset="0"/>
+              <a:ea typeface="Verdana" panose="020B0604030504040204" pitchFamily="34" charset="0"/>
+            </a:endParaRPr>
+          </a:p>
+          <a:p>
+            <a:pPr marL="0" indent="0">
+              <a:buNone/>
+            </a:pPr>
+            <a:r>
+              <a:rPr lang="en-IE" sz="2000" b="1" dirty="0">
+                <a:latin typeface="Verdana" panose="020B0604030504040204" pitchFamily="34" charset="0"/>
+                <a:ea typeface="Verdana" panose="020B0604030504040204" pitchFamily="34" charset="0"/>
+              </a:rPr>
+              <a:t>Why:</a:t>
+            </a:r>
+          </a:p>
+          <a:p>
+            <a:pPr marL="0" indent="0">
+              <a:buNone/>
+            </a:pPr>
+            <a:r>
+              <a:rPr lang="en-IE" sz="2000" dirty="0">
+                <a:latin typeface="Verdana" panose="020B0604030504040204" pitchFamily="34" charset="0"/>
+                <a:ea typeface="Verdana" panose="020B0604030504040204" pitchFamily="34" charset="0"/>
+              </a:rPr>
+              <a:t>Manifesto length can dilute true position.</a:t>
+            </a:r>
+          </a:p>
+          <a:p>
+            <a:pPr marL="0" indent="0">
+              <a:buNone/>
+            </a:pPr>
+            <a:r>
+              <a:rPr lang="en-IE" sz="2000" dirty="0">
+                <a:latin typeface="Verdana" panose="020B0604030504040204" pitchFamily="34" charset="0"/>
+                <a:ea typeface="Verdana" panose="020B0604030504040204" pitchFamily="34" charset="0"/>
+              </a:rPr>
+              <a:t>Accounting for marginal shifts in positions - shift from 1 -&gt; 6 </a:t>
+            </a:r>
+            <a:r>
+              <a:rPr lang="en-IE" sz="2000" dirty="0" err="1">
+                <a:latin typeface="Verdana" panose="020B0604030504040204" pitchFamily="34" charset="0"/>
+                <a:ea typeface="Verdana" panose="020B0604030504040204" pitchFamily="34" charset="0"/>
+              </a:rPr>
+              <a:t>relateively</a:t>
+            </a:r>
+            <a:r>
+              <a:rPr lang="en-IE" sz="2000" dirty="0">
+                <a:latin typeface="Verdana" panose="020B0604030504040204" pitchFamily="34" charset="0"/>
+                <a:ea typeface="Verdana" panose="020B0604030504040204" pitchFamily="34" charset="0"/>
+              </a:rPr>
+              <a:t> greater than 40 -&gt; 45.</a:t>
+            </a:r>
+          </a:p>
+        </p:txBody>
+      </p:sp>
+      <p:sp>
+        <p:nvSpPr>
+          <p:cNvPr id="18" name="Rectangle 17">
+            <a:extLst>
+              <a:ext uri="{FF2B5EF4-FFF2-40B4-BE49-F238E27FC236}">
+                <a16:creationId xmlns:a16="http://schemas.microsoft.com/office/drawing/2014/main" id="{1C6D6ECF-E48B-9C93-AB5F-990086560B86}"/>
+              </a:ext>
+              <a:ext uri="{C183D7F6-B498-43B3-948B-1728B52AA6E4}">
+                <adec:decorative xmlns:adec="http://schemas.microsoft.com/office/drawing/2017/decorative" val="1"/>
+              </a:ext>
+            </a:extLst>
+          </p:cNvPr>
+          <p:cNvSpPr>
+            <a:spLocks noGrp="1" noRot="1" noChangeAspect="1" noMove="1" noResize="1" noEditPoints="1" noAdjustHandles="1" noChangeArrowheads="1" noChangeShapeType="1" noTextEdit="1"/>
+          </p:cNvSpPr>
+          <p:nvPr>
+            <p:extLst>
+              <p:ext uri="{386F3935-93C4-4BCD-93E2-E3B085C9AB24}">
+                <p16:designElem xmlns:p16="http://schemas.microsoft.com/office/powerpoint/2015/main" val="1"/>
+              </p:ext>
+            </p:extLst>
+          </p:nvPr>
+        </p:nvSpPr>
+        <p:spPr>
+          <a:xfrm flipH="1">
+            <a:off x="10697670" y="0"/>
+            <a:ext cx="1494330" cy="6858000"/>
+          </a:xfrm>
+          <a:prstGeom prst="rect">
+            <a:avLst/>
+          </a:prstGeom>
+          <a:solidFill>
+            <a:schemeClr val="accent4"/>
+          </a:solidFill>
+          <a:ln>
+            <a:noFill/>
+          </a:ln>
+        </p:spPr>
+        <p:style>
+          <a:lnRef idx="2">
+            <a:schemeClr val="accent1">
+              <a:shade val="50000"/>
+            </a:schemeClr>
+          </a:lnRef>
+          <a:fillRef idx="1">
+            <a:schemeClr val="accent1"/>
+          </a:fillRef>
+          <a:effectRef idx="0">
+            <a:schemeClr val="accent1"/>
+          </a:effectRef>
+          <a:fontRef idx="minor">
+            <a:schemeClr val="lt1"/>
+          </a:fontRef>
+        </p:style>
+        <p:txBody>
+          <a:bodyPr rtlCol="0" anchor="ctr"/>
+          <a:lstStyle/>
+          <a:p>
+            <a:pPr algn="ctr"/>
+            <a:endParaRPr lang="en-US"/>
+          </a:p>
+        </p:txBody>
+      </p:sp>
+      <p:sp>
+        <p:nvSpPr>
+          <p:cNvPr id="20" name="Rectangle 19">
+            <a:extLst>
+              <a:ext uri="{FF2B5EF4-FFF2-40B4-BE49-F238E27FC236}">
+                <a16:creationId xmlns:a16="http://schemas.microsoft.com/office/drawing/2014/main" id="{24AE4C70-6191-408B-77C2-78851A1E6007}"/>
+              </a:ext>
+              <a:ext uri="{C183D7F6-B498-43B3-948B-1728B52AA6E4}">
+                <adec:decorative xmlns:adec="http://schemas.microsoft.com/office/drawing/2017/decorative" val="1"/>
+              </a:ext>
+            </a:extLst>
+          </p:cNvPr>
+          <p:cNvSpPr>
+            <a:spLocks noGrp="1" noRot="1" noChangeAspect="1" noMove="1" noResize="1" noEditPoints="1" noAdjustHandles="1" noChangeArrowheads="1" noChangeShapeType="1" noTextEdit="1"/>
+          </p:cNvSpPr>
+          <p:nvPr>
+            <p:extLst>
+              <p:ext uri="{386F3935-93C4-4BCD-93E2-E3B085C9AB24}">
+                <p16:designElem xmlns:p16="http://schemas.microsoft.com/office/powerpoint/2015/main" val="1"/>
+              </p:ext>
+            </p:extLst>
+          </p:nvPr>
+        </p:nvSpPr>
+        <p:spPr>
+          <a:xfrm>
+            <a:off x="5685810" y="513853"/>
+            <a:ext cx="6009366" cy="5834577"/>
+          </a:xfrm>
+          <a:prstGeom prst="rect">
+            <a:avLst/>
+          </a:prstGeom>
+          <a:solidFill>
+            <a:schemeClr val="bg1"/>
+          </a:solidFill>
+          <a:ln>
+            <a:noFill/>
+          </a:ln>
+          <a:effectLst>
+            <a:outerShdw blurRad="139700" dist="127000" dir="5400000" algn="t" rotWithShape="0">
+              <a:prstClr val="black">
+                <a:alpha val="15000"/>
+              </a:prstClr>
+            </a:outerShdw>
+          </a:effectLst>
+        </p:spPr>
+        <p:style>
+          <a:lnRef idx="2">
+            <a:schemeClr val="accent1">
+              <a:shade val="50000"/>
+            </a:schemeClr>
+          </a:lnRef>
+          <a:fillRef idx="1">
+            <a:schemeClr val="accent1"/>
+          </a:fillRef>
+          <a:effectRef idx="0">
+            <a:schemeClr val="accent1"/>
+          </a:effectRef>
+          <a:fontRef idx="minor">
+            <a:schemeClr val="lt1"/>
+          </a:fontRef>
+        </p:style>
+        <p:txBody>
+          <a:bodyPr rtlCol="0" anchor="ctr"/>
+          <a:lstStyle/>
+          <a:p>
+            <a:pPr algn="ctr"/>
+            <a:endParaRPr lang="en-US"/>
+          </a:p>
+        </p:txBody>
+      </p:sp>
+      <p:pic>
+        <p:nvPicPr>
+          <p:cNvPr id="4" name="Picture 3">
+            <a:extLst>
+              <a:ext uri="{FF2B5EF4-FFF2-40B4-BE49-F238E27FC236}">
+                <a16:creationId xmlns:a16="http://schemas.microsoft.com/office/drawing/2014/main" id="{41687E71-6FB7-7782-C74D-7118F1F957BB}"/>
+              </a:ext>
+            </a:extLst>
+          </p:cNvPr>
+          <p:cNvPicPr>
+            <a:picLocks noChangeAspect="1"/>
+          </p:cNvPicPr>
+          <p:nvPr/>
+        </p:nvPicPr>
+        <p:blipFill>
+          <a:blip r:embed="rId2"/>
+          <a:srcRect l="9563" r="39667" b="38603"/>
+          <a:stretch>
+            <a:fillRect/>
+          </a:stretch>
+        </p:blipFill>
+        <p:spPr>
+          <a:xfrm>
+            <a:off x="6706245" y="2330505"/>
+            <a:ext cx="3968496" cy="1715255"/>
+          </a:xfrm>
+          <a:prstGeom prst="rect">
+            <a:avLst/>
+          </a:prstGeom>
+        </p:spPr>
+      </p:pic>
+      <p:sp>
+        <p:nvSpPr>
+          <p:cNvPr id="7" name="TextBox 6">
+            <a:extLst>
+              <a:ext uri="{FF2B5EF4-FFF2-40B4-BE49-F238E27FC236}">
+                <a16:creationId xmlns:a16="http://schemas.microsoft.com/office/drawing/2014/main" id="{C5D975A9-0AE5-8777-CC8D-725776B51E87}"/>
+              </a:ext>
+            </a:extLst>
+          </p:cNvPr>
+          <p:cNvSpPr txBox="1"/>
+          <p:nvPr/>
+        </p:nvSpPr>
+        <p:spPr>
+          <a:xfrm>
+            <a:off x="9064724" y="5593059"/>
+            <a:ext cx="2194559" cy="369332"/>
+          </a:xfrm>
+          <a:prstGeom prst="rect">
+            <a:avLst/>
+          </a:prstGeom>
+          <a:noFill/>
+        </p:spPr>
+        <p:txBody>
+          <a:bodyPr wrap="square">
+            <a:spAutoFit/>
+          </a:bodyPr>
+          <a:lstStyle/>
+          <a:p>
+            <a:r>
+              <a:rPr lang="en-IE" dirty="0"/>
+              <a:t>(Lowe et al., 2011)</a:t>
+            </a:r>
+          </a:p>
+        </p:txBody>
+      </p:sp>
+    </p:spTree>
+    <p:extLst>
+      <p:ext uri="{BB962C8B-B14F-4D97-AF65-F5344CB8AC3E}">
+        <p14:creationId xmlns:p14="http://schemas.microsoft.com/office/powerpoint/2010/main" val="1171554105"/>
+      </p:ext>
+    </p:extLst>
+  </p:cSld>
+  <p:clrMapOvr>
+    <a:masterClrMapping/>
+  </p:clrMapOvr>
+</p:sld>
+</file>
+
+<file path=ppt/slides/slide8.xml><?xml version="1.0" encoding="utf-8"?>
+<p:sld xmlns:a="http://schemas.openxmlformats.org/drawingml/2006/main" xmlns:r="http://schemas.openxmlformats.org/officeDocument/2006/relationships" xmlns:p="http://schemas.openxmlformats.org/presentationml/2006/main">
+  <p:cSld>
+    <p:bg>
+      <p:bgPr>
+        <a:solidFill>
+          <a:schemeClr val="bg1"/>
+        </a:solidFill>
+        <a:effectLst/>
+      </p:bgPr>
+    </p:bg>
     <p:spTree>
       <p:nvGrpSpPr>
         <p:cNvPr id="1" name=""/>
@@ -7719,12 +11983,72 @@
           <a:chExt cx="0" cy="0"/>
         </a:xfrm>
       </p:grpSpPr>
+      <p:sp useBgFill="1">
+        <p:nvSpPr>
+          <p:cNvPr id="11" name="Rectangle 10">
+            <a:extLst>
+              <a:ext uri="{FF2B5EF4-FFF2-40B4-BE49-F238E27FC236}">
+                <a16:creationId xmlns:a16="http://schemas.microsoft.com/office/drawing/2014/main" id="{201CC55D-ED54-4C5C-95E6-10947BD1103B}"/>
+              </a:ext>
+              <a:ext uri="{C183D7F6-B498-43B3-948B-1728B52AA6E4}">
+                <adec:decorative xmlns:adec="http://schemas.microsoft.com/office/drawing/2017/decorative" val="1"/>
+              </a:ext>
+            </a:extLst>
+          </p:cNvPr>
+          <p:cNvSpPr>
+            <a:spLocks noGrp="1" noRot="1" noChangeAspect="1" noMove="1" noResize="1" noEditPoints="1" noAdjustHandles="1" noChangeArrowheads="1" noChangeShapeType="1" noTextEdit="1"/>
+          </p:cNvSpPr>
+          <p:nvPr>
+            <p:extLst>
+              <p:ext uri="{386F3935-93C4-4BCD-93E2-E3B085C9AB24}">
+                <p16:designElem xmlns:p16="http://schemas.microsoft.com/office/powerpoint/2015/main" val="1"/>
+              </p:ext>
+            </p:extLst>
+          </p:nvPr>
+        </p:nvSpPr>
+        <p:spPr>
+          <a:xfrm>
+            <a:off x="0" y="0"/>
+            <a:ext cx="12191999" cy="6857365"/>
+          </a:xfrm>
+          <a:prstGeom prst="rect">
+            <a:avLst/>
+          </a:prstGeom>
+          <a:ln>
+            <a:noFill/>
+          </a:ln>
+        </p:spPr>
+        <p:style>
+          <a:lnRef idx="2">
+            <a:schemeClr val="accent1">
+              <a:shade val="50000"/>
+            </a:schemeClr>
+          </a:lnRef>
+          <a:fillRef idx="1">
+            <a:schemeClr val="accent1"/>
+          </a:fillRef>
+          <a:effectRef idx="0">
+            <a:schemeClr val="accent1"/>
+          </a:effectRef>
+          <a:fontRef idx="minor">
+            <a:schemeClr val="lt1"/>
+          </a:fontRef>
+        </p:style>
+        <p:txBody>
+          <a:bodyPr rtlCol="0" anchor="ctr"/>
+          <a:lstStyle/>
+          <a:p>
+            <a:pPr algn="ctr"/>
+            <a:endParaRPr lang="en-US"/>
+          </a:p>
+        </p:txBody>
+      </p:sp>
       <p:sp>
         <p:nvSpPr>
           <p:cNvPr id="2" name="Title 1">
             <a:extLst>
               <a:ext uri="{FF2B5EF4-FFF2-40B4-BE49-F238E27FC236}">
-                <a16:creationId xmlns:a16="http://schemas.microsoft.com/office/drawing/2014/main" id="{382287B3-9A51-08AA-CB59-D31A805961B5}"/>
+                <a16:creationId xmlns:a16="http://schemas.microsoft.com/office/drawing/2014/main" id="{9296E94D-D02E-6B52-F16E-D55B1AAE1914}"/>
               </a:ext>
             </a:extLst>
           </p:cNvPr>
@@ -7737,28 +12061,240 @@
         </p:nvSpPr>
         <p:spPr>
           <a:xfrm>
-            <a:off x="838200" y="365125"/>
-            <a:ext cx="10515600" cy="1325563"/>
+            <a:off x="589560" y="856180"/>
+            <a:ext cx="4560584" cy="1128068"/>
           </a:xfrm>
         </p:spPr>
         <p:txBody>
-          <a:bodyPr>
+          <a:bodyPr anchor="ctr">
             <a:normAutofit/>
           </a:bodyPr>
           <a:lstStyle/>
           <a:p>
             <a:r>
-              <a:rPr lang="en-GB" sz="4000" dirty="0"/>
-              <a:t>M</a:t>
-            </a:r>
-            <a:r>
-              <a:rPr lang="en-IE" sz="4000" dirty="0" err="1"/>
-              <a:t>anifesto</a:t>
-            </a:r>
-            <a:r>
-              <a:rPr lang="en-IE" sz="4000" dirty="0"/>
-              <a:t> positions need to be log transformed</a:t>
-            </a:r>
+              <a:rPr lang="en-IE" sz="2500" b="1">
+                <a:latin typeface="Verdana" panose="020B0604030504040204" pitchFamily="34" charset="0"/>
+                <a:ea typeface="Verdana" panose="020B0604030504040204" pitchFamily="34" charset="0"/>
+              </a:rPr>
+              <a:t>Replication part 1: mapping RLP positions</a:t>
+            </a:r>
+          </a:p>
+        </p:txBody>
+      </p:sp>
+      <p:grpSp>
+        <p:nvGrpSpPr>
+          <p:cNvPr id="13" name="Group 12">
+            <a:extLst>
+              <a:ext uri="{FF2B5EF4-FFF2-40B4-BE49-F238E27FC236}">
+                <a16:creationId xmlns:a16="http://schemas.microsoft.com/office/drawing/2014/main" id="{1DE889C7-FAD6-4397-98E2-05D503484459}"/>
+              </a:ext>
+              <a:ext uri="{C183D7F6-B498-43B3-948B-1728B52AA6E4}">
+                <adec:decorative xmlns:adec="http://schemas.microsoft.com/office/drawing/2017/decorative" val="1"/>
+              </a:ext>
+            </a:extLst>
+          </p:cNvPr>
+          <p:cNvGrpSpPr>
+            <a:grpSpLocks noGrp="1" noUngrp="1" noRot="1" noChangeAspect="1" noMove="1" noResize="1"/>
+          </p:cNvGrpSpPr>
+          <p:nvPr>
+            <p:extLst>
+              <p:ext uri="{386F3935-93C4-4BCD-93E2-E3B085C9AB24}">
+                <p16:designElem xmlns:p16="http://schemas.microsoft.com/office/powerpoint/2015/main" val="1"/>
+              </p:ext>
+            </p:extLst>
+          </p:nvPr>
+        </p:nvGrpSpPr>
+        <p:grpSpPr>
+          <a:xfrm>
+            <a:off x="0" y="1083484"/>
+            <a:ext cx="355196" cy="673460"/>
+            <a:chOff x="0" y="823811"/>
+            <a:chExt cx="355196" cy="673460"/>
+          </a:xfrm>
+        </p:grpSpPr>
+        <p:sp>
+          <p:nvSpPr>
+            <p:cNvPr id="14" name="Rectangle 13">
+              <a:extLst>
+                <a:ext uri="{FF2B5EF4-FFF2-40B4-BE49-F238E27FC236}">
+                  <a16:creationId xmlns:a16="http://schemas.microsoft.com/office/drawing/2014/main" id="{F399A70F-F8CD-4992-9EF5-6CF15472E73F}"/>
+                </a:ext>
+                <a:ext uri="{C183D7F6-B498-43B3-948B-1728B52AA6E4}">
+                  <adec:decorative xmlns:adec="http://schemas.microsoft.com/office/drawing/2017/decorative" val="1"/>
+                </a:ext>
+              </a:extLst>
+            </p:cNvPr>
+            <p:cNvSpPr/>
+            <p:nvPr>
+              <p:extLst>
+                <p:ext uri="{386F3935-93C4-4BCD-93E2-E3B085C9AB24}">
+                  <p16:designElem xmlns:p16="http://schemas.microsoft.com/office/powerpoint/2015/main" val="1"/>
+                </p:ext>
+              </p:extLst>
+            </p:nvPr>
+          </p:nvSpPr>
+          <p:spPr>
+            <a:xfrm>
+              <a:off x="0" y="823811"/>
+              <a:ext cx="87363" cy="673460"/>
+            </a:xfrm>
+            <a:prstGeom prst="rect">
+              <a:avLst/>
+            </a:prstGeom>
+            <a:solidFill>
+              <a:schemeClr val="accent4"/>
+            </a:solidFill>
+            <a:ln>
+              <a:noFill/>
+            </a:ln>
+          </p:spPr>
+          <p:style>
+            <a:lnRef idx="2">
+              <a:schemeClr val="accent1">
+                <a:shade val="50000"/>
+              </a:schemeClr>
+            </a:lnRef>
+            <a:fillRef idx="1">
+              <a:schemeClr val="accent1"/>
+            </a:fillRef>
+            <a:effectRef idx="0">
+              <a:schemeClr val="accent1"/>
+            </a:effectRef>
+            <a:fontRef idx="minor">
+              <a:schemeClr val="lt1"/>
+            </a:fontRef>
+          </p:style>
+          <p:txBody>
+            <a:bodyPr rtlCol="0" anchor="ctr"/>
+            <a:lstStyle/>
+            <a:p>
+              <a:pPr algn="ctr"/>
+              <a:endParaRPr lang="en-US"/>
+            </a:p>
+          </p:txBody>
+        </p:sp>
+        <p:sp>
+          <p:nvSpPr>
+            <p:cNvPr id="15" name="Rectangle 14">
+              <a:extLst>
+                <a:ext uri="{FF2B5EF4-FFF2-40B4-BE49-F238E27FC236}">
+                  <a16:creationId xmlns:a16="http://schemas.microsoft.com/office/drawing/2014/main" id="{48F4FEDC-6D80-458C-A665-075D9B9500FD}"/>
+                </a:ext>
+                <a:ext uri="{C183D7F6-B498-43B3-948B-1728B52AA6E4}">
+                  <adec:decorative xmlns:adec="http://schemas.microsoft.com/office/drawing/2017/decorative" val="1"/>
+                </a:ext>
+              </a:extLst>
+            </p:cNvPr>
+            <p:cNvSpPr/>
+            <p:nvPr>
+              <p:extLst>
+                <p:ext uri="{386F3935-93C4-4BCD-93E2-E3B085C9AB24}">
+                  <p16:designElem xmlns:p16="http://schemas.microsoft.com/office/powerpoint/2015/main" val="1"/>
+                </p:ext>
+              </p:extLst>
+            </p:nvPr>
+          </p:nvSpPr>
+          <p:spPr>
+            <a:xfrm>
+              <a:off x="159341" y="823811"/>
+              <a:ext cx="195855" cy="673460"/>
+            </a:xfrm>
+            <a:prstGeom prst="rect">
+              <a:avLst/>
+            </a:prstGeom>
+            <a:solidFill>
+              <a:schemeClr val="accent4"/>
+            </a:solidFill>
+            <a:ln>
+              <a:noFill/>
+            </a:ln>
+          </p:spPr>
+          <p:style>
+            <a:lnRef idx="2">
+              <a:schemeClr val="accent1">
+                <a:shade val="50000"/>
+              </a:schemeClr>
+            </a:lnRef>
+            <a:fillRef idx="1">
+              <a:schemeClr val="accent1"/>
+            </a:fillRef>
+            <a:effectRef idx="0">
+              <a:schemeClr val="accent1"/>
+            </a:effectRef>
+            <a:fontRef idx="minor">
+              <a:schemeClr val="lt1"/>
+            </a:fontRef>
+          </p:style>
+          <p:txBody>
+            <a:bodyPr rtlCol="0" anchor="ctr"/>
+            <a:lstStyle/>
+            <a:p>
+              <a:pPr algn="ctr"/>
+              <a:endParaRPr lang="en-US"/>
+            </a:p>
+          </p:txBody>
+        </p:sp>
+      </p:grpSp>
+      <p:sp>
+        <p:nvSpPr>
+          <p:cNvPr id="17" name="Rectangle 16">
+            <a:extLst>
+              <a:ext uri="{FF2B5EF4-FFF2-40B4-BE49-F238E27FC236}">
+                <a16:creationId xmlns:a16="http://schemas.microsoft.com/office/drawing/2014/main" id="{3873B707-463F-40B0-8227-E8CC6C67EB25}"/>
+              </a:ext>
+              <a:ext uri="{C183D7F6-B498-43B3-948B-1728B52AA6E4}">
+                <adec:decorative xmlns:adec="http://schemas.microsoft.com/office/drawing/2017/decorative" val="1"/>
+              </a:ext>
+            </a:extLst>
+          </p:cNvPr>
+          <p:cNvSpPr>
+            <a:spLocks noGrp="1" noRot="1" noChangeAspect="1" noMove="1" noResize="1" noEditPoints="1" noAdjustHandles="1" noChangeArrowheads="1" noChangeShapeType="1" noTextEdit="1"/>
+          </p:cNvSpPr>
+          <p:nvPr>
+            <p:extLst>
+              <p:ext uri="{386F3935-93C4-4BCD-93E2-E3B085C9AB24}">
+                <p16:designElem xmlns:p16="http://schemas.microsoft.com/office/powerpoint/2015/main" val="1"/>
+              </p:ext>
+            </p:extLst>
+          </p:nvPr>
+        </p:nvSpPr>
+        <p:spPr>
+          <a:xfrm flipH="1">
+            <a:off x="665085" y="2090569"/>
+            <a:ext cx="4297680" cy="27432"/>
+          </a:xfrm>
+          <a:prstGeom prst="rect">
+            <a:avLst/>
+          </a:prstGeom>
+          <a:solidFill>
+            <a:schemeClr val="accent4"/>
+          </a:solidFill>
+          <a:ln>
+            <a:noFill/>
+          </a:ln>
+        </p:spPr>
+        <p:style>
+          <a:lnRef idx="2">
+            <a:schemeClr val="accent1">
+              <a:shade val="50000"/>
+            </a:schemeClr>
+          </a:lnRef>
+          <a:fillRef idx="1">
+            <a:schemeClr val="accent1"/>
+          </a:fillRef>
+          <a:effectRef idx="0">
+            <a:schemeClr val="accent1"/>
+          </a:effectRef>
+          <a:fontRef idx="minor">
+            <a:schemeClr val="lt1"/>
+          </a:fontRef>
+        </p:style>
+        <p:txBody>
+          <a:bodyPr rtlCol="0" anchor="ctr"/>
+          <a:lstStyle/>
+          <a:p>
+            <a:pPr algn="ctr"/>
+            <a:endParaRPr lang="en-US"/>
           </a:p>
         </p:txBody>
       </p:sp>
@@ -7767,7 +12303,7 @@
           <p:cNvPr id="3" name="Content Placeholder 2">
             <a:extLst>
               <a:ext uri="{FF2B5EF4-FFF2-40B4-BE49-F238E27FC236}">
-                <a16:creationId xmlns:a16="http://schemas.microsoft.com/office/drawing/2014/main" id="{6BA83EF5-088B-8C41-5C03-6D1B990B292E}"/>
+                <a16:creationId xmlns:a16="http://schemas.microsoft.com/office/drawing/2014/main" id="{7E86535F-5F4D-AEF0-F103-0CC49503357F}"/>
               </a:ext>
             </a:extLst>
           </p:cNvPr>
@@ -7778,30 +12314,170 @@
             <p:ph idx="1"/>
           </p:nvPr>
         </p:nvSpPr>
-        <p:spPr/>
+        <p:spPr>
+          <a:xfrm>
+            <a:off x="590719" y="2330505"/>
+            <a:ext cx="4559425" cy="3979585"/>
+          </a:xfrm>
+        </p:spPr>
         <p:txBody>
-          <a:bodyPr/>
+          <a:bodyPr anchor="ctr">
+            <a:normAutofit/>
+          </a:bodyPr>
           <a:lstStyle/>
           <a:p>
             <a:r>
-              <a:rPr lang="en-IE" dirty="0"/>
-              <a:t>Accounting for skewing in coding process do to quasi-sentences</a:t>
-            </a:r>
-          </a:p>
-          <a:p>
-            <a:r>
-              <a:rPr lang="en-IE" dirty="0"/>
-              <a:t>Accounting for marginal shifts in positions.</a:t>
-            </a:r>
+              <a:rPr lang="en-IE" sz="2000" dirty="0"/>
+              <a:t>RLPs skew to the left – expected</a:t>
+            </a:r>
+          </a:p>
+          <a:p>
+            <a:r>
+              <a:rPr lang="en-IE" sz="2000" dirty="0"/>
+              <a:t>More variance on non-economic</a:t>
+            </a:r>
+          </a:p>
+        </p:txBody>
+      </p:sp>
+      <p:sp>
+        <p:nvSpPr>
+          <p:cNvPr id="19" name="Rectangle 18">
+            <a:extLst>
+              <a:ext uri="{FF2B5EF4-FFF2-40B4-BE49-F238E27FC236}">
+                <a16:creationId xmlns:a16="http://schemas.microsoft.com/office/drawing/2014/main" id="{C13237C8-E62C-4F0D-A318-BD6FB6C2D138}"/>
+              </a:ext>
+              <a:ext uri="{C183D7F6-B498-43B3-948B-1728B52AA6E4}">
+                <adec:decorative xmlns:adec="http://schemas.microsoft.com/office/drawing/2017/decorative" val="1"/>
+              </a:ext>
+            </a:extLst>
+          </p:cNvPr>
+          <p:cNvSpPr>
+            <a:spLocks noGrp="1" noRot="1" noChangeAspect="1" noMove="1" noResize="1" noEditPoints="1" noAdjustHandles="1" noChangeArrowheads="1" noChangeShapeType="1" noTextEdit="1"/>
+          </p:cNvSpPr>
+          <p:nvPr>
+            <p:extLst>
+              <p:ext uri="{386F3935-93C4-4BCD-93E2-E3B085C9AB24}">
+                <p16:designElem xmlns:p16="http://schemas.microsoft.com/office/powerpoint/2015/main" val="1"/>
+              </p:ext>
+            </p:extLst>
+          </p:nvPr>
+        </p:nvSpPr>
+        <p:spPr>
+          <a:xfrm flipH="1">
+            <a:off x="10697670" y="0"/>
+            <a:ext cx="1494330" cy="6858000"/>
+          </a:xfrm>
+          <a:prstGeom prst="rect">
+            <a:avLst/>
+          </a:prstGeom>
+          <a:solidFill>
+            <a:schemeClr val="accent4"/>
+          </a:solidFill>
+          <a:ln>
+            <a:noFill/>
+          </a:ln>
+        </p:spPr>
+        <p:style>
+          <a:lnRef idx="2">
+            <a:schemeClr val="accent1">
+              <a:shade val="50000"/>
+            </a:schemeClr>
+          </a:lnRef>
+          <a:fillRef idx="1">
+            <a:schemeClr val="accent1"/>
+          </a:fillRef>
+          <a:effectRef idx="0">
+            <a:schemeClr val="accent1"/>
+          </a:effectRef>
+          <a:fontRef idx="minor">
+            <a:schemeClr val="lt1"/>
+          </a:fontRef>
+        </p:style>
+        <p:txBody>
+          <a:bodyPr rtlCol="0" anchor="ctr"/>
+          <a:lstStyle/>
+          <a:p>
+            <a:pPr algn="ctr"/>
+            <a:endParaRPr lang="en-US"/>
+          </a:p>
+        </p:txBody>
+      </p:sp>
+      <p:sp>
+        <p:nvSpPr>
+          <p:cNvPr id="21" name="Rectangle 20">
+            <a:extLst>
+              <a:ext uri="{FF2B5EF4-FFF2-40B4-BE49-F238E27FC236}">
+                <a16:creationId xmlns:a16="http://schemas.microsoft.com/office/drawing/2014/main" id="{19C9EAEA-39D0-4B0E-A0EB-51E7B26740B1}"/>
+              </a:ext>
+              <a:ext uri="{C183D7F6-B498-43B3-948B-1728B52AA6E4}">
+                <adec:decorative xmlns:adec="http://schemas.microsoft.com/office/drawing/2017/decorative" val="1"/>
+              </a:ext>
+            </a:extLst>
+          </p:cNvPr>
+          <p:cNvSpPr>
+            <a:spLocks noGrp="1" noRot="1" noChangeAspect="1" noMove="1" noResize="1" noEditPoints="1" noAdjustHandles="1" noChangeArrowheads="1" noChangeShapeType="1" noTextEdit="1"/>
+          </p:cNvSpPr>
+          <p:nvPr>
+            <p:extLst>
+              <p:ext uri="{386F3935-93C4-4BCD-93E2-E3B085C9AB24}">
+                <p16:designElem xmlns:p16="http://schemas.microsoft.com/office/powerpoint/2015/main" val="1"/>
+              </p:ext>
+            </p:extLst>
+          </p:nvPr>
+        </p:nvSpPr>
+        <p:spPr>
+          <a:xfrm>
+            <a:off x="5685810" y="513853"/>
+            <a:ext cx="6009366" cy="5834577"/>
+          </a:xfrm>
+          <a:prstGeom prst="rect">
+            <a:avLst/>
+          </a:prstGeom>
+          <a:solidFill>
+            <a:schemeClr val="bg1"/>
+          </a:solidFill>
+          <a:ln>
+            <a:noFill/>
+          </a:ln>
+          <a:effectLst>
+            <a:outerShdw blurRad="139700" dist="127000" dir="5400000" algn="t" rotWithShape="0">
+              <a:prstClr val="black">
+                <a:alpha val="15000"/>
+              </a:prstClr>
+            </a:outerShdw>
+          </a:effectLst>
+        </p:spPr>
+        <p:style>
+          <a:lnRef idx="2">
+            <a:schemeClr val="accent1">
+              <a:shade val="50000"/>
+            </a:schemeClr>
+          </a:lnRef>
+          <a:fillRef idx="1">
+            <a:schemeClr val="accent1"/>
+          </a:fillRef>
+          <a:effectRef idx="0">
+            <a:schemeClr val="accent1"/>
+          </a:effectRef>
+          <a:fontRef idx="minor">
+            <a:schemeClr val="lt1"/>
+          </a:fontRef>
+        </p:style>
+        <p:txBody>
+          <a:bodyPr rtlCol="0" anchor="ctr"/>
+          <a:lstStyle/>
+          <a:p>
+            <a:pPr algn="ctr"/>
+            <a:endParaRPr lang="en-US"/>
           </a:p>
         </p:txBody>
       </p:sp>
       <p:pic>
         <p:nvPicPr>
-          <p:cNvPr id="5" name="Picture 4">
-            <a:extLst>
-              <a:ext uri="{FF2B5EF4-FFF2-40B4-BE49-F238E27FC236}">
-                <a16:creationId xmlns:a16="http://schemas.microsoft.com/office/drawing/2014/main" id="{41687E71-6FB7-7782-C74D-7118F1F957BB}"/>
+          <p:cNvPr id="6" name="Picture 5">
+            <a:extLst>
+              <a:ext uri="{FF2B5EF4-FFF2-40B4-BE49-F238E27FC236}">
+                <a16:creationId xmlns:a16="http://schemas.microsoft.com/office/drawing/2014/main" id="{1EE4747E-3206-8553-F719-FDEC8797CA57}"/>
               </a:ext>
             </a:extLst>
           </p:cNvPr>
@@ -7811,160 +12487,16 @@
           <p:nvPr/>
         </p:nvPicPr>
         <p:blipFill>
-          <a:blip r:embed="rId2"/>
+          <a:blip r:embed="rId3"/>
+          <a:srcRect l="16744" r="29097" b="-1"/>
           <a:stretch>
             <a:fillRect/>
           </a:stretch>
         </p:blipFill>
         <p:spPr>
           <a:xfrm>
-            <a:off x="2262990" y="3114318"/>
-            <a:ext cx="7109380" cy="2562339"/>
-          </a:xfrm>
-          <a:prstGeom prst="rect">
-            <a:avLst/>
-          </a:prstGeom>
-        </p:spPr>
-      </p:pic>
-      <p:sp>
-        <p:nvSpPr>
-          <p:cNvPr id="7" name="TextBox 6">
-            <a:extLst>
-              <a:ext uri="{FF2B5EF4-FFF2-40B4-BE49-F238E27FC236}">
-                <a16:creationId xmlns:a16="http://schemas.microsoft.com/office/drawing/2014/main" id="{C5D975A9-0AE5-8777-CC8D-725776B51E87}"/>
-              </a:ext>
-            </a:extLst>
-          </p:cNvPr>
-          <p:cNvSpPr txBox="1"/>
-          <p:nvPr/>
-        </p:nvSpPr>
-        <p:spPr>
-          <a:xfrm>
-            <a:off x="2846832" y="5676657"/>
-            <a:ext cx="6096000" cy="369332"/>
-          </a:xfrm>
-          <a:prstGeom prst="rect">
-            <a:avLst/>
-          </a:prstGeom>
-          <a:noFill/>
-        </p:spPr>
-        <p:txBody>
-          <a:bodyPr wrap="square">
-            <a:spAutoFit/>
-          </a:bodyPr>
-          <a:lstStyle/>
-          <a:p>
-            <a:r>
-              <a:rPr lang="en-IE" dirty="0"/>
-              <a:t>(Lowe et al., 2011)</a:t>
-            </a:r>
-          </a:p>
-        </p:txBody>
-      </p:sp>
-    </p:spTree>
-    <p:extLst>
-      <p:ext uri="{BB962C8B-B14F-4D97-AF65-F5344CB8AC3E}">
-        <p14:creationId xmlns:p14="http://schemas.microsoft.com/office/powerpoint/2010/main" val="1484755537"/>
-      </p:ext>
-    </p:extLst>
-  </p:cSld>
-  <p:clrMapOvr>
-    <a:masterClrMapping/>
-  </p:clrMapOvr>
-</p:sld>
-</file>
-
-<file path=ppt/slides/slide6.xml><?xml version="1.0" encoding="utf-8"?>
-<p:sld xmlns:a="http://schemas.openxmlformats.org/drawingml/2006/main" xmlns:r="http://schemas.openxmlformats.org/officeDocument/2006/relationships" xmlns:p="http://schemas.openxmlformats.org/presentationml/2006/main">
-  <p:cSld>
-    <p:spTree>
-      <p:nvGrpSpPr>
-        <p:cNvPr id="1" name=""/>
-        <p:cNvGrpSpPr/>
-        <p:nvPr/>
-      </p:nvGrpSpPr>
-      <p:grpSpPr>
-        <a:xfrm>
-          <a:off x="0" y="0"/>
-          <a:ext cx="0" cy="0"/>
-          <a:chOff x="0" y="0"/>
-          <a:chExt cx="0" cy="0"/>
-        </a:xfrm>
-      </p:grpSpPr>
-      <p:sp>
-        <p:nvSpPr>
-          <p:cNvPr id="2" name="Title 1">
-            <a:extLst>
-              <a:ext uri="{FF2B5EF4-FFF2-40B4-BE49-F238E27FC236}">
-                <a16:creationId xmlns:a16="http://schemas.microsoft.com/office/drawing/2014/main" id="{9296E94D-D02E-6B52-F16E-D55B1AAE1914}"/>
-              </a:ext>
-            </a:extLst>
-          </p:cNvPr>
-          <p:cNvSpPr>
-            <a:spLocks noGrp="1"/>
-          </p:cNvSpPr>
-          <p:nvPr>
-            <p:ph type="title"/>
-          </p:nvPr>
-        </p:nvSpPr>
-        <p:spPr/>
-        <p:txBody>
-          <a:bodyPr/>
-          <a:lstStyle/>
-          <a:p>
-            <a:endParaRPr lang="en-IE"/>
-          </a:p>
-        </p:txBody>
-      </p:sp>
-      <p:sp>
-        <p:nvSpPr>
-          <p:cNvPr id="3" name="Content Placeholder 2">
-            <a:extLst>
-              <a:ext uri="{FF2B5EF4-FFF2-40B4-BE49-F238E27FC236}">
-                <a16:creationId xmlns:a16="http://schemas.microsoft.com/office/drawing/2014/main" id="{7E86535F-5F4D-AEF0-F103-0CC49503357F}"/>
-              </a:ext>
-            </a:extLst>
-          </p:cNvPr>
-          <p:cNvSpPr>
-            <a:spLocks noGrp="1"/>
-          </p:cNvSpPr>
-          <p:nvPr>
-            <p:ph idx="1"/>
-          </p:nvPr>
-        </p:nvSpPr>
-        <p:spPr/>
-        <p:txBody>
-          <a:bodyPr/>
-          <a:lstStyle/>
-          <a:p>
-            <a:endParaRPr lang="en-IE"/>
-          </a:p>
-        </p:txBody>
-      </p:sp>
-      <p:pic>
-        <p:nvPicPr>
-          <p:cNvPr id="5" name="Picture 4">
-            <a:extLst>
-              <a:ext uri="{FF2B5EF4-FFF2-40B4-BE49-F238E27FC236}">
-                <a16:creationId xmlns:a16="http://schemas.microsoft.com/office/drawing/2014/main" id="{9E2542F0-7FF2-6B17-1492-25CAC4D5C757}"/>
-              </a:ext>
-            </a:extLst>
-          </p:cNvPr>
-          <p:cNvPicPr>
-            <a:picLocks noChangeAspect="1"/>
-          </p:cNvPicPr>
-          <p:nvPr/>
-        </p:nvPicPr>
-        <p:blipFill>
-          <a:blip r:embed="rId2"/>
-          <a:stretch>
-            <a:fillRect/>
-          </a:stretch>
-        </p:blipFill>
-        <p:spPr>
-          <a:xfrm>
-            <a:off x="1688613" y="1027906"/>
-            <a:ext cx="8814774" cy="4649362"/>
+            <a:off x="5977788" y="799352"/>
+            <a:ext cx="5425410" cy="5259296"/>
           </a:xfrm>
           <a:prstGeom prst="rect">
             <a:avLst/>
@@ -7984,9 +12516,17 @@
 </p:sld>
 </file>
 
-<file path=ppt/slides/slide7.xml><?xml version="1.0" encoding="utf-8"?>
+<file path=ppt/slides/slide9.xml><?xml version="1.0" encoding="utf-8"?>
 <p:sld xmlns:a="http://schemas.openxmlformats.org/drawingml/2006/main" xmlns:r="http://schemas.openxmlformats.org/officeDocument/2006/relationships" xmlns:p="http://schemas.openxmlformats.org/presentationml/2006/main">
   <p:cSld>
+    <p:bg>
+      <p:bgPr>
+        <a:solidFill>
+          <a:schemeClr val="bg1"/>
+        </a:solidFill>
+        <a:effectLst/>
+      </p:bgPr>
+    </p:bg>
     <p:spTree>
       <p:nvGrpSpPr>
         <p:cNvPr id="1" name=""/>
@@ -8001,6 +12541,66 @@
           <a:chExt cx="0" cy="0"/>
         </a:xfrm>
       </p:grpSpPr>
+      <p:sp useBgFill="1">
+        <p:nvSpPr>
+          <p:cNvPr id="23" name="Rectangle 22">
+            <a:extLst>
+              <a:ext uri="{FF2B5EF4-FFF2-40B4-BE49-F238E27FC236}">
+                <a16:creationId xmlns:a16="http://schemas.microsoft.com/office/drawing/2014/main" id="{DBC6133C-0615-4CE4-9132-37E609A9BDFA}"/>
+              </a:ext>
+              <a:ext uri="{C183D7F6-B498-43B3-948B-1728B52AA6E4}">
+                <adec:decorative xmlns:adec="http://schemas.microsoft.com/office/drawing/2017/decorative" val="1"/>
+              </a:ext>
+            </a:extLst>
+          </p:cNvPr>
+          <p:cNvSpPr>
+            <a:spLocks noGrp="1" noRot="1" noChangeAspect="1" noMove="1" noResize="1" noEditPoints="1" noAdjustHandles="1" noChangeArrowheads="1" noChangeShapeType="1" noTextEdit="1"/>
+          </p:cNvSpPr>
+          <p:nvPr>
+            <p:extLst>
+              <p:ext uri="{386F3935-93C4-4BCD-93E2-E3B085C9AB24}">
+                <p16:designElem xmlns:p16="http://schemas.microsoft.com/office/powerpoint/2015/main" val="1"/>
+              </p:ext>
+            </p:extLst>
+          </p:nvPr>
+        </p:nvSpPr>
+        <p:spPr>
+          <a:xfrm>
+            <a:off x="0" y="0"/>
+            <a:ext cx="12191999" cy="6857365"/>
+          </a:xfrm>
+          <a:prstGeom prst="rect">
+            <a:avLst/>
+          </a:prstGeom>
+          <a:ln>
+            <a:noFill/>
+          </a:ln>
+        </p:spPr>
+        <p:style>
+          <a:lnRef idx="2">
+            <a:schemeClr val="accent1">
+              <a:shade val="50000"/>
+            </a:schemeClr>
+          </a:lnRef>
+          <a:fillRef idx="1">
+            <a:schemeClr val="accent1"/>
+          </a:fillRef>
+          <a:effectRef idx="0">
+            <a:schemeClr val="accent1"/>
+          </a:effectRef>
+          <a:fontRef idx="minor">
+            <a:schemeClr val="lt1"/>
+          </a:fontRef>
+        </p:style>
+        <p:txBody>
+          <a:bodyPr rtlCol="0" anchor="ctr"/>
+          <a:lstStyle/>
+          <a:p>
+            <a:pPr algn="ctr"/>
+            <a:endParaRPr lang="en-US"/>
+          </a:p>
+        </p:txBody>
+      </p:sp>
       <p:sp>
         <p:nvSpPr>
           <p:cNvPr id="2" name="Title 1">
@@ -8017,12 +12617,88 @@
             <p:ph type="title"/>
           </p:nvPr>
         </p:nvSpPr>
-        <p:spPr/>
+        <p:spPr>
+          <a:xfrm>
+            <a:off x="645064" y="525982"/>
+            <a:ext cx="4282983" cy="1200361"/>
+          </a:xfrm>
+        </p:spPr>
         <p:txBody>
-          <a:bodyPr/>
+          <a:bodyPr anchor="b">
+            <a:normAutofit/>
+          </a:bodyPr>
           <a:lstStyle/>
           <a:p>
-            <a:endParaRPr lang="en-IE"/>
+            <a:r>
+              <a:rPr lang="en-IE" sz="2800" b="1">
+                <a:latin typeface="Verdana" panose="020B0604030504040204" pitchFamily="34" charset="0"/>
+                <a:ea typeface="Verdana" panose="020B0604030504040204" pitchFamily="34" charset="0"/>
+              </a:rPr>
+              <a:t>Replication part 2: Summary statistics</a:t>
+            </a:r>
+          </a:p>
+        </p:txBody>
+      </p:sp>
+      <p:sp>
+        <p:nvSpPr>
+          <p:cNvPr id="24" name="Rectangle 23">
+            <a:extLst>
+              <a:ext uri="{FF2B5EF4-FFF2-40B4-BE49-F238E27FC236}">
+                <a16:creationId xmlns:a16="http://schemas.microsoft.com/office/drawing/2014/main" id="{169CC832-2974-4E8D-90ED-3E2941BA7336}"/>
+              </a:ext>
+              <a:ext uri="{C183D7F6-B498-43B3-948B-1728B52AA6E4}">
+                <adec:decorative xmlns:adec="http://schemas.microsoft.com/office/drawing/2017/decorative" val="1"/>
+              </a:ext>
+            </a:extLst>
+          </p:cNvPr>
+          <p:cNvSpPr>
+            <a:spLocks noGrp="1" noRot="1" noChangeAspect="1" noMove="1" noResize="1" noEditPoints="1" noAdjustHandles="1" noChangeArrowheads="1" noChangeShapeType="1" noTextEdit="1"/>
+          </p:cNvSpPr>
+          <p:nvPr>
+            <p:extLst>
+              <p:ext uri="{386F3935-93C4-4BCD-93E2-E3B085C9AB24}">
+                <p16:designElem xmlns:p16="http://schemas.microsoft.com/office/powerpoint/2015/main" val="1"/>
+              </p:ext>
+            </p:extLst>
+          </p:nvPr>
+        </p:nvSpPr>
+        <p:spPr>
+          <a:xfrm flipH="1">
+            <a:off x="616533" y="1944913"/>
+            <a:ext cx="4023360" cy="27432"/>
+          </a:xfrm>
+          <a:prstGeom prst="rect">
+            <a:avLst/>
+          </a:prstGeom>
+          <a:solidFill>
+            <a:schemeClr val="accent4"/>
+          </a:solidFill>
+          <a:ln>
+            <a:noFill/>
+          </a:ln>
+        </p:spPr>
+        <p:style>
+          <a:lnRef idx="2">
+            <a:schemeClr val="accent1">
+              <a:shade val="50000"/>
+            </a:schemeClr>
+          </a:lnRef>
+          <a:fillRef idx="1">
+            <a:schemeClr val="accent1"/>
+          </a:fillRef>
+          <a:effectRef idx="0">
+            <a:schemeClr val="accent1"/>
+          </a:effectRef>
+          <a:fontRef idx="minor">
+            <a:schemeClr val="lt1"/>
+          </a:fontRef>
+        </p:style>
+        <p:txBody>
+          <a:bodyPr rtlCol="0" anchor="ctr"/>
+          <a:lstStyle/>
+          <a:p>
+            <a:pPr algn="ctr"/>
+            <a:endParaRPr lang="en-US"/>
           </a:p>
         </p:txBody>
       </p:sp>
@@ -8042,21 +12718,312 @@
             <p:ph idx="1"/>
           </p:nvPr>
         </p:nvSpPr>
-        <p:spPr/>
+        <p:spPr>
+          <a:xfrm>
+            <a:off x="645066" y="2031101"/>
+            <a:ext cx="4282984" cy="3511943"/>
+          </a:xfrm>
+        </p:spPr>
         <p:txBody>
-          <a:bodyPr/>
+          <a:bodyPr anchor="ctr">
+            <a:normAutofit/>
+          </a:bodyPr>
           <a:lstStyle/>
           <a:p>
-            <a:endParaRPr lang="en-IE"/>
+            <a:pPr marL="0" indent="0">
+              <a:buNone/>
+            </a:pPr>
+            <a:r>
+              <a:rPr lang="en-IE" sz="1500" b="1" dirty="0"/>
+              <a:t>DV: </a:t>
+            </a:r>
+            <a:r>
+              <a:rPr lang="en-IE" sz="1500" dirty="0"/>
+              <a:t>RLP vote share.</a:t>
+            </a:r>
+          </a:p>
+          <a:p>
+            <a:pPr marL="0" indent="0">
+              <a:buNone/>
+            </a:pPr>
+            <a:r>
+              <a:rPr lang="en-IE" sz="1500" b="1" dirty="0"/>
+              <a:t>IVs: </a:t>
+            </a:r>
+            <a:r>
+              <a:rPr lang="en-IE" sz="1500" dirty="0"/>
+              <a:t>RLP econ rile &amp; RLP non-econ rile.</a:t>
+            </a:r>
+          </a:p>
+          <a:p>
+            <a:pPr marL="0" indent="0">
+              <a:buNone/>
+            </a:pPr>
+            <a:r>
+              <a:rPr lang="en-IE" sz="1500" b="1" dirty="0"/>
+              <a:t>Controls</a:t>
+            </a:r>
+          </a:p>
+          <a:p>
+            <a:r>
+              <a:rPr lang="en-IE" sz="1500" dirty="0"/>
+              <a:t>Previous election result.</a:t>
+            </a:r>
+          </a:p>
+          <a:p>
+            <a:r>
+              <a:rPr lang="en-IE" sz="1500" dirty="0"/>
+              <a:t>Turnout.</a:t>
+            </a:r>
+          </a:p>
+          <a:p>
+            <a:r>
+              <a:rPr lang="en-IE" sz="1500" dirty="0"/>
+              <a:t>Logged GDP &amp; Unemployment.</a:t>
+            </a:r>
+          </a:p>
+          <a:p>
+            <a:r>
+              <a:rPr lang="en-IE" sz="1500" dirty="0"/>
+              <a:t>Additional RLP competitor.</a:t>
+            </a:r>
+          </a:p>
+          <a:p>
+            <a:r>
+              <a:rPr lang="en-IE" sz="1500" dirty="0"/>
+              <a:t>In/supporting a government SD </a:t>
+            </a:r>
+            <a:r>
+              <a:rPr lang="en-IE" sz="1500" dirty="0" err="1"/>
+              <a:t>wogc</a:t>
+            </a:r>
+            <a:endParaRPr lang="en-IE" sz="1500" dirty="0"/>
+          </a:p>
+          <a:p>
+            <a:r>
+              <a:rPr lang="en-IE" sz="1500" b="1" dirty="0"/>
+              <a:t>SD related variables: </a:t>
+            </a:r>
+            <a:endParaRPr lang="en-IE" sz="1500" dirty="0"/>
+          </a:p>
+          <a:p>
+            <a:pPr lvl="1"/>
+            <a:r>
+              <a:rPr lang="en-IE" sz="1500" dirty="0"/>
+              <a:t>econ and non econ position.</a:t>
+            </a:r>
+          </a:p>
+          <a:p>
+            <a:pPr lvl="1"/>
+            <a:r>
+              <a:rPr lang="en-IE" sz="1500" dirty="0"/>
+              <a:t>Interaction - SD and RLP positions.</a:t>
+            </a:r>
+          </a:p>
+        </p:txBody>
+      </p:sp>
+      <p:sp>
+        <p:nvSpPr>
+          <p:cNvPr id="25" name="Rectangle 24">
+            <a:extLst>
+              <a:ext uri="{FF2B5EF4-FFF2-40B4-BE49-F238E27FC236}">
+                <a16:creationId xmlns:a16="http://schemas.microsoft.com/office/drawing/2014/main" id="{55222F96-971A-4F90-B841-6BAB416C7AC1}"/>
+              </a:ext>
+              <a:ext uri="{C183D7F6-B498-43B3-948B-1728B52AA6E4}">
+                <adec:decorative xmlns:adec="http://schemas.microsoft.com/office/drawing/2017/decorative" val="1"/>
+              </a:ext>
+            </a:extLst>
+          </p:cNvPr>
+          <p:cNvSpPr>
+            <a:spLocks noGrp="1" noRot="1" noChangeAspect="1" noMove="1" noResize="1" noEditPoints="1" noAdjustHandles="1" noChangeArrowheads="1" noChangeShapeType="1" noTextEdit="1"/>
+          </p:cNvSpPr>
+          <p:nvPr>
+            <p:extLst>
+              <p:ext uri="{386F3935-93C4-4BCD-93E2-E3B085C9AB24}">
+                <p16:designElem xmlns:p16="http://schemas.microsoft.com/office/powerpoint/2015/main" val="1"/>
+              </p:ext>
+            </p:extLst>
+          </p:nvPr>
+        </p:nvSpPr>
+        <p:spPr>
+          <a:xfrm rot="5400000">
+            <a:off x="-225843" y="6053360"/>
+            <a:ext cx="740664" cy="154124"/>
+          </a:xfrm>
+          <a:prstGeom prst="rect">
+            <a:avLst/>
+          </a:prstGeom>
+          <a:solidFill>
+            <a:schemeClr val="accent4"/>
+          </a:solidFill>
+          <a:ln>
+            <a:noFill/>
+          </a:ln>
+        </p:spPr>
+        <p:style>
+          <a:lnRef idx="2">
+            <a:schemeClr val="accent1">
+              <a:shade val="50000"/>
+            </a:schemeClr>
+          </a:lnRef>
+          <a:fillRef idx="1">
+            <a:schemeClr val="accent1"/>
+          </a:fillRef>
+          <a:effectRef idx="0">
+            <a:schemeClr val="accent1"/>
+          </a:effectRef>
+          <a:fontRef idx="minor">
+            <a:schemeClr val="lt1"/>
+          </a:fontRef>
+        </p:style>
+        <p:txBody>
+          <a:bodyPr rtlCol="0" anchor="ctr"/>
+          <a:lstStyle/>
+          <a:p>
+            <a:pPr algn="ctr"/>
+            <a:endParaRPr lang="en-US"/>
+          </a:p>
+        </p:txBody>
+      </p:sp>
+      <p:sp>
+        <p:nvSpPr>
+          <p:cNvPr id="26" name="Rectangle 25">
+            <a:extLst>
+              <a:ext uri="{FF2B5EF4-FFF2-40B4-BE49-F238E27FC236}">
+                <a16:creationId xmlns:a16="http://schemas.microsoft.com/office/drawing/2014/main" id="{08980754-6F4B-43C9-B9BE-127B6BED6586}"/>
+              </a:ext>
+              <a:ext uri="{C183D7F6-B498-43B3-948B-1728B52AA6E4}">
+                <adec:decorative xmlns:adec="http://schemas.microsoft.com/office/drawing/2017/decorative" val="1"/>
+              </a:ext>
+            </a:extLst>
+          </p:cNvPr>
+          <p:cNvSpPr>
+            <a:spLocks noGrp="1" noRot="1" noChangeAspect="1" noMove="1" noResize="1" noEditPoints="1" noAdjustHandles="1" noChangeArrowheads="1" noChangeShapeType="1" noTextEdit="1"/>
+          </p:cNvSpPr>
+          <p:nvPr>
+            <p:extLst>
+              <p:ext uri="{386F3935-93C4-4BCD-93E2-E3B085C9AB24}">
+                <p16:designElem xmlns:p16="http://schemas.microsoft.com/office/powerpoint/2015/main" val="1"/>
+              </p:ext>
+            </p:extLst>
+          </p:nvPr>
+        </p:nvSpPr>
+        <p:spPr>
+          <a:xfrm rot="5400000">
+            <a:off x="5904923" y="215201"/>
+            <a:ext cx="740664" cy="11833491"/>
+          </a:xfrm>
+          <a:prstGeom prst="rect">
+            <a:avLst/>
+          </a:prstGeom>
+          <a:solidFill>
+            <a:schemeClr val="accent4"/>
+          </a:solidFill>
+          <a:ln>
+            <a:noFill/>
+          </a:ln>
+        </p:spPr>
+        <p:style>
+          <a:lnRef idx="2">
+            <a:schemeClr val="accent1">
+              <a:shade val="50000"/>
+            </a:schemeClr>
+          </a:lnRef>
+          <a:fillRef idx="1">
+            <a:schemeClr val="accent1"/>
+          </a:fillRef>
+          <a:effectRef idx="0">
+            <a:schemeClr val="accent1"/>
+          </a:effectRef>
+          <a:fontRef idx="minor">
+            <a:schemeClr val="lt1"/>
+          </a:fontRef>
+        </p:style>
+        <p:txBody>
+          <a:bodyPr rtlCol="0" anchor="ctr"/>
+          <a:lstStyle/>
+          <a:p>
+            <a:pPr algn="ctr"/>
+            <a:endParaRPr lang="en-US"/>
+          </a:p>
+        </p:txBody>
+      </p:sp>
+      <p:sp>
+        <p:nvSpPr>
+          <p:cNvPr id="27" name="Rectangle 26">
+            <a:extLst>
+              <a:ext uri="{FF2B5EF4-FFF2-40B4-BE49-F238E27FC236}">
+                <a16:creationId xmlns:a16="http://schemas.microsoft.com/office/drawing/2014/main" id="{2C1BBA94-3F40-40AA-8BB9-E69E25E537C1}"/>
+              </a:ext>
+              <a:ext uri="{C183D7F6-B498-43B3-948B-1728B52AA6E4}">
+                <adec:decorative xmlns:adec="http://schemas.microsoft.com/office/drawing/2017/decorative" val="1"/>
+              </a:ext>
+            </a:extLst>
+          </p:cNvPr>
+          <p:cNvSpPr>
+            <a:spLocks noGrp="1" noRot="1" noChangeAspect="1" noMove="1" noResize="1" noEditPoints="1" noAdjustHandles="1" noChangeArrowheads="1" noChangeShapeType="1" noTextEdit="1"/>
+          </p:cNvSpPr>
+          <p:nvPr>
+            <p:extLst>
+              <p:ext uri="{386F3935-93C4-4BCD-93E2-E3B085C9AB24}">
+                <p16:designElem xmlns:p16="http://schemas.microsoft.com/office/powerpoint/2015/main" val="1"/>
+              </p:ext>
+            </p:extLst>
+          </p:nvPr>
+        </p:nvSpPr>
+        <p:spPr>
+          <a:xfrm>
+            <a:off x="5696793" y="354959"/>
+            <a:ext cx="6184973" cy="5915212"/>
+          </a:xfrm>
+          <a:prstGeom prst="rect">
+            <a:avLst/>
+          </a:prstGeom>
+          <a:solidFill>
+            <a:schemeClr val="bg1"/>
+          </a:solidFill>
+          <a:ln>
+            <a:noFill/>
+          </a:ln>
+          <a:effectLst>
+            <a:outerShdw blurRad="139700" dist="127000" dir="5400000" algn="t" rotWithShape="0">
+              <a:prstClr val="black">
+                <a:alpha val="15000"/>
+              </a:prstClr>
+            </a:outerShdw>
+          </a:effectLst>
+        </p:spPr>
+        <p:style>
+          <a:lnRef idx="2">
+            <a:schemeClr val="accent1">
+              <a:shade val="50000"/>
+            </a:schemeClr>
+          </a:lnRef>
+          <a:fillRef idx="1">
+            <a:schemeClr val="accent1"/>
+          </a:fillRef>
+          <a:effectRef idx="0">
+            <a:schemeClr val="accent1"/>
+          </a:effectRef>
+          <a:fontRef idx="minor">
+            <a:schemeClr val="lt1"/>
+          </a:fontRef>
+        </p:style>
+        <p:txBody>
+          <a:bodyPr rtlCol="0" anchor="ctr"/>
+          <a:lstStyle/>
+          <a:p>
+            <a:pPr algn="ctr"/>
+            <a:endParaRPr lang="en-US"/>
           </a:p>
         </p:txBody>
       </p:sp>
       <p:pic>
         <p:nvPicPr>
-          <p:cNvPr id="5" name="Picture 4">
-            <a:extLst>
-              <a:ext uri="{FF2B5EF4-FFF2-40B4-BE49-F238E27FC236}">
-                <a16:creationId xmlns:a16="http://schemas.microsoft.com/office/drawing/2014/main" id="{FC759494-2596-4C1D-3D78-7970DD851734}"/>
+          <p:cNvPr id="6" name="Picture 5">
+            <a:extLst>
+              <a:ext uri="{FF2B5EF4-FFF2-40B4-BE49-F238E27FC236}">
+                <a16:creationId xmlns:a16="http://schemas.microsoft.com/office/drawing/2014/main" id="{821015F3-C099-DB67-55F1-641E5393283A}"/>
               </a:ext>
             </a:extLst>
           </p:cNvPr>
@@ -8073,8 +13040,8 @@
         </p:blipFill>
         <p:spPr>
           <a:xfrm>
-            <a:off x="2037717" y="781621"/>
-            <a:ext cx="8116565" cy="5001464"/>
+            <a:off x="5987738" y="1427179"/>
+            <a:ext cx="5628018" cy="3770771"/>
           </a:xfrm>
           <a:prstGeom prst="rect">
             <a:avLst/>
@@ -8085,230 +13052,6 @@
     <p:extLst>
       <p:ext uri="{BB962C8B-B14F-4D97-AF65-F5344CB8AC3E}">
         <p14:creationId xmlns:p14="http://schemas.microsoft.com/office/powerpoint/2010/main" val="2616912587"/>
-      </p:ext>
-    </p:extLst>
-  </p:cSld>
-  <p:clrMapOvr>
-    <a:masterClrMapping/>
-  </p:clrMapOvr>
-</p:sld>
-</file>
-
-<file path=ppt/slides/slide8.xml><?xml version="1.0" encoding="utf-8"?>
-<p:sld xmlns:a="http://schemas.openxmlformats.org/drawingml/2006/main" xmlns:r="http://schemas.openxmlformats.org/officeDocument/2006/relationships" xmlns:p="http://schemas.openxmlformats.org/presentationml/2006/main">
-  <p:cSld>
-    <p:spTree>
-      <p:nvGrpSpPr>
-        <p:cNvPr id="1" name=""/>
-        <p:cNvGrpSpPr/>
-        <p:nvPr/>
-      </p:nvGrpSpPr>
-      <p:grpSpPr>
-        <a:xfrm>
-          <a:off x="0" y="0"/>
-          <a:ext cx="0" cy="0"/>
-          <a:chOff x="0" y="0"/>
-          <a:chExt cx="0" cy="0"/>
-        </a:xfrm>
-      </p:grpSpPr>
-      <p:sp>
-        <p:nvSpPr>
-          <p:cNvPr id="2" name="Title 1">
-            <a:extLst>
-              <a:ext uri="{FF2B5EF4-FFF2-40B4-BE49-F238E27FC236}">
-                <a16:creationId xmlns:a16="http://schemas.microsoft.com/office/drawing/2014/main" id="{777A5E61-73B1-744D-B3DF-948FFAC86125}"/>
-              </a:ext>
-            </a:extLst>
-          </p:cNvPr>
-          <p:cNvSpPr>
-            <a:spLocks noGrp="1"/>
-          </p:cNvSpPr>
-          <p:nvPr>
-            <p:ph type="title"/>
-          </p:nvPr>
-        </p:nvSpPr>
-        <p:spPr/>
-        <p:txBody>
-          <a:bodyPr/>
-          <a:lstStyle/>
-          <a:p>
-            <a:endParaRPr lang="en-IE" dirty="0"/>
-          </a:p>
-        </p:txBody>
-      </p:sp>
-      <p:sp>
-        <p:nvSpPr>
-          <p:cNvPr id="3" name="Content Placeholder 2">
-            <a:extLst>
-              <a:ext uri="{FF2B5EF4-FFF2-40B4-BE49-F238E27FC236}">
-                <a16:creationId xmlns:a16="http://schemas.microsoft.com/office/drawing/2014/main" id="{C50329FD-A7F1-47DF-54DD-BC573B81BFE0}"/>
-              </a:ext>
-            </a:extLst>
-          </p:cNvPr>
-          <p:cNvSpPr>
-            <a:spLocks noGrp="1"/>
-          </p:cNvSpPr>
-          <p:nvPr>
-            <p:ph idx="1"/>
-          </p:nvPr>
-        </p:nvSpPr>
-        <p:spPr/>
-        <p:txBody>
-          <a:bodyPr/>
-          <a:lstStyle/>
-          <a:p>
-            <a:endParaRPr lang="en-IE"/>
-          </a:p>
-        </p:txBody>
-      </p:sp>
-      <p:pic>
-        <p:nvPicPr>
-          <p:cNvPr id="5" name="Picture 4">
-            <a:extLst>
-              <a:ext uri="{FF2B5EF4-FFF2-40B4-BE49-F238E27FC236}">
-                <a16:creationId xmlns:a16="http://schemas.microsoft.com/office/drawing/2014/main" id="{4AE1E1BC-39D4-EE57-31EB-B83E80568852}"/>
-              </a:ext>
-            </a:extLst>
-          </p:cNvPr>
-          <p:cNvPicPr>
-            <a:picLocks noChangeAspect="1"/>
-          </p:cNvPicPr>
-          <p:nvPr/>
-        </p:nvPicPr>
-        <p:blipFill>
-          <a:blip r:embed="rId2"/>
-          <a:stretch>
-            <a:fillRect/>
-          </a:stretch>
-        </p:blipFill>
-        <p:spPr>
-          <a:xfrm>
-            <a:off x="3543992" y="28359"/>
-            <a:ext cx="5104015" cy="6801282"/>
-          </a:xfrm>
-          <a:prstGeom prst="rect">
-            <a:avLst/>
-          </a:prstGeom>
-        </p:spPr>
-      </p:pic>
-    </p:spTree>
-    <p:extLst>
-      <p:ext uri="{BB962C8B-B14F-4D97-AF65-F5344CB8AC3E}">
-        <p14:creationId xmlns:p14="http://schemas.microsoft.com/office/powerpoint/2010/main" val="3376276946"/>
-      </p:ext>
-    </p:extLst>
-  </p:cSld>
-  <p:clrMapOvr>
-    <a:masterClrMapping/>
-  </p:clrMapOvr>
-</p:sld>
-</file>
-
-<file path=ppt/slides/slide9.xml><?xml version="1.0" encoding="utf-8"?>
-<p:sld xmlns:a="http://schemas.openxmlformats.org/drawingml/2006/main" xmlns:r="http://schemas.openxmlformats.org/officeDocument/2006/relationships" xmlns:p="http://schemas.openxmlformats.org/presentationml/2006/main">
-  <p:cSld>
-    <p:spTree>
-      <p:nvGrpSpPr>
-        <p:cNvPr id="1" name=""/>
-        <p:cNvGrpSpPr/>
-        <p:nvPr/>
-      </p:nvGrpSpPr>
-      <p:grpSpPr>
-        <a:xfrm>
-          <a:off x="0" y="0"/>
-          <a:ext cx="0" cy="0"/>
-          <a:chOff x="0" y="0"/>
-          <a:chExt cx="0" cy="0"/>
-        </a:xfrm>
-      </p:grpSpPr>
-      <p:sp>
-        <p:nvSpPr>
-          <p:cNvPr id="2" name="Title 1">
-            <a:extLst>
-              <a:ext uri="{FF2B5EF4-FFF2-40B4-BE49-F238E27FC236}">
-                <a16:creationId xmlns:a16="http://schemas.microsoft.com/office/drawing/2014/main" id="{E313EEE7-AC17-2182-D9DC-D6902B7A3F36}"/>
-              </a:ext>
-            </a:extLst>
-          </p:cNvPr>
-          <p:cNvSpPr>
-            <a:spLocks noGrp="1"/>
-          </p:cNvSpPr>
-          <p:nvPr>
-            <p:ph type="title"/>
-          </p:nvPr>
-        </p:nvSpPr>
-        <p:spPr/>
-        <p:txBody>
-          <a:bodyPr/>
-          <a:lstStyle/>
-          <a:p>
-            <a:r>
-              <a:rPr lang="en-GB" dirty="0"/>
-              <a:t>My coding journey</a:t>
-            </a:r>
-            <a:endParaRPr lang="en-IE" dirty="0"/>
-          </a:p>
-        </p:txBody>
-      </p:sp>
-      <p:sp>
-        <p:nvSpPr>
-          <p:cNvPr id="3" name="Content Placeholder 2">
-            <a:extLst>
-              <a:ext uri="{FF2B5EF4-FFF2-40B4-BE49-F238E27FC236}">
-                <a16:creationId xmlns:a16="http://schemas.microsoft.com/office/drawing/2014/main" id="{7E7764B9-16E9-7189-E5CB-BA7FD135DF53}"/>
-              </a:ext>
-            </a:extLst>
-          </p:cNvPr>
-          <p:cNvSpPr>
-            <a:spLocks noGrp="1"/>
-          </p:cNvSpPr>
-          <p:nvPr>
-            <p:ph idx="1"/>
-          </p:nvPr>
-        </p:nvSpPr>
-        <p:spPr/>
-        <p:txBody>
-          <a:bodyPr/>
-          <a:lstStyle/>
-          <a:p>
-            <a:r>
-              <a:rPr lang="en-IE" dirty="0"/>
-              <a:t>Using previously coded data for masters thesis which codes for key centre-right party and data. </a:t>
-            </a:r>
-          </a:p>
-          <a:p>
-            <a:r>
-              <a:rPr lang="en-IE" b="1" dirty="0"/>
-              <a:t>Steps:</a:t>
-            </a:r>
-          </a:p>
-          <a:p>
-            <a:pPr lvl="1"/>
-            <a:r>
-              <a:rPr lang="en-IE" dirty="0"/>
-              <a:t>Code MAPOR data in-line with Lowe, et al. (2011) – as done by paper.</a:t>
-            </a:r>
-          </a:p>
-          <a:p>
-            <a:pPr lvl="1"/>
-            <a:r>
-              <a:rPr lang="en-IE" dirty="0"/>
-              <a:t>Calculate difference in position between parties.</a:t>
-            </a:r>
-          </a:p>
-          <a:p>
-            <a:pPr lvl="1"/>
-            <a:r>
-              <a:rPr lang="en-IE" dirty="0"/>
-              <a:t>Additional interaction variables between RLP positions and this difference. </a:t>
-            </a:r>
-          </a:p>
-        </p:txBody>
-      </p:sp>
-    </p:spTree>
-    <p:extLst>
-      <p:ext uri="{BB962C8B-B14F-4D97-AF65-F5344CB8AC3E}">
-        <p14:creationId xmlns:p14="http://schemas.microsoft.com/office/powerpoint/2010/main" val="519172753"/>
       </p:ext>
     </p:extLst>
   </p:cSld>
@@ -8631,4 +13374,319 @@
     </a:ext>
   </a:extLst>
 </a:theme>
+</file>
+
+<file path=ppt/theme/theme2.xml><?xml version="1.0" encoding="utf-8"?>
+<a:theme xmlns:a="http://schemas.openxmlformats.org/drawingml/2006/main" name="Office Theme">
+  <a:themeElements>
+    <a:clrScheme name="Office">
+      <a:dk1>
+        <a:sysClr val="windowText" lastClr="000000"/>
+      </a:dk1>
+      <a:lt1>
+        <a:sysClr val="window" lastClr="FFFFFF"/>
+      </a:lt1>
+      <a:dk2>
+        <a:srgbClr val="0E2841"/>
+      </a:dk2>
+      <a:lt2>
+        <a:srgbClr val="E8E8E8"/>
+      </a:lt2>
+      <a:accent1>
+        <a:srgbClr val="156082"/>
+      </a:accent1>
+      <a:accent2>
+        <a:srgbClr val="E97132"/>
+      </a:accent2>
+      <a:accent3>
+        <a:srgbClr val="196B24"/>
+      </a:accent3>
+      <a:accent4>
+        <a:srgbClr val="0F9ED5"/>
+      </a:accent4>
+      <a:accent5>
+        <a:srgbClr val="A02B93"/>
+      </a:accent5>
+      <a:accent6>
+        <a:srgbClr val="4EA72E"/>
+      </a:accent6>
+      <a:hlink>
+        <a:srgbClr val="467886"/>
+      </a:hlink>
+      <a:folHlink>
+        <a:srgbClr val="96607D"/>
+      </a:folHlink>
+    </a:clrScheme>
+    <a:fontScheme name="Office">
+      <a:majorFont>
+        <a:latin typeface="Aptos Display" panose="02110004020202020204"/>
+        <a:ea typeface=""/>
+        <a:cs typeface=""/>
+        <a:font script="Jpan" typeface="游ゴシック Light"/>
+        <a:font script="Hang" typeface="맑은 고딕"/>
+        <a:font script="Hans" typeface="等线 Light"/>
+        <a:font script="Hant" typeface="新細明體"/>
+        <a:font script="Arab" typeface="Times New Roman"/>
+        <a:font script="Hebr" typeface="Times New Roman"/>
+        <a:font script="Thai" typeface="Angsana New"/>
+        <a:font script="Ethi" typeface="Nyala"/>
+        <a:font script="Beng" typeface="Vrinda"/>
+        <a:font script="Gujr" typeface="Shruti"/>
+        <a:font script="Khmr" typeface="MoolBoran"/>
+        <a:font script="Knda" typeface="Tunga"/>
+        <a:font script="Guru" typeface="Raavi"/>
+        <a:font script="Cans" typeface="Euphemia"/>
+        <a:font script="Cher" typeface="Plantagenet Cherokee"/>
+        <a:font script="Yiii" typeface="Microsoft Yi Baiti"/>
+        <a:font script="Tibt" typeface="Microsoft Himalaya"/>
+        <a:font script="Thaa" typeface="MV Boli"/>
+        <a:font script="Deva" typeface="Mangal"/>
+        <a:font script="Telu" typeface="Gautami"/>
+        <a:font script="Taml" typeface="Latha"/>
+        <a:font script="Syrc" typeface="Estrangelo Edessa"/>
+        <a:font script="Orya" typeface="Kalinga"/>
+        <a:font script="Mlym" typeface="Kartika"/>
+        <a:font script="Laoo" typeface="DokChampa"/>
+        <a:font script="Sinh" typeface="Iskoola Pota"/>
+        <a:font script="Mong" typeface="Mongolian Baiti"/>
+        <a:font script="Viet" typeface="Times New Roman"/>
+        <a:font script="Uigh" typeface="Microsoft Uighur"/>
+        <a:font script="Geor" typeface="Sylfaen"/>
+        <a:font script="Armn" typeface="Arial"/>
+        <a:font script="Bugi" typeface="Leelawadee UI"/>
+        <a:font script="Bopo" typeface="Microsoft JhengHei"/>
+        <a:font script="Java" typeface="Javanese Text"/>
+        <a:font script="Lisu" typeface="Segoe UI"/>
+        <a:font script="Mymr" typeface="Myanmar Text"/>
+        <a:font script="Nkoo" typeface="Ebrima"/>
+        <a:font script="Olck" typeface="Nirmala UI"/>
+        <a:font script="Osma" typeface="Ebrima"/>
+        <a:font script="Phag" typeface="Phagspa"/>
+        <a:font script="Syrn" typeface="Estrangelo Edessa"/>
+        <a:font script="Syrj" typeface="Estrangelo Edessa"/>
+        <a:font script="Syre" typeface="Estrangelo Edessa"/>
+        <a:font script="Sora" typeface="Nirmala UI"/>
+        <a:font script="Tale" typeface="Microsoft Tai Le"/>
+        <a:font script="Talu" typeface="Microsoft New Tai Lue"/>
+        <a:font script="Tfng" typeface="Ebrima"/>
+      </a:majorFont>
+      <a:minorFont>
+        <a:latin typeface="Aptos" panose="02110004020202020204"/>
+        <a:ea typeface=""/>
+        <a:cs typeface=""/>
+        <a:font script="Jpan" typeface="游ゴシック"/>
+        <a:font script="Hang" typeface="맑은 고딕"/>
+        <a:font script="Hans" typeface="等线"/>
+        <a:font script="Hant" typeface="新細明體"/>
+        <a:font script="Arab" typeface="Arial"/>
+        <a:font script="Hebr" typeface="Arial"/>
+        <a:font script="Thai" typeface="Cordia New"/>
+        <a:font script="Ethi" typeface="Nyala"/>
+        <a:font script="Beng" typeface="Vrinda"/>
+        <a:font script="Gujr" typeface="Shruti"/>
+        <a:font script="Khmr" typeface="DaunPenh"/>
+        <a:font script="Knda" typeface="Tunga"/>
+        <a:font script="Guru" typeface="Raavi"/>
+        <a:font script="Cans" typeface="Euphemia"/>
+        <a:font script="Cher" typeface="Plantagenet Cherokee"/>
+        <a:font script="Yiii" typeface="Microsoft Yi Baiti"/>
+        <a:font script="Tibt" typeface="Microsoft Himalaya"/>
+        <a:font script="Thaa" typeface="MV Boli"/>
+        <a:font script="Deva" typeface="Mangal"/>
+        <a:font script="Telu" typeface="Gautami"/>
+        <a:font script="Taml" typeface="Latha"/>
+        <a:font script="Syrc" typeface="Estrangelo Edessa"/>
+        <a:font script="Orya" typeface="Kalinga"/>
+        <a:font script="Mlym" typeface="Kartika"/>
+        <a:font script="Laoo" typeface="DokChampa"/>
+        <a:font script="Sinh" typeface="Iskoola Pota"/>
+        <a:font script="Mong" typeface="Mongolian Baiti"/>
+        <a:font script="Viet" typeface="Arial"/>
+        <a:font script="Uigh" typeface="Microsoft Uighur"/>
+        <a:font script="Geor" typeface="Sylfaen"/>
+        <a:font script="Armn" typeface="Arial"/>
+        <a:font script="Bugi" typeface="Leelawadee UI"/>
+        <a:font script="Bopo" typeface="Microsoft JhengHei"/>
+        <a:font script="Java" typeface="Javanese Text"/>
+        <a:font script="Lisu" typeface="Segoe UI"/>
+        <a:font script="Mymr" typeface="Myanmar Text"/>
+        <a:font script="Nkoo" typeface="Ebrima"/>
+        <a:font script="Olck" typeface="Nirmala UI"/>
+        <a:font script="Osma" typeface="Ebrima"/>
+        <a:font script="Phag" typeface="Phagspa"/>
+        <a:font script="Syrn" typeface="Estrangelo Edessa"/>
+        <a:font script="Syrj" typeface="Estrangelo Edessa"/>
+        <a:font script="Syre" typeface="Estrangelo Edessa"/>
+        <a:font script="Sora" typeface="Nirmala UI"/>
+        <a:font script="Tale" typeface="Microsoft Tai Le"/>
+        <a:font script="Talu" typeface="Microsoft New Tai Lue"/>
+        <a:font script="Tfng" typeface="Ebrima"/>
+      </a:minorFont>
+    </a:fontScheme>
+    <a:fmtScheme name="Office">
+      <a:fillStyleLst>
+        <a:solidFill>
+          <a:schemeClr val="phClr"/>
+        </a:solidFill>
+        <a:gradFill rotWithShape="1">
+          <a:gsLst>
+            <a:gs pos="0">
+              <a:schemeClr val="phClr">
+                <a:lumMod val="110000"/>
+                <a:satMod val="105000"/>
+                <a:tint val="67000"/>
+              </a:schemeClr>
+            </a:gs>
+            <a:gs pos="50000">
+              <a:schemeClr val="phClr">
+                <a:lumMod val="105000"/>
+                <a:satMod val="103000"/>
+                <a:tint val="73000"/>
+              </a:schemeClr>
+            </a:gs>
+            <a:gs pos="100000">
+              <a:schemeClr val="phClr">
+                <a:lumMod val="105000"/>
+                <a:satMod val="109000"/>
+                <a:tint val="81000"/>
+              </a:schemeClr>
+            </a:gs>
+          </a:gsLst>
+          <a:lin ang="5400000" scaled="0"/>
+        </a:gradFill>
+        <a:gradFill rotWithShape="1">
+          <a:gsLst>
+            <a:gs pos="0">
+              <a:schemeClr val="phClr">
+                <a:satMod val="103000"/>
+                <a:lumMod val="102000"/>
+                <a:tint val="94000"/>
+              </a:schemeClr>
+            </a:gs>
+            <a:gs pos="50000">
+              <a:schemeClr val="phClr">
+                <a:satMod val="110000"/>
+                <a:lumMod val="100000"/>
+                <a:shade val="100000"/>
+              </a:schemeClr>
+            </a:gs>
+            <a:gs pos="100000">
+              <a:schemeClr val="phClr">
+                <a:lumMod val="99000"/>
+                <a:satMod val="120000"/>
+                <a:shade val="78000"/>
+              </a:schemeClr>
+            </a:gs>
+          </a:gsLst>
+          <a:lin ang="5400000" scaled="0"/>
+        </a:gradFill>
+      </a:fillStyleLst>
+      <a:lnStyleLst>
+        <a:ln w="12700" cap="flat" cmpd="sng" algn="ctr">
+          <a:solidFill>
+            <a:schemeClr val="phClr"/>
+          </a:solidFill>
+          <a:prstDash val="solid"/>
+          <a:miter lim="800000"/>
+        </a:ln>
+        <a:ln w="19050" cap="flat" cmpd="sng" algn="ctr">
+          <a:solidFill>
+            <a:schemeClr val="phClr"/>
+          </a:solidFill>
+          <a:prstDash val="solid"/>
+          <a:miter lim="800000"/>
+        </a:ln>
+        <a:ln w="25400" cap="flat" cmpd="sng" algn="ctr">
+          <a:solidFill>
+            <a:schemeClr val="phClr"/>
+          </a:solidFill>
+          <a:prstDash val="solid"/>
+          <a:miter lim="800000"/>
+        </a:ln>
+      </a:lnStyleLst>
+      <a:effectStyleLst>
+        <a:effectStyle>
+          <a:effectLst/>
+        </a:effectStyle>
+        <a:effectStyle>
+          <a:effectLst/>
+        </a:effectStyle>
+        <a:effectStyle>
+          <a:effectLst>
+            <a:outerShdw blurRad="57150" dist="19050" dir="5400000" algn="ctr" rotWithShape="0">
+              <a:srgbClr val="000000">
+                <a:alpha val="63000"/>
+              </a:srgbClr>
+            </a:outerShdw>
+          </a:effectLst>
+        </a:effectStyle>
+      </a:effectStyleLst>
+      <a:bgFillStyleLst>
+        <a:solidFill>
+          <a:schemeClr val="phClr"/>
+        </a:solidFill>
+        <a:solidFill>
+          <a:schemeClr val="phClr">
+            <a:tint val="95000"/>
+            <a:satMod val="170000"/>
+          </a:schemeClr>
+        </a:solidFill>
+        <a:gradFill rotWithShape="1">
+          <a:gsLst>
+            <a:gs pos="0">
+              <a:schemeClr val="phClr">
+                <a:tint val="93000"/>
+                <a:satMod val="150000"/>
+                <a:shade val="98000"/>
+                <a:lumMod val="102000"/>
+              </a:schemeClr>
+            </a:gs>
+            <a:gs pos="50000">
+              <a:schemeClr val="phClr">
+                <a:tint val="98000"/>
+                <a:satMod val="130000"/>
+                <a:shade val="90000"/>
+                <a:lumMod val="103000"/>
+              </a:schemeClr>
+            </a:gs>
+            <a:gs pos="100000">
+              <a:schemeClr val="phClr">
+                <a:shade val="63000"/>
+                <a:satMod val="120000"/>
+              </a:schemeClr>
+            </a:gs>
+          </a:gsLst>
+          <a:lin ang="5400000" scaled="0"/>
+        </a:gradFill>
+      </a:bgFillStyleLst>
+    </a:fmtScheme>
+  </a:themeElements>
+  <a:objectDefaults>
+    <a:lnDef>
+      <a:spPr/>
+      <a:bodyPr/>
+      <a:lstStyle/>
+      <a:style>
+        <a:lnRef idx="2">
+          <a:schemeClr val="accent1"/>
+        </a:lnRef>
+        <a:fillRef idx="0">
+          <a:schemeClr val="accent1"/>
+        </a:fillRef>
+        <a:effectRef idx="1">
+          <a:schemeClr val="accent1"/>
+        </a:effectRef>
+        <a:fontRef idx="minor">
+          <a:schemeClr val="tx1"/>
+        </a:fontRef>
+      </a:style>
+    </a:lnDef>
+  </a:objectDefaults>
+  <a:extraClrSchemeLst/>
+  <a:extLst>
+    <a:ext uri="{05A4C25C-085E-4340-85A3-A5531E510DB2}">
+      <thm15:themeFamily xmlns:thm15="http://schemas.microsoft.com/office/thememl/2012/main" name="Office Theme" id="{2E142A2C-CD16-42D6-873A-C26D2A0506FA}" vid="{1BDDFF52-6CD6-40A5-AB3C-68EB2F1E4D0A}"/>
+    </a:ext>
+  </a:extLst>
+</a:theme>
 </file>